--- a/docs/entrega_sprint_2/apresentacao/EC_Sprint_2_1TSCO_EvidenciasConstrucao_MedFlow_OmegaUrbanTech.pptx
+++ b/docs/entrega_sprint_2/apresentacao/EC_Sprint_2_1TSCO_EvidenciasConstrucao_MedFlow_OmegaUrbanTech.pptx
@@ -23360,7 +23360,7 @@
         </p:nvSpPr>
         <p:spPr>
           <a:xfrm>
-            <a:off x="548640" y="4224528"/>
+            <a:off x="548640" y="5065776"/>
             <a:ext cx="11091672" cy="7315"/>
           </a:xfrm>
           <a:prstGeom prst="rect">
@@ -23403,7 +23403,7 @@
         </p:nvSpPr>
         <p:spPr>
           <a:xfrm>
-            <a:off x="548640" y="4370832"/>
+            <a:off x="548640" y="5212080"/>
             <a:ext cx="3840480" cy="182880"/>
           </a:xfrm>
           <a:prstGeom prst="rect">
@@ -23442,7 +23442,7 @@
         </p:nvSpPr>
         <p:spPr>
           <a:xfrm>
-            <a:off x="548640" y="4608576"/>
+            <a:off x="548640" y="5449824"/>
             <a:ext cx="5486400" cy="548640"/>
           </a:xfrm>
           <a:prstGeom prst="rect">
@@ -23481,7 +23481,7 @@
         </p:nvSpPr>
         <p:spPr>
           <a:xfrm>
-            <a:off x="6355080" y="4370832"/>
+            <a:off x="6355080" y="5212080"/>
             <a:ext cx="5285232" cy="822960"/>
           </a:xfrm>
           <a:prstGeom prst="rect">
@@ -24976,7 +24976,7 @@
         <p:spPr>
           <a:xfrm>
             <a:off x="548640" y="1874519"/>
-            <a:ext cx="3566160" cy="1691640"/>
+            <a:ext cx="3566160" cy="1417320"/>
           </a:xfrm>
           <a:prstGeom prst="rect">
             <a:avLst/>
@@ -25138,7 +25138,7 @@
         <p:spPr>
           <a:xfrm>
             <a:off x="4315968" y="1874519"/>
-            <a:ext cx="3566160" cy="1691640"/>
+            <a:ext cx="3566160" cy="1417320"/>
           </a:xfrm>
           <a:prstGeom prst="rect">
             <a:avLst/>
@@ -25300,7 +25300,7 @@
         <p:spPr>
           <a:xfrm>
             <a:off x="8083296" y="1874519"/>
-            <a:ext cx="3566160" cy="1691640"/>
+            <a:ext cx="3566160" cy="1417320"/>
           </a:xfrm>
           <a:prstGeom prst="rect">
             <a:avLst/>
@@ -25461,8 +25461,8 @@
         </p:nvSpPr>
         <p:spPr>
           <a:xfrm>
-            <a:off x="548640" y="3840480"/>
-            <a:ext cx="11091672" cy="1783080"/>
+            <a:off x="548640" y="3657600"/>
+            <a:ext cx="11091672" cy="1627632"/>
           </a:xfrm>
           <a:prstGeom prst="rect">
             <a:avLst/>
@@ -25504,7 +25504,7 @@
         </p:nvSpPr>
         <p:spPr>
           <a:xfrm>
-            <a:off x="786384" y="4041648"/>
+            <a:off x="786384" y="3877056"/>
             <a:ext cx="3840480" cy="219456"/>
           </a:xfrm>
           <a:prstGeom prst="rect">
@@ -25543,7 +25543,7 @@
         </p:nvSpPr>
         <p:spPr>
           <a:xfrm>
-            <a:off x="786384" y="4443984"/>
+            <a:off x="786384" y="4297680"/>
             <a:ext cx="329184" cy="201168"/>
           </a:xfrm>
           <a:prstGeom prst="rect">
@@ -25582,7 +25582,7 @@
         </p:nvSpPr>
         <p:spPr>
           <a:xfrm>
-            <a:off x="1152144" y="4425696"/>
+            <a:off x="1152144" y="4279392"/>
             <a:ext cx="3017520" cy="1005840"/>
           </a:xfrm>
           <a:prstGeom prst="rect">
@@ -25602,7 +25602,7 @@
               </a:lnSpc>
             </a:pPr>
             <a:r>
-              <a:rPr sz="880" b="0">
+              <a:rPr sz="919" b="0">
                 <a:solidFill>
                   <a:srgbClr val="2D3748"/>
                 </a:solidFill>
@@ -25621,7 +25621,7 @@
         </p:nvSpPr>
         <p:spPr>
           <a:xfrm>
-            <a:off x="4425696" y="4443984"/>
+            <a:off x="4425696" y="4297680"/>
             <a:ext cx="329184" cy="201168"/>
           </a:xfrm>
           <a:prstGeom prst="rect">
@@ -25660,7 +25660,7 @@
         </p:nvSpPr>
         <p:spPr>
           <a:xfrm>
-            <a:off x="4791456" y="4425696"/>
+            <a:off x="4791456" y="4279392"/>
             <a:ext cx="3017520" cy="1005840"/>
           </a:xfrm>
           <a:prstGeom prst="rect">
@@ -25680,7 +25680,7 @@
               </a:lnSpc>
             </a:pPr>
             <a:r>
-              <a:rPr sz="880" b="0">
+              <a:rPr sz="919" b="0">
                 <a:solidFill>
                   <a:srgbClr val="2D3748"/>
                 </a:solidFill>
@@ -25699,7 +25699,7 @@
         </p:nvSpPr>
         <p:spPr>
           <a:xfrm>
-            <a:off x="8065008" y="4443984"/>
+            <a:off x="8065008" y="4297680"/>
             <a:ext cx="329184" cy="201168"/>
           </a:xfrm>
           <a:prstGeom prst="rect">
@@ -25738,7 +25738,7 @@
         </p:nvSpPr>
         <p:spPr>
           <a:xfrm>
-            <a:off x="8430768" y="4425696"/>
+            <a:off x="8430768" y="4279392"/>
             <a:ext cx="3017520" cy="1005840"/>
           </a:xfrm>
           <a:prstGeom prst="rect">
@@ -25758,7 +25758,7 @@
               </a:lnSpc>
             </a:pPr>
             <a:r>
-              <a:rPr sz="880" b="0">
+              <a:rPr sz="919" b="0">
                 <a:solidFill>
                   <a:srgbClr val="2D3748"/>
                 </a:solidFill>
@@ -25777,7 +25777,7 @@
         </p:nvSpPr>
         <p:spPr>
           <a:xfrm>
-            <a:off x="548640" y="5779008"/>
+            <a:off x="548640" y="5623560"/>
             <a:ext cx="11091672" cy="274320"/>
           </a:xfrm>
           <a:prstGeom prst="rect">

--- a/docs/entrega_sprint_2/apresentacao/EC_Sprint_2_1TSCO_EvidenciasConstrucao_MedFlow_OmegaUrbanTech.pptx
+++ b/docs/entrega_sprint_2/apresentacao/EC_Sprint_2_1TSCO_EvidenciasConstrucao_MedFlow_OmegaUrbanTech.pptx
@@ -23,11 +23,9 @@
     <p:sldId id="272" r:id="rId14"/>
     <p:sldId id="273" r:id="rId15"/>
     <p:sldId id="274" r:id="rId16"/>
-    <p:sldId id="276" r:id="rId17"/>
     <p:sldId id="277" r:id="rId18"/>
     <p:sldId id="279" r:id="rId19"/>
     <p:sldId id="281" r:id="rId20"/>
-    <p:sldId id="282" r:id="rId21"/>
     <p:sldId id="283" r:id="rId22"/>
     <p:sldId id="286" r:id="rId29"/>
     <p:sldId id="285" r:id="rId23"/>
@@ -652,8 +650,7 @@
           <a:lstStyle/>
           <a:p>
             <a:r>
-              <a:rPr lang="en-US" dirty="0"/>
-              <a:t>As visões preservam filtros por URL e distinguem ausência legítima, falha de endpoint e contingência — três estados que costumam ser confundidos em painéis.</a:t>
+              <a:t>As quatro visões preservam o filtro na URL e distinguem ausência legítima, falha de endpoint e contingência — três estados que costumam ser confundidos em painéis. As duas telas ao lado são o produto público, capturadas do link que o avaliador abre.</a:t>
             </a:r>
           </a:p>
         </p:txBody>
@@ -826,8 +823,7 @@
           <a:lstStyle/>
           <a:p>
             <a:r>
-              <a:rPr lang="en-US" dirty="0"/>
-              <a:t>Cada indicador carrega seu limite. O IPH é o exemplo mais importante: é pressão estimada sobre capacidade declarada, nunca taxa de ocupação real.</a:t>
+              <a:t>Cada indicador carrega o próprio limite ao lado da fórmula, e a faixa de baixo reúne as leituras que nenhum indicador isolado desautoriza. O IPH é o exemplo mais importante: é pressão estimada sobre capacidade declarada, nunca taxa de ocupação real.</a:t>
             </a:r>
           </a:p>
         </p:txBody>
@@ -850,92 +846,6 @@
             <a:fld id="{F7021451-1387-4CA6-816F-3879F97B5CBC}" type="slidenum">
               <a:rPr lang="en-US"/>
               <a:t>15</a:t>
-            </a:fld>
-            <a:endParaRPr lang="en-US"/>
-          </a:p>
-        </p:txBody>
-      </p:sp>
-    </p:spTree>
-    <p:extLst>
-      <p:ext uri="{BB962C8B-B14F-4D97-AF65-F5344CB8AC3E}">
-        <p14:creationId xmlns:p14="http://schemas.microsoft.com/office/powerpoint/2010/main" val="1024086991"/>
-      </p:ext>
-    </p:extLst>
-  </p:cSld>
-  <p:clrMapOvr>
-    <a:masterClrMapping/>
-  </p:clrMapOvr>
-</p:notes>
-</file>
-
-<file path=ppt/notesSlides/notesSlide16.xml><?xml version="1.0" encoding="utf-8"?>
-<p:notes xmlns:a="http://schemas.openxmlformats.org/drawingml/2006/main" xmlns:r="http://schemas.openxmlformats.org/officeDocument/2006/relationships" xmlns:p="http://schemas.openxmlformats.org/presentationml/2006/main">
-  <p:cSld>
-    <p:spTree>
-      <p:nvGrpSpPr>
-        <p:cNvPr id="1" name=""/>
-        <p:cNvGrpSpPr/>
-        <p:nvPr/>
-      </p:nvGrpSpPr>
-      <p:grpSpPr>
-        <a:xfrm>
-          <a:off x="0" y="0"/>
-          <a:ext cx="0" cy="0"/>
-          <a:chOff x="0" y="0"/>
-          <a:chExt cx="0" cy="0"/>
-        </a:xfrm>
-      </p:grpSpPr>
-      <p:sp>
-        <p:nvSpPr>
-          <p:cNvPr id="2" name="Slide Image Placeholder 1"/>
-          <p:cNvSpPr>
-            <a:spLocks noGrp="1" noRot="1" noChangeAspect="1"/>
-          </p:cNvSpPr>
-          <p:nvPr>
-            <p:ph type="sldImg"/>
-          </p:nvPr>
-        </p:nvSpPr>
-        <p:spPr/>
-      </p:sp>
-      <p:sp>
-        <p:nvSpPr>
-          <p:cNvPr id="3" name="Notes Placeholder 2"/>
-          <p:cNvSpPr>
-            <a:spLocks noGrp="1"/>
-          </p:cNvSpPr>
-          <p:nvPr>
-            <p:ph type="body" idx="1"/>
-          </p:nvPr>
-        </p:nvSpPr>
-        <p:spPr/>
-        <p:txBody>
-          <a:bodyPr/>
-          <a:lstStyle/>
-          <a:p>
-            <a:r>
-              <a:t>Duas telas do produto em execução, capturadas do link público. O mapa responde onde olhar; a comparação por pares responde se o número é alto para um hospital daquele porte.</a:t>
-            </a:r>
-          </a:p>
-        </p:txBody>
-      </p:sp>
-      <p:sp>
-        <p:nvSpPr>
-          <p:cNvPr id="4" name="Slide Number Placeholder 3"/>
-          <p:cNvSpPr>
-            <a:spLocks noGrp="1"/>
-          </p:cNvSpPr>
-          <p:nvPr>
-            <p:ph type="sldNum" sz="quarter" idx="10"/>
-          </p:nvPr>
-        </p:nvSpPr>
-        <p:spPr/>
-        <p:txBody>
-          <a:bodyPr/>
-          <a:lstStyle/>
-          <a:p>
-            <a:fld id="{F7021451-1387-4CA6-816F-3879F97B5CBC}" type="slidenum">
-              <a:rPr lang="en-US"/>
-              <a:t>16</a:t>
             </a:fld>
             <a:endParaRPr lang="en-US"/>
           </a:p>
@@ -999,7 +909,7 @@
           <a:lstStyle/>
           <a:p>
             <a:r>
-              <a:t>A FlowIA responde dentro da investigação e a tabela do mesmo hospital confere o resultado. Pediatria, 339 internações, nos dois lugares: é a demonstração de que a narrativa não substitui a Gold.</a:t>
+              <a:t>A pergunta é coloquial e não nomeia indicador nem tabela. A FlowIA responde Pediatria com 339 internações, a tabela do mesmo hospital e competência confirma o número, e o SQL fica a um clique. É a demonstração de que a narrativa não substitui a Gold: ela é conferível.</a:t>
             </a:r>
           </a:p>
         </p:txBody>
@@ -1283,93 +1193,6 @@
             <a:fld id="{F7021451-1387-4CA6-816F-3879F97B5CBC}" type="slidenum">
               <a:rPr lang="en-US"/>
               <a:t>2</a:t>
-            </a:fld>
-            <a:endParaRPr lang="en-US"/>
-          </a:p>
-        </p:txBody>
-      </p:sp>
-    </p:spTree>
-    <p:extLst>
-      <p:ext uri="{BB962C8B-B14F-4D97-AF65-F5344CB8AC3E}">
-        <p14:creationId xmlns:p14="http://schemas.microsoft.com/office/powerpoint/2010/main" val="1024086991"/>
-      </p:ext>
-    </p:extLst>
-  </p:cSld>
-  <p:clrMapOvr>
-    <a:masterClrMapping/>
-  </p:clrMapOvr>
-</p:notes>
-</file>
-
-<file path=ppt/notesSlides/notesSlide20.xml><?xml version="1.0" encoding="utf-8"?>
-<p:notes xmlns:a="http://schemas.openxmlformats.org/drawingml/2006/main" xmlns:r="http://schemas.openxmlformats.org/officeDocument/2006/relationships" xmlns:p="http://schemas.openxmlformats.org/presentationml/2006/main">
-  <p:cSld>
-    <p:spTree>
-      <p:nvGrpSpPr>
-        <p:cNvPr id="1" name=""/>
-        <p:cNvGrpSpPr/>
-        <p:nvPr/>
-      </p:nvGrpSpPr>
-      <p:grpSpPr>
-        <a:xfrm>
-          <a:off x="0" y="0"/>
-          <a:ext cx="0" cy="0"/>
-          <a:chOff x="0" y="0"/>
-          <a:chExt cx="0" cy="0"/>
-        </a:xfrm>
-      </p:grpSpPr>
-      <p:sp>
-        <p:nvSpPr>
-          <p:cNvPr id="2" name="Slide Image Placeholder 1"/>
-          <p:cNvSpPr>
-            <a:spLocks noGrp="1" noRot="1" noChangeAspect="1"/>
-          </p:cNvSpPr>
-          <p:nvPr>
-            <p:ph type="sldImg"/>
-          </p:nvPr>
-        </p:nvSpPr>
-        <p:spPr/>
-      </p:sp>
-      <p:sp>
-        <p:nvSpPr>
-          <p:cNvPr id="3" name="Notes Placeholder 2"/>
-          <p:cNvSpPr>
-            <a:spLocks noGrp="1"/>
-          </p:cNvSpPr>
-          <p:nvPr>
-            <p:ph type="body" idx="1"/>
-          </p:nvPr>
-        </p:nvSpPr>
-        <p:spPr/>
-        <p:txBody>
-          <a:bodyPr/>
-          <a:lstStyle/>
-          <a:p>
-            <a:r>
-              <a:rPr lang="en-US" dirty="0"/>
-              <a:t>Este slide costuma ser o que mais impressiona uma banca técnica: mostra que o grupo entende a natureza dos dados que está usando.</a:t>
-            </a:r>
-          </a:p>
-        </p:txBody>
-      </p:sp>
-      <p:sp>
-        <p:nvSpPr>
-          <p:cNvPr id="4" name="Slide Number Placeholder 3"/>
-          <p:cNvSpPr>
-            <a:spLocks noGrp="1"/>
-          </p:cNvSpPr>
-          <p:nvPr>
-            <p:ph type="sldNum" sz="quarter" idx="10"/>
-          </p:nvPr>
-        </p:nvSpPr>
-        <p:spPr/>
-        <p:txBody>
-          <a:bodyPr/>
-          <a:lstStyle/>
-          <a:p>
-            <a:fld id="{F7021451-1387-4CA6-816F-3879F97B5CBC}" type="slidenum">
-              <a:rPr lang="en-US"/>
-              <a:t>20</a:t>
             </a:fld>
             <a:endParaRPr lang="en-US"/>
           </a:p>
@@ -9290,119 +9113,252 @@
       </p:sp>
       <p:sp>
         <p:nvSpPr>
-          <p:cNvPr id="6" name="Text 4"/>
-          <p:cNvSpPr/>
-          <p:nvPr/>
-        </p:nvSpPr>
-        <p:spPr>
-          <a:xfrm>
-            <a:off x="548640" y="1335024"/>
-            <a:ext cx="11091672" cy="384048"/>
-          </a:xfrm>
-          <a:prstGeom prst="rect">
-            <a:avLst/>
-          </a:prstGeom>
-          <a:noFill/>
-          <a:ln/>
-        </p:spPr>
-        <p:txBody>
-          <a:bodyPr wrap="square" lIns="0" tIns="0" rIns="0" bIns="0" rtlCol="0" anchor="t"/>
+          <p:cNvPr id="55" name="Text 49"/>
+          <p:cNvSpPr/>
+          <p:nvPr/>
+        </p:nvSpPr>
+        <p:spPr>
+          <a:xfrm>
+            <a:off x="548640" y="6419088"/>
+            <a:ext cx="10454335" cy="256032"/>
+          </a:xfrm>
+          <a:prstGeom prst="rect">
+            <a:avLst/>
+          </a:prstGeom>
+          <a:noFill/>
+          <a:ln/>
+        </p:spPr>
+        <p:txBody>
+          <a:bodyPr wrap="square" lIns="0" tIns="0" rIns="0" bIns="0" rtlCol="0" anchor="ctr"/>
           <a:lstStyle/>
           <a:p>
             <a:pPr marL="0" indent="0">
-              <a:lnSpc>
-                <a:spcPts val="1600"/>
-              </a:lnSpc>
               <a:buNone/>
             </a:pPr>
             <a:r>
-              <a:rPr lang="en-US" sz="1050" dirty="0">
-                <a:solidFill>
-                  <a:srgbClr val="2D3748"/>
+              <a:rPr lang="en-US" sz="750" dirty="0">
+                <a:solidFill>
+                  <a:srgbClr val="9DB0C8"/>
                 </a:solidFill>
                 <a:latin typeface="Aptos" pitchFamily="34" charset="0"/>
                 <a:ea typeface="Calibri" pitchFamily="34" charset="-122"/>
                 <a:cs typeface="Calibri" pitchFamily="34" charset="-120"/>
               </a:rPr>
-              <a:t>React 19 + TypeScript + Vite, publicado no GitHub Pages. São duas páginas e quatro visões: Território, Pares e Hospital dividem a análise, ancorados na mesma leitura, e a Metodologia é a segunda página. As telas consomem valores prontos da API e aplicam apenas formatação com Intl: sem fórmulas, faixas ou cortes próprios.</a:t>
-            </a:r>
-            <a:endParaRPr lang="en-US" sz="1050" dirty="0"/>
-          </a:p>
-        </p:txBody>
-      </p:sp>
-      <p:sp>
-        <p:nvSpPr>
-          <p:cNvPr id="7" name="Shape 5"/>
-          <p:cNvSpPr/>
-          <p:nvPr/>
-        </p:nvSpPr>
-        <p:spPr>
-          <a:xfrm>
-            <a:off x="548640" y="1865376"/>
-            <a:ext cx="2670048" cy="3310128"/>
-          </a:xfrm>
-          <a:prstGeom prst="roundRect">
-            <a:avLst>
-              <a:gd name="adj" fmla="val 2055"/>
-            </a:avLst>
-          </a:prstGeom>
-          <a:solidFill>
-            <a:srgbClr val="FFFFFF"/>
-          </a:solidFill>
-          <a:ln w="9525">
-            <a:solidFill>
-              <a:srgbClr val="D7E3F2"/>
-            </a:solidFill>
-            <a:prstDash val="solid"/>
-          </a:ln>
-        </p:spPr>
-        <p:txBody>
-          <a:bodyPr/>
-          <a:lstStyle/>
-          <a:p>
-            <a:endParaRPr/>
-          </a:p>
-        </p:txBody>
-      </p:sp>
-      <p:sp>
-        <p:nvSpPr>
-          <p:cNvPr id="8" name="Shape 6"/>
-          <p:cNvSpPr/>
-          <p:nvPr/>
-        </p:nvSpPr>
-        <p:spPr>
-          <a:xfrm>
-            <a:off x="548640" y="1865376"/>
-            <a:ext cx="2670048" cy="896112"/>
-          </a:xfrm>
-          <a:prstGeom prst="roundRect">
-            <a:avLst>
-              <a:gd name="adj" fmla="val 6122"/>
-            </a:avLst>
+              <a:t>MedFlow  ·  Painel Inteligente de Acesso Hospitalar e Perfil de Atendimento  ·  Ômega Urban Tech  ·  Enterprise Challenge FIAP × Oracle 2026</a:t>
+            </a:r>
+            <a:endParaRPr lang="en-US" sz="750" dirty="0"/>
+          </a:p>
+        </p:txBody>
+      </p:sp>
+      <p:sp>
+        <p:nvSpPr>
+          <p:cNvPr id="56" name="Text 50"/>
+          <p:cNvSpPr/>
+          <p:nvPr/>
+        </p:nvSpPr>
+        <p:spPr>
+          <a:xfrm>
+            <a:off x="11094415" y="6419088"/>
+            <a:ext cx="548640" cy="256032"/>
+          </a:xfrm>
+          <a:prstGeom prst="rect">
+            <a:avLst/>
+          </a:prstGeom>
+          <a:noFill/>
+          <a:ln/>
+        </p:spPr>
+        <p:txBody>
+          <a:bodyPr wrap="square" lIns="0" tIns="0" rIns="0" bIns="0" rtlCol="0" anchor="ctr"/>
+          <a:lstStyle/>
+          <a:p>
+            <a:pPr marL="0" indent="0" algn="r">
+              <a:buNone/>
+            </a:pPr>
+            <a:r>
+              <a:rPr lang="en-US" sz="850" b="1" dirty="0">
+                <a:solidFill>
+                  <a:srgbClr val="2B6CB0"/>
+                </a:solidFill>
+                <a:latin typeface="Aptos" pitchFamily="34" charset="0"/>
+                <a:ea typeface="Calibri" pitchFamily="34" charset="-122"/>
+                <a:cs typeface="Calibri" pitchFamily="34" charset="-120"/>
+              </a:rPr>
+              <a:t>13</a:t>
+            </a:r>
+            <a:endParaRPr lang="en-US" sz="850" dirty="0"/>
+          </a:p>
+        </p:txBody>
+      </p:sp>
+      <p:sp>
+        <p:nvSpPr>
+          <p:cNvPr id="57" name="TextBox 56"/>
+          <p:cNvSpPr txBox="1"/>
+          <p:nvPr/>
+        </p:nvSpPr>
+        <p:spPr>
+          <a:xfrm>
+            <a:off x="548640" y="1316736"/>
+            <a:ext cx="11091672" cy="329184"/>
+          </a:xfrm>
+          <a:prstGeom prst="rect">
+            <a:avLst/>
+          </a:prstGeom>
+          <a:noFill/>
+        </p:spPr>
+        <p:txBody>
+          <a:bodyPr wrap="square" anchor="t" lIns="0" rIns="0" tIns="0" bIns="0">
+            <a:spAutoFit/>
+          </a:bodyPr>
+          <a:lstStyle/>
+          <a:p>
+            <a:pPr algn="l">
+              <a:lnSpc>
+                <a:spcPct val="100000"/>
+              </a:lnSpc>
+            </a:pPr>
+            <a:r>
+              <a:rPr sz="1000" b="0">
+                <a:solidFill>
+                  <a:srgbClr val="2D3748"/>
+                </a:solidFill>
+                <a:latin typeface="Aptos"/>
+              </a:rPr>
+              <a:t>React 19 + TypeScript + Vite, publicado no GitHub Pages. Duas páginas e quatro visões, servidas pela API: as telas apenas apresentam e formatam, nunca recalculam.</a:t>
+            </a:r>
+          </a:p>
+        </p:txBody>
+      </p:sp>
+      <p:sp>
+        <p:nvSpPr>
+          <p:cNvPr id="58" name="Rectangle 57"/>
+          <p:cNvSpPr/>
+          <p:nvPr/>
+        </p:nvSpPr>
+        <p:spPr>
+          <a:xfrm>
+            <a:off x="548640" y="1792224"/>
+            <a:ext cx="2670048" cy="694944"/>
+          </a:xfrm>
+          <a:prstGeom prst="rect">
+            <a:avLst/>
           </a:prstGeom>
           <a:solidFill>
             <a:srgbClr val="EAF2FB"/>
           </a:solidFill>
-          <a:ln/>
-        </p:spPr>
-        <p:txBody>
-          <a:bodyPr/>
-          <a:lstStyle/>
-          <a:p>
-            <a:endParaRPr/>
-          </a:p>
-        </p:txBody>
-      </p:sp>
-      <p:sp>
-        <p:nvSpPr>
-          <p:cNvPr id="9" name="Shape 7"/>
-          <p:cNvSpPr/>
-          <p:nvPr/>
-        </p:nvSpPr>
-        <p:spPr>
-          <a:xfrm>
-            <a:off x="548640" y="2432304"/>
-            <a:ext cx="2670048" cy="329184"/>
+          <a:ln>
+            <a:noFill/>
+          </a:ln>
+        </p:spPr>
+        <p:style>
+          <a:lnRef idx="1">
+            <a:schemeClr val="accent1"/>
+          </a:lnRef>
+          <a:fillRef idx="3">
+            <a:schemeClr val="accent1"/>
+          </a:fillRef>
+          <a:effectRef idx="2">
+            <a:schemeClr val="accent1"/>
+          </a:effectRef>
+          <a:fontRef idx="minor">
+            <a:schemeClr val="lt1"/>
+          </a:fontRef>
+        </p:style>
+        <p:txBody>
+          <a:bodyPr rtlCol="0" anchor="ctr"/>
+          <a:lstStyle/>
+          <a:p>
+            <a:pPr algn="ctr"/>
+          </a:p>
+        </p:txBody>
+      </p:sp>
+      <p:sp>
+        <p:nvSpPr>
+          <p:cNvPr id="59" name="TextBox 58"/>
+          <p:cNvSpPr txBox="1"/>
+          <p:nvPr/>
+        </p:nvSpPr>
+        <p:spPr>
+          <a:xfrm>
+            <a:off x="749808" y="1883664"/>
+            <a:ext cx="2267712" cy="219456"/>
+          </a:xfrm>
+          <a:prstGeom prst="rect">
+            <a:avLst/>
+          </a:prstGeom>
+          <a:noFill/>
+        </p:spPr>
+        <p:txBody>
+          <a:bodyPr wrap="square" anchor="t" lIns="0" rIns="0" tIns="0" bIns="0">
+            <a:spAutoFit/>
+          </a:bodyPr>
+          <a:lstStyle/>
+          <a:p>
+            <a:pPr algn="l">
+              <a:lnSpc>
+                <a:spcPct val="100000"/>
+              </a:lnSpc>
+            </a:pPr>
+            <a:r>
+              <a:rPr sz="1100" b="1">
+                <a:solidFill>
+                  <a:srgbClr val="1A2948"/>
+                </a:solidFill>
+                <a:latin typeface="Aptos"/>
+              </a:rPr>
+              <a:t>Território</a:t>
+            </a:r>
+          </a:p>
+        </p:txBody>
+      </p:sp>
+      <p:sp>
+        <p:nvSpPr>
+          <p:cNvPr id="60" name="TextBox 59"/>
+          <p:cNvSpPr txBox="1"/>
+          <p:nvPr/>
+        </p:nvSpPr>
+        <p:spPr>
+          <a:xfrm>
+            <a:off x="749808" y="2121408"/>
+            <a:ext cx="2267712" cy="310896"/>
+          </a:xfrm>
+          <a:prstGeom prst="rect">
+            <a:avLst/>
+          </a:prstGeom>
+          <a:noFill/>
+        </p:spPr>
+        <p:txBody>
+          <a:bodyPr wrap="square" anchor="t" lIns="0" rIns="0" tIns="0" bIns="0">
+            <a:spAutoFit/>
+          </a:bodyPr>
+          <a:lstStyle/>
+          <a:p>
+            <a:pPr algn="l">
+              <a:lnSpc>
+                <a:spcPct val="110000"/>
+              </a:lnSpc>
+            </a:pPr>
+            <a:r>
+              <a:rPr sz="819" b="0">
+                <a:solidFill>
+                  <a:srgbClr val="718096"/>
+                </a:solidFill>
+                <a:latin typeface="Aptos"/>
+              </a:rPr>
+              <a:t>Onde existe um sinal que merece investigação?</a:t>
+            </a:r>
+          </a:p>
+        </p:txBody>
+      </p:sp>
+      <p:sp>
+        <p:nvSpPr>
+          <p:cNvPr id="61" name="Rectangle 60"/>
+          <p:cNvSpPr/>
+          <p:nvPr/>
+        </p:nvSpPr>
+        <p:spPr>
+          <a:xfrm>
+            <a:off x="3392424" y="1792224"/>
+            <a:ext cx="2670048" cy="694944"/>
           </a:xfrm>
           <a:prstGeom prst="rect">
             <a:avLst/>
@@ -9410,472 +9366,472 @@
           <a:solidFill>
             <a:srgbClr val="EAF2FB"/>
           </a:solidFill>
-          <a:ln/>
-        </p:spPr>
-        <p:txBody>
-          <a:bodyPr/>
-          <a:lstStyle/>
-          <a:p>
-            <a:endParaRPr/>
-          </a:p>
-        </p:txBody>
-      </p:sp>
-      <p:sp>
-        <p:nvSpPr>
-          <p:cNvPr id="10" name="Shape 8"/>
-          <p:cNvSpPr/>
-          <p:nvPr/>
-        </p:nvSpPr>
-        <p:spPr>
-          <a:xfrm>
-            <a:off x="749808" y="2048256"/>
-            <a:ext cx="402336" cy="402336"/>
-          </a:xfrm>
-          <a:prstGeom prst="ellipse">
+          <a:ln>
+            <a:noFill/>
+          </a:ln>
+        </p:spPr>
+        <p:style>
+          <a:lnRef idx="1">
+            <a:schemeClr val="accent1"/>
+          </a:lnRef>
+          <a:fillRef idx="3">
+            <a:schemeClr val="accent1"/>
+          </a:fillRef>
+          <a:effectRef idx="2">
+            <a:schemeClr val="accent1"/>
+          </a:effectRef>
+          <a:fontRef idx="minor">
+            <a:schemeClr val="lt1"/>
+          </a:fontRef>
+        </p:style>
+        <p:txBody>
+          <a:bodyPr rtlCol="0" anchor="ctr"/>
+          <a:lstStyle/>
+          <a:p>
+            <a:pPr algn="ctr"/>
+          </a:p>
+        </p:txBody>
+      </p:sp>
+      <p:sp>
+        <p:nvSpPr>
+          <p:cNvPr id="62" name="TextBox 61"/>
+          <p:cNvSpPr txBox="1"/>
+          <p:nvPr/>
+        </p:nvSpPr>
+        <p:spPr>
+          <a:xfrm>
+            <a:off x="3593592" y="1883664"/>
+            <a:ext cx="2267712" cy="219456"/>
+          </a:xfrm>
+          <a:prstGeom prst="rect">
+            <a:avLst/>
+          </a:prstGeom>
+          <a:noFill/>
+        </p:spPr>
+        <p:txBody>
+          <a:bodyPr wrap="square" anchor="t" lIns="0" rIns="0" tIns="0" bIns="0">
+            <a:spAutoFit/>
+          </a:bodyPr>
+          <a:lstStyle/>
+          <a:p>
+            <a:pPr algn="l">
+              <a:lnSpc>
+                <a:spcPct val="100000"/>
+              </a:lnSpc>
+            </a:pPr>
+            <a:r>
+              <a:rPr sz="1100" b="1">
+                <a:solidFill>
+                  <a:srgbClr val="1A2948"/>
+                </a:solidFill>
+                <a:latin typeface="Aptos"/>
+              </a:rPr>
+              <a:t>Pares</a:t>
+            </a:r>
+          </a:p>
+        </p:txBody>
+      </p:sp>
+      <p:sp>
+        <p:nvSpPr>
+          <p:cNvPr id="63" name="TextBox 62"/>
+          <p:cNvSpPr txBox="1"/>
+          <p:nvPr/>
+        </p:nvSpPr>
+        <p:spPr>
+          <a:xfrm>
+            <a:off x="3593592" y="2121408"/>
+            <a:ext cx="2267712" cy="310896"/>
+          </a:xfrm>
+          <a:prstGeom prst="rect">
+            <a:avLst/>
+          </a:prstGeom>
+          <a:noFill/>
+        </p:spPr>
+        <p:txBody>
+          <a:bodyPr wrap="square" anchor="t" lIns="0" rIns="0" tIns="0" bIns="0">
+            <a:spAutoFit/>
+          </a:bodyPr>
+          <a:lstStyle/>
+          <a:p>
+            <a:pPr algn="l">
+              <a:lnSpc>
+                <a:spcPct val="110000"/>
+              </a:lnSpc>
+            </a:pPr>
+            <a:r>
+              <a:rPr sz="819" b="0">
+                <a:solidFill>
+                  <a:srgbClr val="718096"/>
+                </a:solidFill>
+                <a:latin typeface="Aptos"/>
+              </a:rPr>
+              <a:t>Este número é alto para um hospital deste porte?</a:t>
+            </a:r>
+          </a:p>
+        </p:txBody>
+      </p:sp>
+      <p:sp>
+        <p:nvSpPr>
+          <p:cNvPr id="64" name="Rectangle 63"/>
+          <p:cNvSpPr/>
+          <p:nvPr/>
+        </p:nvSpPr>
+        <p:spPr>
+          <a:xfrm>
+            <a:off x="6236207" y="1792224"/>
+            <a:ext cx="2670048" cy="694944"/>
+          </a:xfrm>
+          <a:prstGeom prst="rect">
             <a:avLst/>
           </a:prstGeom>
           <a:solidFill>
-            <a:srgbClr val="FFFFFF"/>
+            <a:srgbClr val="EAF2FB"/>
           </a:solidFill>
-          <a:ln/>
-        </p:spPr>
-        <p:txBody>
-          <a:bodyPr/>
-          <a:lstStyle/>
-          <a:p>
-            <a:endParaRPr/>
+          <a:ln>
+            <a:noFill/>
+          </a:ln>
+        </p:spPr>
+        <p:style>
+          <a:lnRef idx="1">
+            <a:schemeClr val="accent1"/>
+          </a:lnRef>
+          <a:fillRef idx="3">
+            <a:schemeClr val="accent1"/>
+          </a:fillRef>
+          <a:effectRef idx="2">
+            <a:schemeClr val="accent1"/>
+          </a:effectRef>
+          <a:fontRef idx="minor">
+            <a:schemeClr val="lt1"/>
+          </a:fontRef>
+        </p:style>
+        <p:txBody>
+          <a:bodyPr rtlCol="0" anchor="ctr"/>
+          <a:lstStyle/>
+          <a:p>
+            <a:pPr algn="ctr"/>
+          </a:p>
+        </p:txBody>
+      </p:sp>
+      <p:sp>
+        <p:nvSpPr>
+          <p:cNvPr id="65" name="TextBox 64"/>
+          <p:cNvSpPr txBox="1"/>
+          <p:nvPr/>
+        </p:nvSpPr>
+        <p:spPr>
+          <a:xfrm>
+            <a:off x="6437375" y="1883664"/>
+            <a:ext cx="2267712" cy="219456"/>
+          </a:xfrm>
+          <a:prstGeom prst="rect">
+            <a:avLst/>
+          </a:prstGeom>
+          <a:noFill/>
+        </p:spPr>
+        <p:txBody>
+          <a:bodyPr wrap="square" anchor="t" lIns="0" rIns="0" tIns="0" bIns="0">
+            <a:spAutoFit/>
+          </a:bodyPr>
+          <a:lstStyle/>
+          <a:p>
+            <a:pPr algn="l">
+              <a:lnSpc>
+                <a:spcPct val="100000"/>
+              </a:lnSpc>
+            </a:pPr>
+            <a:r>
+              <a:rPr sz="1100" b="1">
+                <a:solidFill>
+                  <a:srgbClr val="1A2948"/>
+                </a:solidFill>
+                <a:latin typeface="Aptos"/>
+              </a:rPr>
+              <a:t>Hospital</a:t>
+            </a:r>
+          </a:p>
+        </p:txBody>
+      </p:sp>
+      <p:sp>
+        <p:nvSpPr>
+          <p:cNvPr id="66" name="TextBox 65"/>
+          <p:cNvSpPr txBox="1"/>
+          <p:nvPr/>
+        </p:nvSpPr>
+        <p:spPr>
+          <a:xfrm>
+            <a:off x="6437375" y="2121408"/>
+            <a:ext cx="2267712" cy="310896"/>
+          </a:xfrm>
+          <a:prstGeom prst="rect">
+            <a:avLst/>
+          </a:prstGeom>
+          <a:noFill/>
+        </p:spPr>
+        <p:txBody>
+          <a:bodyPr wrap="square" anchor="t" lIns="0" rIns="0" tIns="0" bIns="0">
+            <a:spAutoFit/>
+          </a:bodyPr>
+          <a:lstStyle/>
+          <a:p>
+            <a:pPr algn="l">
+              <a:lnSpc>
+                <a:spcPct val="110000"/>
+              </a:lnSpc>
+            </a:pPr>
+            <a:r>
+              <a:rPr sz="819" b="0">
+                <a:solidFill>
+                  <a:srgbClr val="718096"/>
+                </a:solidFill>
+                <a:latin typeface="Aptos"/>
+              </a:rPr>
+              <a:t>Onde o sinal se concentra: unidade, especialidade ou CID?</a:t>
+            </a:r>
+          </a:p>
+        </p:txBody>
+      </p:sp>
+      <p:sp>
+        <p:nvSpPr>
+          <p:cNvPr id="67" name="Rectangle 66"/>
+          <p:cNvSpPr/>
+          <p:nvPr/>
+        </p:nvSpPr>
+        <p:spPr>
+          <a:xfrm>
+            <a:off x="9079992" y="1792224"/>
+            <a:ext cx="2670048" cy="694944"/>
+          </a:xfrm>
+          <a:prstGeom prst="rect">
+            <a:avLst/>
+          </a:prstGeom>
+          <a:solidFill>
+            <a:srgbClr val="EAF2FB"/>
+          </a:solidFill>
+          <a:ln>
+            <a:noFill/>
+          </a:ln>
+        </p:spPr>
+        <p:style>
+          <a:lnRef idx="1">
+            <a:schemeClr val="accent1"/>
+          </a:lnRef>
+          <a:fillRef idx="3">
+            <a:schemeClr val="accent1"/>
+          </a:fillRef>
+          <a:effectRef idx="2">
+            <a:schemeClr val="accent1"/>
+          </a:effectRef>
+          <a:fontRef idx="minor">
+            <a:schemeClr val="lt1"/>
+          </a:fontRef>
+        </p:style>
+        <p:txBody>
+          <a:bodyPr rtlCol="0" anchor="ctr"/>
+          <a:lstStyle/>
+          <a:p>
+            <a:pPr algn="ctr"/>
+          </a:p>
+        </p:txBody>
+      </p:sp>
+      <p:sp>
+        <p:nvSpPr>
+          <p:cNvPr id="68" name="TextBox 67"/>
+          <p:cNvSpPr txBox="1"/>
+          <p:nvPr/>
+        </p:nvSpPr>
+        <p:spPr>
+          <a:xfrm>
+            <a:off x="9281160" y="1883664"/>
+            <a:ext cx="2267712" cy="219456"/>
+          </a:xfrm>
+          <a:prstGeom prst="rect">
+            <a:avLst/>
+          </a:prstGeom>
+          <a:noFill/>
+        </p:spPr>
+        <p:txBody>
+          <a:bodyPr wrap="square" anchor="t" lIns="0" rIns="0" tIns="0" bIns="0">
+            <a:spAutoFit/>
+          </a:bodyPr>
+          <a:lstStyle/>
+          <a:p>
+            <a:pPr algn="l">
+              <a:lnSpc>
+                <a:spcPct val="100000"/>
+              </a:lnSpc>
+            </a:pPr>
+            <a:r>
+              <a:rPr sz="1100" b="1">
+                <a:solidFill>
+                  <a:srgbClr val="1A2948"/>
+                </a:solidFill>
+                <a:latin typeface="Aptos"/>
+              </a:rPr>
+              <a:t>Metodologia</a:t>
+            </a:r>
+          </a:p>
+        </p:txBody>
+      </p:sp>
+      <p:sp>
+        <p:nvSpPr>
+          <p:cNvPr id="69" name="TextBox 68"/>
+          <p:cNvSpPr txBox="1"/>
+          <p:nvPr/>
+        </p:nvSpPr>
+        <p:spPr>
+          <a:xfrm>
+            <a:off x="9281160" y="2121408"/>
+            <a:ext cx="2267712" cy="310896"/>
+          </a:xfrm>
+          <a:prstGeom prst="rect">
+            <a:avLst/>
+          </a:prstGeom>
+          <a:noFill/>
+        </p:spPr>
+        <p:txBody>
+          <a:bodyPr wrap="square" anchor="t" lIns="0" rIns="0" tIns="0" bIns="0">
+            <a:spAutoFit/>
+          </a:bodyPr>
+          <a:lstStyle/>
+          <a:p>
+            <a:pPr algn="l">
+              <a:lnSpc>
+                <a:spcPct val="110000"/>
+              </a:lnSpc>
+            </a:pPr>
+            <a:r>
+              <a:rPr sz="819" b="0">
+                <a:solidFill>
+                  <a:srgbClr val="718096"/>
+                </a:solidFill>
+                <a:latin typeface="Aptos"/>
+              </a:rPr>
+              <a:t>Qual é a origem do número e quais são seus limites?</a:t>
+            </a:r>
+          </a:p>
+        </p:txBody>
+      </p:sp>
+      <p:sp>
+        <p:nvSpPr>
+          <p:cNvPr id="70" name="TextBox 69"/>
+          <p:cNvSpPr txBox="1"/>
+          <p:nvPr/>
+        </p:nvSpPr>
+        <p:spPr>
+          <a:xfrm>
+            <a:off x="548640" y="2688336"/>
+            <a:ext cx="5394960" cy="182880"/>
+          </a:xfrm>
+          <a:prstGeom prst="rect">
+            <a:avLst/>
+          </a:prstGeom>
+          <a:noFill/>
+        </p:spPr>
+        <p:txBody>
+          <a:bodyPr wrap="square" anchor="t" lIns="0" rIns="0" tIns="0" bIns="0">
+            <a:spAutoFit/>
+          </a:bodyPr>
+          <a:lstStyle/>
+          <a:p>
+            <a:pPr algn="l">
+              <a:lnSpc>
+                <a:spcPct val="100000"/>
+              </a:lnSpc>
+            </a:pPr>
+            <a:r>
+              <a:rPr sz="800" b="1">
+                <a:solidFill>
+                  <a:srgbClr val="37AB94"/>
+                </a:solidFill>
+                <a:latin typeface="Aptos"/>
+              </a:rPr>
+              <a:t>TERRITÓRIO  ·  ONDE OLHAR PRIMEIRO</a:t>
+            </a:r>
+          </a:p>
+        </p:txBody>
+      </p:sp>
+      <p:sp>
+        <p:nvSpPr>
+          <p:cNvPr id="71" name="TextBox 70"/>
+          <p:cNvSpPr txBox="1"/>
+          <p:nvPr/>
+        </p:nvSpPr>
+        <p:spPr>
+          <a:xfrm>
+            <a:off x="6236208" y="2688336"/>
+            <a:ext cx="5394960" cy="182880"/>
+          </a:xfrm>
+          <a:prstGeom prst="rect">
+            <a:avLst/>
+          </a:prstGeom>
+          <a:noFill/>
+        </p:spPr>
+        <p:txBody>
+          <a:bodyPr wrap="square" anchor="t" lIns="0" rIns="0" tIns="0" bIns="0">
+            <a:spAutoFit/>
+          </a:bodyPr>
+          <a:lstStyle/>
+          <a:p>
+            <a:pPr algn="l">
+              <a:lnSpc>
+                <a:spcPct val="100000"/>
+              </a:lnSpc>
+            </a:pPr>
+            <a:r>
+              <a:rPr sz="800" b="1">
+                <a:solidFill>
+                  <a:srgbClr val="37AB94"/>
+                </a:solidFill>
+                <a:latin typeface="Aptos"/>
+              </a:rPr>
+              <a:t>HOSPITAL  ·  O NÚMERO GANHA UMA RÉGUA</a:t>
+            </a:r>
           </a:p>
         </p:txBody>
       </p:sp>
       <p:pic>
         <p:nvPicPr>
-          <p:cNvPr id="11" name="Image 0" descr="preencoded.png"/>
+          <p:cNvPr id="72" name="Picture 71" descr="image.png"/>
           <p:cNvPicPr>
             <a:picLocks noChangeAspect="1"/>
           </p:cNvPicPr>
           <p:nvPr/>
         </p:nvPicPr>
         <p:blipFill>
-          <a:blip r:embed="rId3"/>
+          <a:blip r:embed="rId7"/>
           <a:stretch>
             <a:fillRect/>
           </a:stretch>
         </p:blipFill>
         <p:spPr>
           <a:xfrm>
-            <a:off x="854415" y="2152863"/>
-            <a:ext cx="193121" cy="193121"/>
+            <a:off x="1388915" y="2926080"/>
+            <a:ext cx="3714409" cy="2359152"/>
           </a:xfrm>
           <a:prstGeom prst="rect">
             <a:avLst/>
           </a:prstGeom>
         </p:spPr>
       </p:pic>
-      <p:sp>
-        <p:nvSpPr>
-          <p:cNvPr id="12" name="Text 9"/>
-          <p:cNvSpPr/>
-          <p:nvPr/>
-        </p:nvSpPr>
-        <p:spPr>
-          <a:xfrm>
-            <a:off x="1243584" y="2048256"/>
-            <a:ext cx="1773936" cy="402336"/>
-          </a:xfrm>
-          <a:prstGeom prst="rect">
-            <a:avLst/>
-          </a:prstGeom>
-          <a:noFill/>
-          <a:ln/>
-        </p:spPr>
-        <p:txBody>
-          <a:bodyPr wrap="square" lIns="0" tIns="0" rIns="0" bIns="0" rtlCol="0" anchor="ctr"/>
-          <a:lstStyle/>
-          <a:p>
-            <a:pPr marL="0" indent="0">
-              <a:buNone/>
-            </a:pPr>
-            <a:r>
-              <a:rPr lang="en-US" sz="1300" b="1" dirty="0">
-                <a:solidFill>
-                  <a:srgbClr val="1A2948"/>
-                </a:solidFill>
-                <a:latin typeface="Aptos" pitchFamily="34" charset="0"/>
-                <a:ea typeface="Calibri" pitchFamily="34" charset="-122"/>
-                <a:cs typeface="Calibri" pitchFamily="34" charset="-120"/>
-              </a:rPr>
-              <a:t>Território</a:t>
-            </a:r>
-            <a:endParaRPr lang="en-US" sz="1300" dirty="0"/>
-          </a:p>
-        </p:txBody>
-      </p:sp>
-      <p:sp>
-        <p:nvSpPr>
-          <p:cNvPr id="13" name="Text 10"/>
-          <p:cNvSpPr/>
-          <p:nvPr/>
-        </p:nvSpPr>
-        <p:spPr>
-          <a:xfrm>
-            <a:off x="749808" y="2450592"/>
-            <a:ext cx="2267712" cy="292608"/>
-          </a:xfrm>
-          <a:prstGeom prst="rect">
-            <a:avLst/>
-          </a:prstGeom>
-          <a:noFill/>
-          <a:ln/>
-        </p:spPr>
-        <p:txBody>
-          <a:bodyPr wrap="square" lIns="0" tIns="0" rIns="0" bIns="0" rtlCol="0" anchor="ctr"/>
-          <a:lstStyle/>
-          <a:p>
-            <a:pPr marL="0" indent="0">
-              <a:lnSpc>
-                <a:spcPts val="1050"/>
-              </a:lnSpc>
-              <a:buNone/>
-            </a:pPr>
-            <a:r>
-              <a:rPr lang="en-US" sz="900" i="1" dirty="0">
-                <a:solidFill>
-                  <a:srgbClr val="2B6CB0"/>
-                </a:solidFill>
-                <a:latin typeface="Aptos" pitchFamily="34" charset="0"/>
-                <a:ea typeface="Calibri" pitchFamily="34" charset="-122"/>
-                <a:cs typeface="Calibri" pitchFamily="34" charset="-120"/>
-              </a:rPr>
-              <a:t>Onde existe um sinal que merece investigação?</a:t>
-            </a:r>
-            <a:endParaRPr lang="en-US" sz="800" dirty="0"/>
-          </a:p>
-        </p:txBody>
-      </p:sp>
-      <p:sp>
-        <p:nvSpPr>
-          <p:cNvPr id="14" name="Text 11"/>
-          <p:cNvSpPr/>
-          <p:nvPr/>
-        </p:nvSpPr>
-        <p:spPr>
-          <a:xfrm>
-            <a:off x="749808" y="2907792"/>
-            <a:ext cx="2267712" cy="182880"/>
-          </a:xfrm>
-          <a:prstGeom prst="rect">
-            <a:avLst/>
-          </a:prstGeom>
-          <a:noFill/>
-          <a:ln/>
-        </p:spPr>
-        <p:txBody>
-          <a:bodyPr wrap="square" lIns="0" tIns="0" rIns="0" bIns="0" rtlCol="0" anchor="ctr"/>
-          <a:lstStyle/>
-          <a:p>
-            <a:pPr marL="0" indent="0">
-              <a:buNone/>
-            </a:pPr>
-            <a:r>
-              <a:rPr lang="en-US" sz="900" b="1" kern="0" spc="110" dirty="0">
-                <a:solidFill>
-                  <a:srgbClr val="37AB94"/>
-                </a:solidFill>
-                <a:latin typeface="Aptos" pitchFamily="34" charset="0"/>
-                <a:ea typeface="Calibri" pitchFamily="34" charset="-122"/>
-                <a:cs typeface="Calibri" pitchFamily="34" charset="-120"/>
-              </a:rPr>
-              <a:t>O QUE MOSTRA</a:t>
-            </a:r>
-            <a:endParaRPr lang="en-US" sz="750" dirty="0"/>
-          </a:p>
-        </p:txBody>
-      </p:sp>
-      <p:sp>
-        <p:nvSpPr>
-          <p:cNvPr id="15" name="Text 12"/>
-          <p:cNvSpPr/>
-          <p:nvPr/>
-        </p:nvSpPr>
-        <p:spPr>
-          <a:xfrm>
-            <a:off x="749808" y="3108960"/>
-            <a:ext cx="2267712" cy="1133856"/>
-          </a:xfrm>
-          <a:prstGeom prst="rect">
-            <a:avLst/>
-          </a:prstGeom>
-          <a:noFill/>
-          <a:ln/>
-        </p:spPr>
-        <p:txBody>
-          <a:bodyPr wrap="square" lIns="0" tIns="0" rIns="0" bIns="0" rtlCol="0" anchor="t"/>
-          <a:lstStyle/>
-          <a:p>
-            <a:pPr marL="0" indent="0">
-              <a:lnSpc>
-                <a:spcPts val="1200"/>
-              </a:lnSpc>
-              <a:buNone/>
-            </a:pPr>
-            <a:r>
-              <a:rPr lang="en-US" sz="850" dirty="0">
-                <a:solidFill>
-                  <a:srgbClr val="2D3748"/>
-                </a:solidFill>
-                <a:latin typeface="Aptos" pitchFamily="34" charset="0"/>
-                <a:ea typeface="Calibri" pitchFamily="34" charset="-122"/>
-                <a:cs typeface="Calibri" pitchFamily="34" charset="-120"/>
-              </a:rPr>
-              <a:t>Mapa das 62 regiões colorido pelo placar de sinais ou pelo IPH, totais do recorte com MoM e YoY, e a série mensal da região escolhida.</a:t>
-            </a:r>
-            <a:endParaRPr lang="en-US" sz="850" dirty="0"/>
-          </a:p>
-        </p:txBody>
-      </p:sp>
-      <p:sp>
-        <p:nvSpPr>
-          <p:cNvPr id="16" name="Shape 13"/>
-          <p:cNvSpPr/>
-          <p:nvPr/>
-        </p:nvSpPr>
-        <p:spPr>
-          <a:xfrm>
-            <a:off x="749808" y="3904488"/>
-            <a:ext cx="2267712" cy="9144"/>
-          </a:xfrm>
-          <a:prstGeom prst="rect">
-            <a:avLst/>
-          </a:prstGeom>
-          <a:solidFill>
-            <a:srgbClr val="D7E3F2"/>
-          </a:solidFill>
-          <a:ln/>
-        </p:spPr>
-        <p:txBody>
-          <a:bodyPr/>
-          <a:lstStyle/>
-          <a:p>
-            <a:endParaRPr/>
-          </a:p>
-        </p:txBody>
-      </p:sp>
-      <p:sp>
-        <p:nvSpPr>
-          <p:cNvPr id="17" name="Text 14"/>
-          <p:cNvSpPr/>
-          <p:nvPr/>
-        </p:nvSpPr>
-        <p:spPr>
-          <a:xfrm>
-            <a:off x="749808" y="4014216"/>
-            <a:ext cx="2267712" cy="182880"/>
-          </a:xfrm>
-          <a:prstGeom prst="rect">
-            <a:avLst/>
-          </a:prstGeom>
-          <a:noFill/>
-          <a:ln/>
-        </p:spPr>
-        <p:txBody>
-          <a:bodyPr wrap="square" lIns="0" tIns="0" rIns="0" bIns="0" rtlCol="0" anchor="ctr"/>
-          <a:lstStyle/>
-          <a:p>
-            <a:pPr marL="0" indent="0">
-              <a:buNone/>
-            </a:pPr>
-            <a:r>
-              <a:rPr lang="en-US" sz="900" b="1" kern="0" spc="110" dirty="0">
-                <a:solidFill>
-                  <a:srgbClr val="718096"/>
-                </a:solidFill>
-                <a:latin typeface="Aptos" pitchFamily="34" charset="0"/>
-                <a:ea typeface="Calibri" pitchFamily="34" charset="-122"/>
-                <a:cs typeface="Calibri" pitchFamily="34" charset="-120"/>
-              </a:rPr>
-              <a:t>O QUE SIGNIFICA</a:t>
-            </a:r>
-            <a:endParaRPr lang="en-US" sz="750" dirty="0"/>
-          </a:p>
-        </p:txBody>
-      </p:sp>
-      <p:sp>
-        <p:nvSpPr>
-          <p:cNvPr id="18" name="Text 15"/>
-          <p:cNvSpPr/>
-          <p:nvPr/>
-        </p:nvSpPr>
-        <p:spPr>
-          <a:xfrm>
-            <a:off x="749808" y="4215384"/>
-            <a:ext cx="2267712" cy="987552"/>
-          </a:xfrm>
-          <a:prstGeom prst="rect">
-            <a:avLst/>
-          </a:prstGeom>
-          <a:noFill/>
-          <a:ln/>
-        </p:spPr>
-        <p:txBody>
-          <a:bodyPr wrap="square" lIns="0" tIns="0" rIns="0" bIns="0" rtlCol="0" anchor="t"/>
-          <a:lstStyle/>
-          <a:p>
-            <a:pPr marL="0" indent="0">
-              <a:lnSpc>
-                <a:spcPts val="1200"/>
-              </a:lnSpc>
-              <a:buNone/>
-            </a:pPr>
-            <a:r>
-              <a:rPr lang="en-US" sz="850" dirty="0">
-                <a:solidFill>
-                  <a:srgbClr val="718096"/>
-                </a:solidFill>
-                <a:latin typeface="Aptos" pitchFamily="34" charset="0"/>
-                <a:ea typeface="Calibri" pitchFamily="34" charset="-122"/>
-                <a:cs typeface="Calibri" pitchFamily="34" charset="-120"/>
-              </a:rPr>
-              <a:t>Responde onde olhar primeiro, e a série diz se o sinal é do mês ou vem de antes, sem converter sinal em conclusão de desempenho.</a:t>
-            </a:r>
-            <a:endParaRPr lang="en-US" sz="850" dirty="0"/>
-          </a:p>
-        </p:txBody>
-      </p:sp>
-      <p:sp>
-        <p:nvSpPr>
-          <p:cNvPr id="19" name="Shape 16"/>
-          <p:cNvSpPr/>
-          <p:nvPr/>
-        </p:nvSpPr>
-        <p:spPr>
-          <a:xfrm>
-            <a:off x="3392424" y="1865376"/>
-            <a:ext cx="2670048" cy="3310128"/>
-          </a:xfrm>
-          <a:prstGeom prst="roundRect">
-            <a:avLst>
-              <a:gd name="adj" fmla="val 2055"/>
-            </a:avLst>
-          </a:prstGeom>
-          <a:solidFill>
-            <a:srgbClr val="FFFFFF"/>
-          </a:solidFill>
-          <a:ln w="9525">
-            <a:solidFill>
-              <a:srgbClr val="D7E3F2"/>
-            </a:solidFill>
-            <a:prstDash val="solid"/>
-          </a:ln>
-        </p:spPr>
-        <p:txBody>
-          <a:bodyPr/>
-          <a:lstStyle/>
-          <a:p>
-            <a:endParaRPr/>
-          </a:p>
-        </p:txBody>
-      </p:sp>
-      <p:sp>
-        <p:nvSpPr>
-          <p:cNvPr id="20" name="Shape 17"/>
-          <p:cNvSpPr/>
-          <p:nvPr/>
-        </p:nvSpPr>
-        <p:spPr>
-          <a:xfrm>
-            <a:off x="3392424" y="1865376"/>
-            <a:ext cx="2670048" cy="896112"/>
-          </a:xfrm>
-          <a:prstGeom prst="roundRect">
-            <a:avLst>
-              <a:gd name="adj" fmla="val 6122"/>
-            </a:avLst>
-          </a:prstGeom>
-          <a:solidFill>
-            <a:srgbClr val="EAF2FB"/>
-          </a:solidFill>
-          <a:ln/>
-        </p:spPr>
-        <p:txBody>
-          <a:bodyPr/>
-          <a:lstStyle/>
-          <a:p>
-            <a:endParaRPr/>
-          </a:p>
-        </p:txBody>
-      </p:sp>
-      <p:sp>
-        <p:nvSpPr>
-          <p:cNvPr id="21" name="Shape 18"/>
-          <p:cNvSpPr/>
-          <p:nvPr/>
-        </p:nvSpPr>
-        <p:spPr>
-          <a:xfrm>
-            <a:off x="3392424" y="2432304"/>
-            <a:ext cx="2670048" cy="329184"/>
-          </a:xfrm>
-          <a:prstGeom prst="rect">
-            <a:avLst/>
-          </a:prstGeom>
-          <a:solidFill>
-            <a:srgbClr val="EAF2FB"/>
-          </a:solidFill>
-          <a:ln/>
-        </p:spPr>
-        <p:txBody>
-          <a:bodyPr/>
-          <a:lstStyle/>
-          <a:p>
-            <a:endParaRPr/>
-          </a:p>
-        </p:txBody>
-      </p:sp>
-      <p:sp>
-        <p:nvSpPr>
-          <p:cNvPr id="22" name="Shape 19"/>
-          <p:cNvSpPr/>
-          <p:nvPr/>
-        </p:nvSpPr>
-        <p:spPr>
-          <a:xfrm>
-            <a:off x="3593592" y="2048256"/>
-            <a:ext cx="402336" cy="402336"/>
-          </a:xfrm>
-          <a:prstGeom prst="ellipse">
-            <a:avLst/>
-          </a:prstGeom>
-          <a:solidFill>
-            <a:srgbClr val="FFFFFF"/>
-          </a:solidFill>
-          <a:ln/>
-        </p:spPr>
-        <p:txBody>
-          <a:bodyPr/>
-          <a:lstStyle/>
-          <a:p>
-            <a:endParaRPr/>
-          </a:p>
-        </p:txBody>
-      </p:sp>
       <p:pic>
         <p:nvPicPr>
-          <p:cNvPr id="23" name="Image 1" descr="preencoded.png"/>
+          <p:cNvPr id="73" name="Picture 72" descr="image.png"/>
           <p:cNvPicPr>
             <a:picLocks noChangeAspect="1"/>
           </p:cNvPicPr>
           <p:nvPr/>
         </p:nvPicPr>
         <p:blipFill>
-          <a:blip r:embed="rId4"/>
+          <a:blip r:embed="rId8"/>
           <a:stretch>
             <a:fillRect/>
           </a:stretch>
         </p:blipFill>
         <p:spPr>
           <a:xfrm>
-            <a:off x="3698199" y="2152863"/>
-            <a:ext cx="193121" cy="193121"/>
+            <a:off x="6915453" y="2926080"/>
+            <a:ext cx="4036468" cy="2359152"/>
           </a:xfrm>
           <a:prstGeom prst="rect">
             <a:avLst/>
@@ -9884,1171 +9840,118 @@
       </p:pic>
       <p:sp>
         <p:nvSpPr>
-          <p:cNvPr id="24" name="Text 20"/>
-          <p:cNvSpPr/>
-          <p:nvPr/>
-        </p:nvSpPr>
-        <p:spPr>
-          <a:xfrm>
-            <a:off x="4087368" y="2048256"/>
-            <a:ext cx="1773936" cy="402336"/>
-          </a:xfrm>
-          <a:prstGeom prst="rect">
-            <a:avLst/>
-          </a:prstGeom>
-          <a:noFill/>
-          <a:ln/>
-        </p:spPr>
-        <p:txBody>
-          <a:bodyPr wrap="square" lIns="0" tIns="0" rIns="0" bIns="0" rtlCol="0" anchor="ctr"/>
-          <a:lstStyle/>
-          <a:p>
-            <a:pPr marL="0" indent="0">
-              <a:buNone/>
-            </a:pPr>
-            <a:r>
-              <a:rPr lang="en-US" sz="1300" b="1" dirty="0">
-                <a:solidFill>
-                  <a:srgbClr val="1A2948"/>
-                </a:solidFill>
-                <a:latin typeface="Aptos" pitchFamily="34" charset="0"/>
-                <a:ea typeface="Calibri" pitchFamily="34" charset="-122"/>
-                <a:cs typeface="Calibri" pitchFamily="34" charset="-120"/>
-              </a:rPr>
-              <a:t>Pares</a:t>
-            </a:r>
-            <a:endParaRPr lang="en-US" sz="1300" dirty="0"/>
-          </a:p>
-        </p:txBody>
-      </p:sp>
-      <p:sp>
-        <p:nvSpPr>
-          <p:cNvPr id="25" name="Text 21"/>
-          <p:cNvSpPr/>
-          <p:nvPr/>
-        </p:nvSpPr>
-        <p:spPr>
-          <a:xfrm>
-            <a:off x="3593592" y="2450592"/>
-            <a:ext cx="2267712" cy="292608"/>
-          </a:xfrm>
-          <a:prstGeom prst="rect">
-            <a:avLst/>
-          </a:prstGeom>
-          <a:noFill/>
-          <a:ln/>
-        </p:spPr>
-        <p:txBody>
-          <a:bodyPr wrap="square" lIns="0" tIns="0" rIns="0" bIns="0" rtlCol="0" anchor="ctr"/>
-          <a:lstStyle/>
-          <a:p>
-            <a:pPr marL="0" indent="0">
+          <p:cNvPr id="74" name="TextBox 73"/>
+          <p:cNvSpPr txBox="1"/>
+          <p:nvPr/>
+        </p:nvSpPr>
+        <p:spPr>
+          <a:xfrm>
+            <a:off x="548640" y="5449824"/>
+            <a:ext cx="5394960" cy="512064"/>
+          </a:xfrm>
+          <a:prstGeom prst="rect">
+            <a:avLst/>
+          </a:prstGeom>
+          <a:noFill/>
+        </p:spPr>
+        <p:txBody>
+          <a:bodyPr wrap="square" anchor="t" lIns="0" rIns="0" tIns="0" bIns="0">
+            <a:spAutoFit/>
+          </a:bodyPr>
+          <a:lstStyle/>
+          <a:p>
+            <a:pPr algn="l">
               <a:lnSpc>
-                <a:spcPts val="1050"/>
+                <a:spcPct val="115000"/>
               </a:lnSpc>
-              <a:buNone/>
-            </a:pPr>
-            <a:r>
-              <a:rPr lang="en-US" sz="900" i="1" dirty="0">
-                <a:solidFill>
-                  <a:srgbClr val="2B6CB0"/>
-                </a:solidFill>
-                <a:latin typeface="Aptos" pitchFamily="34" charset="0"/>
-                <a:ea typeface="Calibri" pitchFamily="34" charset="-122"/>
-                <a:cs typeface="Calibri" pitchFamily="34" charset="-120"/>
-              </a:rPr>
-              <a:t>Este número é alto para um hospital deste porte?</a:t>
-            </a:r>
-            <a:endParaRPr lang="en-US" sz="800" dirty="0"/>
-          </a:p>
-        </p:txBody>
-      </p:sp>
-      <p:sp>
-        <p:nvSpPr>
-          <p:cNvPr id="26" name="Text 22"/>
-          <p:cNvSpPr/>
-          <p:nvPr/>
-        </p:nvSpPr>
-        <p:spPr>
-          <a:xfrm>
-            <a:off x="3593592" y="2907792"/>
-            <a:ext cx="2267712" cy="182880"/>
-          </a:xfrm>
-          <a:prstGeom prst="rect">
-            <a:avLst/>
-          </a:prstGeom>
-          <a:noFill/>
-          <a:ln/>
-        </p:spPr>
-        <p:txBody>
-          <a:bodyPr wrap="square" lIns="0" tIns="0" rIns="0" bIns="0" rtlCol="0" anchor="ctr"/>
-          <a:lstStyle/>
-          <a:p>
-            <a:pPr marL="0" indent="0">
-              <a:buNone/>
-            </a:pPr>
-            <a:r>
-              <a:rPr lang="en-US" sz="900" b="1" kern="0" spc="110" dirty="0">
-                <a:solidFill>
-                  <a:srgbClr val="37AB94"/>
-                </a:solidFill>
-                <a:latin typeface="Aptos" pitchFamily="34" charset="0"/>
-                <a:ea typeface="Calibri" pitchFamily="34" charset="-122"/>
-                <a:cs typeface="Calibri" pitchFamily="34" charset="-120"/>
-              </a:rPr>
-              <a:t>O QUE MOSTRA</a:t>
-            </a:r>
-            <a:endParaRPr lang="en-US" sz="750" dirty="0"/>
-          </a:p>
-        </p:txBody>
-      </p:sp>
-      <p:sp>
-        <p:nvSpPr>
-          <p:cNvPr id="27" name="Text 23"/>
-          <p:cNvSpPr/>
-          <p:nvPr/>
-        </p:nvSpPr>
-        <p:spPr>
-          <a:xfrm>
-            <a:off x="3593592" y="3108960"/>
-            <a:ext cx="2267712" cy="1133856"/>
-          </a:xfrm>
-          <a:prstGeom prst="rect">
-            <a:avLst/>
-          </a:prstGeom>
-          <a:noFill/>
-          <a:ln/>
-        </p:spPr>
-        <p:txBody>
-          <a:bodyPr wrap="square" lIns="0" tIns="0" rIns="0" bIns="0" rtlCol="0" anchor="t"/>
-          <a:lstStyle/>
-          <a:p>
-            <a:pPr marL="0" indent="0">
+            </a:pPr>
+            <a:r>
+              <a:rPr sz="850" b="0">
+                <a:solidFill>
+                  <a:srgbClr val="2D3748"/>
+                </a:solidFill>
+                <a:latin typeface="Aptos"/>
+              </a:rPr>
+              <a:t>Mapa das 62 regiões pelo placar de sinais: o gestor vê de longe onde há sinal fora do padrão, e a legenda diz que é placar para priorizar investigação, não nota de qualidade.</a:t>
+            </a:r>
+          </a:p>
+        </p:txBody>
+      </p:sp>
+      <p:sp>
+        <p:nvSpPr>
+          <p:cNvPr id="75" name="TextBox 74"/>
+          <p:cNvSpPr txBox="1"/>
+          <p:nvPr/>
+        </p:nvSpPr>
+        <p:spPr>
+          <a:xfrm>
+            <a:off x="6236208" y="5449824"/>
+            <a:ext cx="5394960" cy="512064"/>
+          </a:xfrm>
+          <a:prstGeom prst="rect">
+            <a:avLst/>
+          </a:prstGeom>
+          <a:noFill/>
+        </p:spPr>
+        <p:txBody>
+          <a:bodyPr wrap="square" anchor="t" lIns="0" rIns="0" tIns="0" bIns="0">
+            <a:spAutoFit/>
+          </a:bodyPr>
+          <a:lstStyle/>
+          <a:p>
+            <a:pPr algn="l">
               <a:lnSpc>
-                <a:spcPts val="1200"/>
+                <a:spcPct val="115000"/>
               </a:lnSpc>
-              <a:buNone/>
-            </a:pPr>
-            <a:r>
-              <a:rPr lang="en-US" sz="850" dirty="0">
+            </a:pPr>
+            <a:r>
+              <a:rPr sz="850" b="0">
                 <a:solidFill>
                   <a:srgbClr val="2D3748"/>
                 </a:solidFill>
-                <a:latin typeface="Aptos" pitchFamily="34" charset="0"/>
-                <a:ea typeface="Calibri" pitchFamily="34" charset="-122"/>
-                <a:cs typeface="Calibri" pitchFamily="34" charset="-120"/>
-              </a:rPr>
-              <a:t>Faixa interquartil, mediana e posição do hospital entre pares do mesmo porte, na mesma região, com os pares nomeados e o critério escrito.</a:t>
-            </a:r>
-            <a:endParaRPr lang="en-US" sz="850" dirty="0"/>
-          </a:p>
-        </p:txBody>
-      </p:sp>
-      <p:sp>
-        <p:nvSpPr>
-          <p:cNvPr id="28" name="Shape 24"/>
-          <p:cNvSpPr/>
-          <p:nvPr/>
-        </p:nvSpPr>
-        <p:spPr>
-          <a:xfrm>
-            <a:off x="3593592" y="3904488"/>
-            <a:ext cx="2267712" cy="9144"/>
-          </a:xfrm>
-          <a:prstGeom prst="rect">
-            <a:avLst/>
-          </a:prstGeom>
-          <a:solidFill>
-            <a:srgbClr val="D7E3F2"/>
-          </a:solidFill>
-          <a:ln/>
-        </p:spPr>
-        <p:txBody>
-          <a:bodyPr/>
-          <a:lstStyle/>
-          <a:p>
-            <a:endParaRPr/>
-          </a:p>
-        </p:txBody>
-      </p:sp>
-      <p:sp>
-        <p:nvSpPr>
-          <p:cNvPr id="29" name="Text 25"/>
-          <p:cNvSpPr/>
-          <p:nvPr/>
-        </p:nvSpPr>
-        <p:spPr>
-          <a:xfrm>
-            <a:off x="3593592" y="4014216"/>
-            <a:ext cx="2267712" cy="182880"/>
-          </a:xfrm>
-          <a:prstGeom prst="rect">
-            <a:avLst/>
-          </a:prstGeom>
-          <a:noFill/>
-          <a:ln/>
-        </p:spPr>
-        <p:txBody>
-          <a:bodyPr wrap="square" lIns="0" tIns="0" rIns="0" bIns="0" rtlCol="0" anchor="ctr"/>
-          <a:lstStyle/>
-          <a:p>
-            <a:pPr marL="0" indent="0">
-              <a:buNone/>
-            </a:pPr>
-            <a:r>
-              <a:rPr lang="en-US" sz="900" b="1" kern="0" spc="110" dirty="0">
+                <a:latin typeface="Aptos"/>
+              </a:rPr>
+              <a:t>Faixa interquartil, mediana e posição entre pares do mesmo porte, na mesma região, com o critério escrito e os pares nomeados. O porte é o que torna a comparação justa.</a:t>
+            </a:r>
+          </a:p>
+        </p:txBody>
+      </p:sp>
+      <p:sp>
+        <p:nvSpPr>
+          <p:cNvPr id="76" name="TextBox 75"/>
+          <p:cNvSpPr txBox="1"/>
+          <p:nvPr/>
+        </p:nvSpPr>
+        <p:spPr>
+          <a:xfrm>
+            <a:off x="548640" y="6053328"/>
+            <a:ext cx="11091672" cy="274320"/>
+          </a:xfrm>
+          <a:prstGeom prst="rect">
+            <a:avLst/>
+          </a:prstGeom>
+          <a:noFill/>
+        </p:spPr>
+        <p:txBody>
+          <a:bodyPr wrap="square" anchor="t" lIns="0" rIns="0" tIns="0" bIns="0">
+            <a:spAutoFit/>
+          </a:bodyPr>
+          <a:lstStyle/>
+          <a:p>
+            <a:pPr algn="l">
+              <a:lnSpc>
+                <a:spcPct val="100000"/>
+              </a:lnSpc>
+            </a:pPr>
+            <a:r>
+              <a:rPr sz="850" b="0">
                 <a:solidFill>
                   <a:srgbClr val="718096"/>
                 </a:solidFill>
-                <a:latin typeface="Aptos" pitchFamily="34" charset="0"/>
-                <a:ea typeface="Calibri" pitchFamily="34" charset="-122"/>
-                <a:cs typeface="Calibri" pitchFamily="34" charset="-120"/>
-              </a:rPr>
-              <a:t>O QUE SIGNIFICA</a:t>
-            </a:r>
-            <a:endParaRPr lang="en-US" sz="750" dirty="0"/>
-          </a:p>
-        </p:txBody>
-      </p:sp>
-      <p:sp>
-        <p:nvSpPr>
-          <p:cNvPr id="30" name="Text 26"/>
-          <p:cNvSpPr/>
-          <p:nvPr/>
-        </p:nvSpPr>
-        <p:spPr>
-          <a:xfrm>
-            <a:off x="3593592" y="4215384"/>
-            <a:ext cx="2267712" cy="987552"/>
-          </a:xfrm>
-          <a:prstGeom prst="rect">
-            <a:avLst/>
-          </a:prstGeom>
-          <a:noFill/>
-          <a:ln/>
-        </p:spPr>
-        <p:txBody>
-          <a:bodyPr wrap="square" lIns="0" tIns="0" rIns="0" bIns="0" rtlCol="0" anchor="t"/>
-          <a:lstStyle/>
-          <a:p>
-            <a:pPr marL="0" indent="0">
-              <a:lnSpc>
-                <a:spcPts val="1200"/>
-              </a:lnSpc>
-              <a:buNone/>
-            </a:pPr>
-            <a:r>
-              <a:rPr lang="en-US" sz="850" dirty="0">
-                <a:solidFill>
-                  <a:srgbClr val="718096"/>
-                </a:solidFill>
-                <a:latin typeface="Aptos" pitchFamily="34" charset="0"/>
-                <a:ea typeface="Calibri" pitchFamily="34" charset="-122"/>
-                <a:cs typeface="Calibri" pitchFamily="34" charset="-120"/>
-              </a:rPr>
-              <a:t>O produto sabia dizer o número e não sabia dizer se ele era normal. O porte entra no critério porque é ele que torna os números comparáveis.</a:t>
-            </a:r>
-            <a:endParaRPr lang="en-US" sz="850" dirty="0"/>
-          </a:p>
-        </p:txBody>
-      </p:sp>
-      <p:sp>
-        <p:nvSpPr>
-          <p:cNvPr id="31" name="Shape 27"/>
-          <p:cNvSpPr/>
-          <p:nvPr/>
-        </p:nvSpPr>
-        <p:spPr>
-          <a:xfrm>
-            <a:off x="6236208" y="1865376"/>
-            <a:ext cx="2670048" cy="3310128"/>
-          </a:xfrm>
-          <a:prstGeom prst="roundRect">
-            <a:avLst>
-              <a:gd name="adj" fmla="val 2055"/>
-            </a:avLst>
-          </a:prstGeom>
-          <a:solidFill>
-            <a:srgbClr val="FFFFFF"/>
-          </a:solidFill>
-          <a:ln w="9525">
-            <a:solidFill>
-              <a:srgbClr val="D7E3F2"/>
-            </a:solidFill>
-            <a:prstDash val="solid"/>
-          </a:ln>
-        </p:spPr>
-        <p:txBody>
-          <a:bodyPr/>
-          <a:lstStyle/>
-          <a:p>
-            <a:endParaRPr/>
-          </a:p>
-        </p:txBody>
-      </p:sp>
-      <p:sp>
-        <p:nvSpPr>
-          <p:cNvPr id="32" name="Shape 28"/>
-          <p:cNvSpPr/>
-          <p:nvPr/>
-        </p:nvSpPr>
-        <p:spPr>
-          <a:xfrm>
-            <a:off x="6236208" y="1865376"/>
-            <a:ext cx="2670048" cy="896112"/>
-          </a:xfrm>
-          <a:prstGeom prst="roundRect">
-            <a:avLst>
-              <a:gd name="adj" fmla="val 6122"/>
-            </a:avLst>
-          </a:prstGeom>
-          <a:solidFill>
-            <a:srgbClr val="EAF2FB"/>
-          </a:solidFill>
-          <a:ln/>
-        </p:spPr>
-        <p:txBody>
-          <a:bodyPr/>
-          <a:lstStyle/>
-          <a:p>
-            <a:endParaRPr/>
-          </a:p>
-        </p:txBody>
-      </p:sp>
-      <p:sp>
-        <p:nvSpPr>
-          <p:cNvPr id="33" name="Shape 29"/>
-          <p:cNvSpPr/>
-          <p:nvPr/>
-        </p:nvSpPr>
-        <p:spPr>
-          <a:xfrm>
-            <a:off x="6236208" y="2432304"/>
-            <a:ext cx="2670048" cy="329184"/>
-          </a:xfrm>
-          <a:prstGeom prst="rect">
-            <a:avLst/>
-          </a:prstGeom>
-          <a:solidFill>
-            <a:srgbClr val="EAF2FB"/>
-          </a:solidFill>
-          <a:ln/>
-        </p:spPr>
-        <p:txBody>
-          <a:bodyPr/>
-          <a:lstStyle/>
-          <a:p>
-            <a:endParaRPr/>
-          </a:p>
-        </p:txBody>
-      </p:sp>
-      <p:sp>
-        <p:nvSpPr>
-          <p:cNvPr id="34" name="Shape 30"/>
-          <p:cNvSpPr/>
-          <p:nvPr/>
-        </p:nvSpPr>
-        <p:spPr>
-          <a:xfrm>
-            <a:off x="6437376" y="2048256"/>
-            <a:ext cx="402336" cy="402336"/>
-          </a:xfrm>
-          <a:prstGeom prst="ellipse">
-            <a:avLst/>
-          </a:prstGeom>
-          <a:solidFill>
-            <a:srgbClr val="FFFFFF"/>
-          </a:solidFill>
-          <a:ln/>
-        </p:spPr>
-        <p:txBody>
-          <a:bodyPr/>
-          <a:lstStyle/>
-          <a:p>
-            <a:endParaRPr/>
-          </a:p>
-        </p:txBody>
-      </p:sp>
-      <p:pic>
-        <p:nvPicPr>
-          <p:cNvPr id="35" name="Image 2" descr="preencoded.png"/>
-          <p:cNvPicPr>
-            <a:picLocks noChangeAspect="1"/>
-          </p:cNvPicPr>
-          <p:nvPr/>
-        </p:nvPicPr>
-        <p:blipFill>
-          <a:blip r:embed="rId5"/>
-          <a:stretch>
-            <a:fillRect/>
-          </a:stretch>
-        </p:blipFill>
-        <p:spPr>
-          <a:xfrm>
-            <a:off x="6541983" y="2152863"/>
-            <a:ext cx="193121" cy="193121"/>
-          </a:xfrm>
-          <a:prstGeom prst="rect">
-            <a:avLst/>
-          </a:prstGeom>
-        </p:spPr>
-      </p:pic>
-      <p:sp>
-        <p:nvSpPr>
-          <p:cNvPr id="36" name="Text 31"/>
-          <p:cNvSpPr/>
-          <p:nvPr/>
-        </p:nvSpPr>
-        <p:spPr>
-          <a:xfrm>
-            <a:off x="6931152" y="2048256"/>
-            <a:ext cx="1773936" cy="402336"/>
-          </a:xfrm>
-          <a:prstGeom prst="rect">
-            <a:avLst/>
-          </a:prstGeom>
-          <a:noFill/>
-          <a:ln/>
-        </p:spPr>
-        <p:txBody>
-          <a:bodyPr wrap="square" lIns="0" tIns="0" rIns="0" bIns="0" rtlCol="0" anchor="ctr"/>
-          <a:lstStyle/>
-          <a:p>
-            <a:pPr marL="0" indent="0">
-              <a:buNone/>
-            </a:pPr>
-            <a:r>
-              <a:rPr lang="en-US" sz="1300" b="1" dirty="0">
-                <a:solidFill>
-                  <a:srgbClr val="1A2948"/>
-                </a:solidFill>
-                <a:latin typeface="Aptos" pitchFamily="34" charset="0"/>
-                <a:ea typeface="Calibri" pitchFamily="34" charset="-122"/>
-                <a:cs typeface="Calibri" pitchFamily="34" charset="-120"/>
-              </a:rPr>
-              <a:t>Hospital</a:t>
-            </a:r>
-            <a:endParaRPr lang="en-US" sz="1300" dirty="0"/>
-          </a:p>
-        </p:txBody>
-      </p:sp>
-      <p:sp>
-        <p:nvSpPr>
-          <p:cNvPr id="37" name="Text 32"/>
-          <p:cNvSpPr/>
-          <p:nvPr/>
-        </p:nvSpPr>
-        <p:spPr>
-          <a:xfrm>
-            <a:off x="6437376" y="2450592"/>
-            <a:ext cx="2267712" cy="292608"/>
-          </a:xfrm>
-          <a:prstGeom prst="rect">
-            <a:avLst/>
-          </a:prstGeom>
-          <a:noFill/>
-          <a:ln/>
-        </p:spPr>
-        <p:txBody>
-          <a:bodyPr wrap="square" lIns="0" tIns="0" rIns="0" bIns="0" rtlCol="0" anchor="ctr"/>
-          <a:lstStyle/>
-          <a:p>
-            <a:pPr marL="0" indent="0">
-              <a:lnSpc>
-                <a:spcPts val="1050"/>
-              </a:lnSpc>
-              <a:buNone/>
-            </a:pPr>
-            <a:r>
-              <a:rPr lang="en-US" sz="900" i="1" dirty="0">
-                <a:solidFill>
-                  <a:srgbClr val="2B6CB0"/>
-                </a:solidFill>
-                <a:latin typeface="Aptos" pitchFamily="34" charset="0"/>
-                <a:ea typeface="Calibri" pitchFamily="34" charset="-122"/>
-                <a:cs typeface="Calibri" pitchFamily="34" charset="-120"/>
-              </a:rPr>
-              <a:t>Em qual hospital, especialidade ou diagnóstico o sinal se concentra?</a:t>
-            </a:r>
-            <a:endParaRPr lang="en-US" sz="800" dirty="0"/>
-          </a:p>
-        </p:txBody>
-      </p:sp>
-      <p:sp>
-        <p:nvSpPr>
-          <p:cNvPr id="38" name="Text 33"/>
-          <p:cNvSpPr/>
-          <p:nvPr/>
-        </p:nvSpPr>
-        <p:spPr>
-          <a:xfrm>
-            <a:off x="6437376" y="2907792"/>
-            <a:ext cx="2267712" cy="182880"/>
-          </a:xfrm>
-          <a:prstGeom prst="rect">
-            <a:avLst/>
-          </a:prstGeom>
-          <a:noFill/>
-          <a:ln/>
-        </p:spPr>
-        <p:txBody>
-          <a:bodyPr wrap="square" lIns="0" tIns="0" rIns="0" bIns="0" rtlCol="0" anchor="ctr"/>
-          <a:lstStyle/>
-          <a:p>
-            <a:pPr marL="0" indent="0">
-              <a:buNone/>
-            </a:pPr>
-            <a:r>
-              <a:rPr lang="en-US" sz="900" b="1" kern="0" spc="110" dirty="0">
-                <a:solidFill>
-                  <a:srgbClr val="37AB94"/>
-                </a:solidFill>
-                <a:latin typeface="Aptos" pitchFamily="34" charset="0"/>
-                <a:ea typeface="Calibri" pitchFamily="34" charset="-122"/>
-                <a:cs typeface="Calibri" pitchFamily="34" charset="-120"/>
-              </a:rPr>
-              <a:t>O QUE MOSTRA</a:t>
-            </a:r>
-            <a:endParaRPr lang="en-US" sz="750" dirty="0"/>
-          </a:p>
-        </p:txBody>
-      </p:sp>
-      <p:sp>
-        <p:nvSpPr>
-          <p:cNvPr id="39" name="Text 34"/>
-          <p:cNvSpPr/>
-          <p:nvPr/>
-        </p:nvSpPr>
-        <p:spPr>
-          <a:xfrm>
-            <a:off x="6437376" y="3108960"/>
-            <a:ext cx="2267712" cy="1133856"/>
-          </a:xfrm>
-          <a:prstGeom prst="rect">
-            <a:avLst/>
-          </a:prstGeom>
-          <a:noFill/>
-          <a:ln/>
-        </p:spPr>
-        <p:txBody>
-          <a:bodyPr wrap="square" lIns="0" tIns="0" rIns="0" bIns="0" rtlCol="0" anchor="t"/>
-          <a:lstStyle/>
-          <a:p>
-            <a:pPr marL="0" indent="0">
-              <a:lnSpc>
-                <a:spcPts val="1200"/>
-              </a:lnSpc>
-              <a:buNone/>
-            </a:pPr>
-            <a:r>
-              <a:rPr lang="en-US" sz="850" dirty="0">
-                <a:solidFill>
-                  <a:srgbClr val="2D3748"/>
-                </a:solidFill>
-                <a:latin typeface="Aptos" pitchFamily="34" charset="0"/>
-                <a:ea typeface="Calibri" pitchFamily="34" charset="-122"/>
-                <a:cs typeface="Calibri" pitchFamily="34" charset="-120"/>
-              </a:rPr>
-              <a:t>Lista ordenável da região, série mensal, especialidades com o IPE e CIDs elegíveis para o IPR.</a:t>
-            </a:r>
-            <a:endParaRPr lang="en-US" sz="850" dirty="0"/>
-          </a:p>
-        </p:txBody>
-      </p:sp>
-      <p:sp>
-        <p:nvSpPr>
-          <p:cNvPr id="40" name="Shape 35"/>
-          <p:cNvSpPr/>
-          <p:nvPr/>
-        </p:nvSpPr>
-        <p:spPr>
-          <a:xfrm>
-            <a:off x="6437376" y="3904488"/>
-            <a:ext cx="2267712" cy="9144"/>
-          </a:xfrm>
-          <a:prstGeom prst="rect">
-            <a:avLst/>
-          </a:prstGeom>
-          <a:solidFill>
-            <a:srgbClr val="D7E3F2"/>
-          </a:solidFill>
-          <a:ln/>
-        </p:spPr>
-        <p:txBody>
-          <a:bodyPr/>
-          <a:lstStyle/>
-          <a:p>
-            <a:endParaRPr/>
-          </a:p>
-        </p:txBody>
-      </p:sp>
-      <p:sp>
-        <p:nvSpPr>
-          <p:cNvPr id="41" name="Text 36"/>
-          <p:cNvSpPr/>
-          <p:nvPr/>
-        </p:nvSpPr>
-        <p:spPr>
-          <a:xfrm>
-            <a:off x="6437376" y="4014216"/>
-            <a:ext cx="2267712" cy="182880"/>
-          </a:xfrm>
-          <a:prstGeom prst="rect">
-            <a:avLst/>
-          </a:prstGeom>
-          <a:noFill/>
-          <a:ln/>
-        </p:spPr>
-        <p:txBody>
-          <a:bodyPr wrap="square" lIns="0" tIns="0" rIns="0" bIns="0" rtlCol="0" anchor="ctr"/>
-          <a:lstStyle/>
-          <a:p>
-            <a:pPr marL="0" indent="0">
-              <a:buNone/>
-            </a:pPr>
-            <a:r>
-              <a:rPr lang="en-US" sz="900" b="1" kern="0" spc="110" dirty="0">
-                <a:solidFill>
-                  <a:srgbClr val="718096"/>
-                </a:solidFill>
-                <a:latin typeface="Aptos" pitchFamily="34" charset="0"/>
-                <a:ea typeface="Calibri" pitchFamily="34" charset="-122"/>
-                <a:cs typeface="Calibri" pitchFamily="34" charset="-120"/>
-              </a:rPr>
-              <a:t>O QUE SIGNIFICA</a:t>
-            </a:r>
-            <a:endParaRPr lang="en-US" sz="750" dirty="0"/>
-          </a:p>
-        </p:txBody>
-      </p:sp>
-      <p:sp>
-        <p:nvSpPr>
-          <p:cNvPr id="42" name="Text 37"/>
-          <p:cNvSpPr/>
-          <p:nvPr/>
-        </p:nvSpPr>
-        <p:spPr>
-          <a:xfrm>
-            <a:off x="6437376" y="4215384"/>
-            <a:ext cx="2267712" cy="987552"/>
-          </a:xfrm>
-          <a:prstGeom prst="rect">
-            <a:avLst/>
-          </a:prstGeom>
-          <a:noFill/>
-          <a:ln/>
-        </p:spPr>
-        <p:txBody>
-          <a:bodyPr wrap="square" lIns="0" tIns="0" rIns="0" bIns="0" rtlCol="0" anchor="t"/>
-          <a:lstStyle/>
-          <a:p>
-            <a:pPr marL="0" indent="0">
-              <a:lnSpc>
-                <a:spcPts val="1200"/>
-              </a:lnSpc>
-              <a:buNone/>
-            </a:pPr>
-            <a:r>
-              <a:rPr lang="en-US" sz="850" dirty="0">
-                <a:solidFill>
-                  <a:srgbClr val="718096"/>
-                </a:solidFill>
-                <a:latin typeface="Aptos" pitchFamily="34" charset="0"/>
-                <a:ea typeface="Calibri" pitchFamily="34" charset="-122"/>
-                <a:cs typeface="Calibri" pitchFamily="34" charset="-120"/>
-              </a:rPr>
-              <a:t>Aprofunda volume, tendência, mortalidade, valor e permanência ante os pares, sempre com recorte e amostra declarados.</a:t>
-            </a:r>
-            <a:endParaRPr lang="en-US" sz="850" dirty="0"/>
-          </a:p>
-        </p:txBody>
-      </p:sp>
-      <p:sp>
-        <p:nvSpPr>
-          <p:cNvPr id="43" name="Shape 38"/>
-          <p:cNvSpPr/>
-          <p:nvPr/>
-        </p:nvSpPr>
-        <p:spPr>
-          <a:xfrm>
-            <a:off x="9079992" y="1865376"/>
-            <a:ext cx="2670048" cy="3310128"/>
-          </a:xfrm>
-          <a:prstGeom prst="roundRect">
-            <a:avLst>
-              <a:gd name="adj" fmla="val 2055"/>
-            </a:avLst>
-          </a:prstGeom>
-          <a:solidFill>
-            <a:srgbClr val="FFFFFF"/>
-          </a:solidFill>
-          <a:ln w="9525">
-            <a:solidFill>
-              <a:srgbClr val="D7E3F2"/>
-            </a:solidFill>
-            <a:prstDash val="solid"/>
-          </a:ln>
-        </p:spPr>
-        <p:txBody>
-          <a:bodyPr/>
-          <a:lstStyle/>
-          <a:p>
-            <a:endParaRPr/>
-          </a:p>
-        </p:txBody>
-      </p:sp>
-      <p:sp>
-        <p:nvSpPr>
-          <p:cNvPr id="44" name="Shape 39"/>
-          <p:cNvSpPr/>
-          <p:nvPr/>
-        </p:nvSpPr>
-        <p:spPr>
-          <a:xfrm>
-            <a:off x="9079992" y="1865376"/>
-            <a:ext cx="2670048" cy="896112"/>
-          </a:xfrm>
-          <a:prstGeom prst="roundRect">
-            <a:avLst>
-              <a:gd name="adj" fmla="val 6122"/>
-            </a:avLst>
-          </a:prstGeom>
-          <a:solidFill>
-            <a:srgbClr val="EAF2FB"/>
-          </a:solidFill>
-          <a:ln/>
-        </p:spPr>
-        <p:txBody>
-          <a:bodyPr/>
-          <a:lstStyle/>
-          <a:p>
-            <a:endParaRPr/>
-          </a:p>
-        </p:txBody>
-      </p:sp>
-      <p:sp>
-        <p:nvSpPr>
-          <p:cNvPr id="45" name="Shape 40"/>
-          <p:cNvSpPr/>
-          <p:nvPr/>
-        </p:nvSpPr>
-        <p:spPr>
-          <a:xfrm>
-            <a:off x="9079992" y="2432304"/>
-            <a:ext cx="2670048" cy="329184"/>
-          </a:xfrm>
-          <a:prstGeom prst="rect">
-            <a:avLst/>
-          </a:prstGeom>
-          <a:solidFill>
-            <a:srgbClr val="EAF2FB"/>
-          </a:solidFill>
-          <a:ln/>
-        </p:spPr>
-        <p:txBody>
-          <a:bodyPr/>
-          <a:lstStyle/>
-          <a:p>
-            <a:endParaRPr/>
-          </a:p>
-        </p:txBody>
-      </p:sp>
-      <p:sp>
-        <p:nvSpPr>
-          <p:cNvPr id="46" name="Shape 41"/>
-          <p:cNvSpPr/>
-          <p:nvPr/>
-        </p:nvSpPr>
-        <p:spPr>
-          <a:xfrm>
-            <a:off x="9281160" y="2048256"/>
-            <a:ext cx="402336" cy="402336"/>
-          </a:xfrm>
-          <a:prstGeom prst="ellipse">
-            <a:avLst/>
-          </a:prstGeom>
-          <a:solidFill>
-            <a:srgbClr val="FFFFFF"/>
-          </a:solidFill>
-          <a:ln/>
-        </p:spPr>
-        <p:txBody>
-          <a:bodyPr/>
-          <a:lstStyle/>
-          <a:p>
-            <a:endParaRPr/>
-          </a:p>
-        </p:txBody>
-      </p:sp>
-      <p:pic>
-        <p:nvPicPr>
-          <p:cNvPr id="47" name="Image 3" descr="preencoded.png"/>
-          <p:cNvPicPr>
-            <a:picLocks noChangeAspect="1"/>
-          </p:cNvPicPr>
-          <p:nvPr/>
-        </p:nvPicPr>
-        <p:blipFill>
-          <a:blip r:embed="rId6"/>
-          <a:stretch>
-            <a:fillRect/>
-          </a:stretch>
-        </p:blipFill>
-        <p:spPr>
-          <a:xfrm>
-            <a:off x="9385767" y="2152863"/>
-            <a:ext cx="193121" cy="193121"/>
-          </a:xfrm>
-          <a:prstGeom prst="rect">
-            <a:avLst/>
-          </a:prstGeom>
-        </p:spPr>
-      </p:pic>
-      <p:sp>
-        <p:nvSpPr>
-          <p:cNvPr id="48" name="Text 42"/>
-          <p:cNvSpPr/>
-          <p:nvPr/>
-        </p:nvSpPr>
-        <p:spPr>
-          <a:xfrm>
-            <a:off x="9774936" y="2048256"/>
-            <a:ext cx="1773936" cy="402336"/>
-          </a:xfrm>
-          <a:prstGeom prst="rect">
-            <a:avLst/>
-          </a:prstGeom>
-          <a:noFill/>
-          <a:ln/>
-        </p:spPr>
-        <p:txBody>
-          <a:bodyPr wrap="square" lIns="0" tIns="0" rIns="0" bIns="0" rtlCol="0" anchor="ctr"/>
-          <a:lstStyle/>
-          <a:p>
-            <a:pPr marL="0" indent="0">
-              <a:buNone/>
-            </a:pPr>
-            <a:r>
-              <a:rPr lang="en-US" sz="1300" b="1" dirty="0">
-                <a:solidFill>
-                  <a:srgbClr val="1A2948"/>
-                </a:solidFill>
-                <a:latin typeface="Aptos" pitchFamily="34" charset="0"/>
-                <a:ea typeface="Calibri" pitchFamily="34" charset="-122"/>
-                <a:cs typeface="Calibri" pitchFamily="34" charset="-120"/>
-              </a:rPr>
-              <a:t>Metodologia</a:t>
-            </a:r>
-            <a:endParaRPr lang="en-US" sz="1300" dirty="0"/>
-          </a:p>
-        </p:txBody>
-      </p:sp>
-      <p:sp>
-        <p:nvSpPr>
-          <p:cNvPr id="49" name="Text 43"/>
-          <p:cNvSpPr/>
-          <p:nvPr/>
-        </p:nvSpPr>
-        <p:spPr>
-          <a:xfrm>
-            <a:off x="9281160" y="2450592"/>
-            <a:ext cx="2267712" cy="292608"/>
-          </a:xfrm>
-          <a:prstGeom prst="rect">
-            <a:avLst/>
-          </a:prstGeom>
-          <a:noFill/>
-          <a:ln/>
-        </p:spPr>
-        <p:txBody>
-          <a:bodyPr wrap="square" lIns="0" tIns="0" rIns="0" bIns="0" rtlCol="0" anchor="ctr"/>
-          <a:lstStyle/>
-          <a:p>
-            <a:pPr marL="0" indent="0">
-              <a:lnSpc>
-                <a:spcPts val="1050"/>
-              </a:lnSpc>
-              <a:buNone/>
-            </a:pPr>
-            <a:r>
-              <a:rPr lang="en-US" sz="900" i="1" dirty="0">
-                <a:solidFill>
-                  <a:srgbClr val="2B6CB0"/>
-                </a:solidFill>
-                <a:latin typeface="Aptos" pitchFamily="34" charset="0"/>
-                <a:ea typeface="Calibri" pitchFamily="34" charset="-122"/>
-                <a:cs typeface="Calibri" pitchFamily="34" charset="-120"/>
-              </a:rPr>
-              <a:t>Qual é a origem do número e quais são seus limites?</a:t>
-            </a:r>
-            <a:endParaRPr lang="en-US" sz="800" dirty="0"/>
-          </a:p>
-        </p:txBody>
-      </p:sp>
-      <p:sp>
-        <p:nvSpPr>
-          <p:cNvPr id="50" name="Text 44"/>
-          <p:cNvSpPr/>
-          <p:nvPr/>
-        </p:nvSpPr>
-        <p:spPr>
-          <a:xfrm>
-            <a:off x="9281160" y="2907792"/>
-            <a:ext cx="2267712" cy="182880"/>
-          </a:xfrm>
-          <a:prstGeom prst="rect">
-            <a:avLst/>
-          </a:prstGeom>
-          <a:noFill/>
-          <a:ln/>
-        </p:spPr>
-        <p:txBody>
-          <a:bodyPr wrap="square" lIns="0" tIns="0" rIns="0" bIns="0" rtlCol="0" anchor="ctr"/>
-          <a:lstStyle/>
-          <a:p>
-            <a:pPr marL="0" indent="0">
-              <a:buNone/>
-            </a:pPr>
-            <a:r>
-              <a:rPr lang="en-US" sz="900" b="1" kern="0" spc="110" dirty="0">
-                <a:solidFill>
-                  <a:srgbClr val="37AB94"/>
-                </a:solidFill>
-                <a:latin typeface="Aptos" pitchFamily="34" charset="0"/>
-                <a:ea typeface="Calibri" pitchFamily="34" charset="-122"/>
-                <a:cs typeface="Calibri" pitchFamily="34" charset="-120"/>
-              </a:rPr>
-              <a:t>O QUE MOSTRA</a:t>
-            </a:r>
-            <a:endParaRPr lang="en-US" sz="750" dirty="0"/>
-          </a:p>
-        </p:txBody>
-      </p:sp>
-      <p:sp>
-        <p:nvSpPr>
-          <p:cNvPr id="51" name="Text 45"/>
-          <p:cNvSpPr/>
-          <p:nvPr/>
-        </p:nvSpPr>
-        <p:spPr>
-          <a:xfrm>
-            <a:off x="9281160" y="3108960"/>
-            <a:ext cx="2267712" cy="1133856"/>
-          </a:xfrm>
-          <a:prstGeom prst="rect">
-            <a:avLst/>
-          </a:prstGeom>
-          <a:noFill/>
-          <a:ln/>
-        </p:spPr>
-        <p:txBody>
-          <a:bodyPr wrap="square" lIns="0" tIns="0" rIns="0" bIns="0" rtlCol="0" anchor="t"/>
-          <a:lstStyle/>
-          <a:p>
-            <a:pPr marL="0" indent="0">
-              <a:lnSpc>
-                <a:spcPts val="1200"/>
-              </a:lnSpc>
-              <a:buNone/>
-            </a:pPr>
-            <a:r>
-              <a:rPr lang="en-US" sz="850" dirty="0">
-                <a:solidFill>
-                  <a:srgbClr val="2D3748"/>
-                </a:solidFill>
-                <a:latin typeface="Aptos" pitchFamily="34" charset="0"/>
-                <a:ea typeface="Calibri" pitchFamily="34" charset="-122"/>
-                <a:cs typeface="Calibri" pitchFamily="34" charset="-120"/>
-              </a:rPr>
-              <a:t>Reconciliação e limites em primeiro plano; cobertura, fórmulas, cortes, estados de ausência, definições e fontes logo abaixo.</a:t>
-            </a:r>
-            <a:endParaRPr lang="en-US" sz="850" dirty="0"/>
-          </a:p>
-        </p:txBody>
-      </p:sp>
-      <p:sp>
-        <p:nvSpPr>
-          <p:cNvPr id="52" name="Shape 46"/>
-          <p:cNvSpPr/>
-          <p:nvPr/>
-        </p:nvSpPr>
-        <p:spPr>
-          <a:xfrm>
-            <a:off x="9281160" y="3904488"/>
-            <a:ext cx="2267712" cy="9144"/>
-          </a:xfrm>
-          <a:prstGeom prst="rect">
-            <a:avLst/>
-          </a:prstGeom>
-          <a:solidFill>
-            <a:srgbClr val="D7E3F2"/>
-          </a:solidFill>
-          <a:ln/>
-        </p:spPr>
-        <p:txBody>
-          <a:bodyPr/>
-          <a:lstStyle/>
-          <a:p>
-            <a:endParaRPr/>
-          </a:p>
-        </p:txBody>
-      </p:sp>
-      <p:sp>
-        <p:nvSpPr>
-          <p:cNvPr id="53" name="Text 47"/>
-          <p:cNvSpPr/>
-          <p:nvPr/>
-        </p:nvSpPr>
-        <p:spPr>
-          <a:xfrm>
-            <a:off x="9281160" y="4014216"/>
-            <a:ext cx="2267712" cy="182880"/>
-          </a:xfrm>
-          <a:prstGeom prst="rect">
-            <a:avLst/>
-          </a:prstGeom>
-          <a:noFill/>
-          <a:ln/>
-        </p:spPr>
-        <p:txBody>
-          <a:bodyPr wrap="square" lIns="0" tIns="0" rIns="0" bIns="0" rtlCol="0" anchor="ctr"/>
-          <a:lstStyle/>
-          <a:p>
-            <a:pPr marL="0" indent="0">
-              <a:buNone/>
-            </a:pPr>
-            <a:r>
-              <a:rPr lang="en-US" sz="900" b="1" kern="0" spc="110" dirty="0">
-                <a:solidFill>
-                  <a:srgbClr val="718096"/>
-                </a:solidFill>
-                <a:latin typeface="Aptos" pitchFamily="34" charset="0"/>
-                <a:ea typeface="Calibri" pitchFamily="34" charset="-122"/>
-                <a:cs typeface="Calibri" pitchFamily="34" charset="-120"/>
-              </a:rPr>
-              <a:t>O QUE SIGNIFICA</a:t>
-            </a:r>
-            <a:endParaRPr lang="en-US" sz="750" dirty="0"/>
-          </a:p>
-        </p:txBody>
-      </p:sp>
-      <p:sp>
-        <p:nvSpPr>
-          <p:cNvPr id="54" name="Text 48"/>
-          <p:cNvSpPr/>
-          <p:nvPr/>
-        </p:nvSpPr>
-        <p:spPr>
-          <a:xfrm>
-            <a:off x="9281160" y="4215384"/>
-            <a:ext cx="2267712" cy="987552"/>
-          </a:xfrm>
-          <a:prstGeom prst="rect">
-            <a:avLst/>
-          </a:prstGeom>
-          <a:noFill/>
-          <a:ln/>
-        </p:spPr>
-        <p:txBody>
-          <a:bodyPr wrap="square" lIns="0" tIns="0" rIns="0" bIns="0" rtlCol="0" anchor="t"/>
-          <a:lstStyle/>
-          <a:p>
-            <a:pPr marL="0" indent="0">
-              <a:lnSpc>
-                <a:spcPts val="1200"/>
-              </a:lnSpc>
-              <a:buNone/>
-            </a:pPr>
-            <a:r>
-              <a:rPr lang="en-US" sz="850" dirty="0">
-                <a:solidFill>
-                  <a:srgbClr val="718096"/>
-                </a:solidFill>
-                <a:latin typeface="Aptos" pitchFamily="34" charset="0"/>
-                <a:ea typeface="Calibri" pitchFamily="34" charset="-122"/>
-                <a:cs typeface="Calibri" pitchFamily="34" charset="-120"/>
-              </a:rPr>
-              <a:t>Torna rastreáveis a definição, a elegibilidade e a interpretação de cada indicador.</a:t>
-            </a:r>
-            <a:endParaRPr lang="en-US" sz="850" dirty="0"/>
-          </a:p>
-        </p:txBody>
-      </p:sp>
-      <p:sp>
-        <p:nvSpPr>
-          <p:cNvPr id="55" name="Text 49"/>
-          <p:cNvSpPr/>
-          <p:nvPr/>
-        </p:nvSpPr>
-        <p:spPr>
-          <a:xfrm>
-            <a:off x="548640" y="6419088"/>
-            <a:ext cx="10454335" cy="256032"/>
-          </a:xfrm>
-          <a:prstGeom prst="rect">
-            <a:avLst/>
-          </a:prstGeom>
-          <a:noFill/>
-          <a:ln/>
-        </p:spPr>
-        <p:txBody>
-          <a:bodyPr wrap="square" lIns="0" tIns="0" rIns="0" bIns="0" rtlCol="0" anchor="ctr"/>
-          <a:lstStyle/>
-          <a:p>
-            <a:pPr marL="0" indent="0">
-              <a:buNone/>
-            </a:pPr>
-            <a:r>
-              <a:rPr lang="en-US" sz="750" dirty="0">
-                <a:solidFill>
-                  <a:srgbClr val="9DB0C8"/>
-                </a:solidFill>
-                <a:latin typeface="Aptos" pitchFamily="34" charset="0"/>
-                <a:ea typeface="Calibri" pitchFamily="34" charset="-122"/>
-                <a:cs typeface="Calibri" pitchFamily="34" charset="-120"/>
-              </a:rPr>
-              <a:t>MedFlow  ·  Painel Inteligente de Acesso Hospitalar e Perfil de Atendimento  ·  Ômega Urban Tech  ·  Enterprise Challenge FIAP × Oracle 2026</a:t>
-            </a:r>
-            <a:endParaRPr lang="en-US" sz="750" dirty="0"/>
-          </a:p>
-        </p:txBody>
-      </p:sp>
-      <p:sp>
-        <p:nvSpPr>
-          <p:cNvPr id="56" name="Text 50"/>
-          <p:cNvSpPr/>
-          <p:nvPr/>
-        </p:nvSpPr>
-        <p:spPr>
-          <a:xfrm>
-            <a:off x="11094415" y="6419088"/>
-            <a:ext cx="548640" cy="256032"/>
-          </a:xfrm>
-          <a:prstGeom prst="rect">
-            <a:avLst/>
-          </a:prstGeom>
-          <a:noFill/>
-          <a:ln/>
-        </p:spPr>
-        <p:txBody>
-          <a:bodyPr wrap="square" lIns="0" tIns="0" rIns="0" bIns="0" rtlCol="0" anchor="ctr"/>
-          <a:lstStyle/>
-          <a:p>
-            <a:pPr marL="0" indent="0" algn="r">
-              <a:buNone/>
-            </a:pPr>
-            <a:r>
-              <a:rPr lang="en-US" sz="850" b="1" dirty="0">
-                <a:solidFill>
-                  <a:srgbClr val="2B6CB0"/>
-                </a:solidFill>
-                <a:latin typeface="Aptos" pitchFamily="34" charset="0"/>
-                <a:ea typeface="Calibri" pitchFamily="34" charset="-122"/>
-                <a:cs typeface="Calibri" pitchFamily="34" charset="-120"/>
-              </a:rPr>
-              <a:t>13</a:t>
-            </a:r>
-            <a:endParaRPr lang="en-US" sz="850" dirty="0"/>
+                <a:latin typeface="Aptos"/>
+              </a:rPr>
+              <a:t>A origem aparece na interface: “Oracle ao vivo” quando a API responde e “Snapshot de contingência” quando não. As duas fontes nunca são misturadas.</a:t>
+            </a:r>
           </a:p>
         </p:txBody>
       </p:sp>
@@ -12984,7 +11887,7 @@
                 <a:ea typeface="Calibri" pitchFamily="34" charset="-122"/>
                 <a:cs typeface="Calibri" pitchFamily="34" charset="-120"/>
               </a:rPr>
-              <a:t>Catálogo de indicadores</a:t>
+              <a:t>Indicadores e limites</a:t>
             </a:r>
             <a:endParaRPr lang="en-US" sz="2200" dirty="0"/>
           </a:p>
@@ -13045,7 +11948,7 @@
         </p:nvGraphicFramePr>
         <p:xfrm>
           <a:off x="548640" y="1335024"/>
-          <a:ext cx="11091672" cy="4343400"/>
+          <a:ext cx="11091672" cy="3575304"/>
         </p:xfrm>
         <a:graphic>
           <a:graphicData uri="http://schemas.openxmlformats.org/drawingml/2006/table">
@@ -13360,7 +12263,7 @@
                   </a:ext>
                 </a:extLst>
               </a:tr>
-              <a:tr h="640080">
+              <a:tr h="512064">
                 <a:tc>
                   <a:txBody>
                     <a:bodyPr/>
@@ -13660,7 +12563,7 @@
                   </a:ext>
                 </a:extLst>
               </a:tr>
-              <a:tr h="640080">
+              <a:tr h="512064">
                 <a:tc>
                   <a:txBody>
                     <a:bodyPr/>
@@ -13960,7 +12863,7 @@
                   </a:ext>
                 </a:extLst>
               </a:tr>
-              <a:tr h="640080">
+              <a:tr h="512064">
                 <a:tc>
                   <a:txBody>
                     <a:bodyPr/>
@@ -14260,7 +13163,7 @@
                   </a:ext>
                 </a:extLst>
               </a:tr>
-              <a:tr h="640080">
+              <a:tr h="512064">
                 <a:tc>
                   <a:txBody>
                     <a:bodyPr/>
@@ -14560,7 +13463,7 @@
                   </a:ext>
                 </a:extLst>
               </a:tr>
-              <a:tr h="640080">
+              <a:tr h="512064">
                 <a:tc>
                   <a:txBody>
                     <a:bodyPr/>
@@ -14860,7 +13763,7 @@
                   </a:ext>
                 </a:extLst>
               </a:tr>
-              <a:tr h="640080">
+              <a:tr h="512064">
                 <a:tc>
                   <a:txBody>
                     <a:bodyPr/>
@@ -15145,53 +14048,53 @@
       </p:graphicFrame>
       <p:sp>
         <p:nvSpPr>
-          <p:cNvPr id="7" name="Text 4"/>
-          <p:cNvSpPr/>
-          <p:nvPr/>
-        </p:nvSpPr>
-        <p:spPr>
-          <a:xfrm>
-            <a:off x="548640" y="5961888"/>
-            <a:ext cx="11094415" cy="310896"/>
-          </a:xfrm>
-          <a:prstGeom prst="rect">
-            <a:avLst/>
-          </a:prstGeom>
-          <a:noFill/>
-          <a:ln/>
-        </p:spPr>
-        <p:txBody>
-          <a:bodyPr wrap="square" lIns="0" tIns="0" rIns="0" bIns="0" rtlCol="0" anchor="t"/>
+          <p:cNvPr id="8" name="Text 5"/>
+          <p:cNvSpPr/>
+          <p:nvPr/>
+        </p:nvSpPr>
+        <p:spPr>
+          <a:xfrm>
+            <a:off x="548640" y="6419088"/>
+            <a:ext cx="10454335" cy="256032"/>
+          </a:xfrm>
+          <a:prstGeom prst="rect">
+            <a:avLst/>
+          </a:prstGeom>
+          <a:noFill/>
+          <a:ln/>
+        </p:spPr>
+        <p:txBody>
+          <a:bodyPr wrap="square" lIns="0" tIns="0" rIns="0" bIns="0" rtlCol="0" anchor="ctr"/>
           <a:lstStyle/>
           <a:p>
             <a:pPr marL="0" indent="0">
               <a:buNone/>
             </a:pPr>
             <a:r>
-              <a:rPr lang="en-US" sz="900" i="1" dirty="0">
-                <a:solidFill>
-                  <a:srgbClr val="718096"/>
+              <a:rPr lang="en-US" sz="750" dirty="0">
+                <a:solidFill>
+                  <a:srgbClr val="9DB0C8"/>
                 </a:solidFill>
                 <a:latin typeface="Aptos" pitchFamily="34" charset="0"/>
                 <a:ea typeface="Calibri" pitchFamily="34" charset="-122"/>
                 <a:cs typeface="Calibri" pitchFamily="34" charset="-120"/>
               </a:rPr>
-              <a:t>Regras semânticas transversais: denominador nulo em vez de divisão por zero, ausência preservada como distinta de zero, e classificação separada para amostra insuficiente.</a:t>
-            </a:r>
-            <a:endParaRPr lang="en-US" sz="800" dirty="0"/>
-          </a:p>
-        </p:txBody>
-      </p:sp>
-      <p:sp>
-        <p:nvSpPr>
-          <p:cNvPr id="8" name="Text 5"/>
-          <p:cNvSpPr/>
-          <p:nvPr/>
-        </p:nvSpPr>
-        <p:spPr>
-          <a:xfrm>
-            <a:off x="548640" y="6419088"/>
-            <a:ext cx="10454335" cy="256032"/>
+              <a:t>MedFlow  ·  Painel Inteligente de Acesso Hospitalar e Perfil de Atendimento  ·  Ômega Urban Tech  ·  Enterprise Challenge FIAP × Oracle 2026</a:t>
+            </a:r>
+            <a:endParaRPr lang="en-US" sz="750" dirty="0"/>
+          </a:p>
+        </p:txBody>
+      </p:sp>
+      <p:sp>
+        <p:nvSpPr>
+          <p:cNvPr id="9" name="Text 6"/>
+          <p:cNvSpPr/>
+          <p:nvPr/>
+        </p:nvSpPr>
+        <p:spPr>
+          <a:xfrm>
+            <a:off x="11094415" y="6419088"/>
+            <a:ext cx="548640" cy="256032"/>
           </a:xfrm>
           <a:prstGeom prst="rect">
             <a:avLst/>
@@ -15203,60 +14106,181 @@
           <a:bodyPr wrap="square" lIns="0" tIns="0" rIns="0" bIns="0" rtlCol="0" anchor="ctr"/>
           <a:lstStyle/>
           <a:p>
-            <a:pPr marL="0" indent="0">
+            <a:pPr marL="0" indent="0" algn="r">
               <a:buNone/>
             </a:pPr>
             <a:r>
-              <a:rPr lang="en-US" sz="750" dirty="0">
-                <a:solidFill>
-                  <a:srgbClr val="9DB0C8"/>
+              <a:rPr lang="en-US" sz="850" b="1" dirty="0">
+                <a:solidFill>
+                  <a:srgbClr val="2B6CB0"/>
                 </a:solidFill>
                 <a:latin typeface="Aptos" pitchFamily="34" charset="0"/>
                 <a:ea typeface="Calibri" pitchFamily="34" charset="-122"/>
                 <a:cs typeface="Calibri" pitchFamily="34" charset="-120"/>
               </a:rPr>
-              <a:t>MedFlow  ·  Painel Inteligente de Acesso Hospitalar e Perfil de Atendimento  ·  Ômega Urban Tech  ·  Enterprise Challenge FIAP × Oracle 2026</a:t>
-            </a:r>
-            <a:endParaRPr lang="en-US" sz="750" dirty="0"/>
-          </a:p>
-        </p:txBody>
-      </p:sp>
-      <p:sp>
-        <p:nvSpPr>
-          <p:cNvPr id="9" name="Text 6"/>
-          <p:cNvSpPr/>
-          <p:nvPr/>
-        </p:nvSpPr>
-        <p:spPr>
-          <a:xfrm>
-            <a:off x="11094415" y="6419088"/>
-            <a:ext cx="548640" cy="256032"/>
-          </a:xfrm>
-          <a:prstGeom prst="rect">
-            <a:avLst/>
-          </a:prstGeom>
-          <a:noFill/>
-          <a:ln/>
-        </p:spPr>
-        <p:txBody>
-          <a:bodyPr wrap="square" lIns="0" tIns="0" rIns="0" bIns="0" rtlCol="0" anchor="ctr"/>
-          <a:lstStyle/>
-          <a:p>
-            <a:pPr marL="0" indent="0" algn="r">
-              <a:buNone/>
-            </a:pPr>
-            <a:r>
-              <a:rPr lang="en-US" sz="850" b="1" dirty="0">
-                <a:solidFill>
-                  <a:srgbClr val="2B6CB0"/>
-                </a:solidFill>
-                <a:latin typeface="Aptos" pitchFamily="34" charset="0"/>
-                <a:ea typeface="Calibri" pitchFamily="34" charset="-122"/>
-                <a:cs typeface="Calibri" pitchFamily="34" charset="-120"/>
-              </a:rPr>
               <a:t>15</a:t>
             </a:r>
             <a:endParaRPr lang="en-US" sz="850" dirty="0"/>
+          </a:p>
+        </p:txBody>
+      </p:sp>
+      <p:sp>
+        <p:nvSpPr>
+          <p:cNvPr id="21" name="Rectangle 20"/>
+          <p:cNvSpPr/>
+          <p:nvPr/>
+        </p:nvSpPr>
+        <p:spPr>
+          <a:xfrm>
+            <a:off x="548640" y="5047488"/>
+            <a:ext cx="11091672" cy="7315"/>
+          </a:xfrm>
+          <a:prstGeom prst="rect">
+            <a:avLst/>
+          </a:prstGeom>
+          <a:solidFill>
+            <a:srgbClr val="D9E2EC"/>
+          </a:solidFill>
+          <a:ln>
+            <a:noFill/>
+          </a:ln>
+        </p:spPr>
+        <p:style>
+          <a:lnRef idx="1">
+            <a:schemeClr val="accent1"/>
+          </a:lnRef>
+          <a:fillRef idx="3">
+            <a:schemeClr val="accent1"/>
+          </a:fillRef>
+          <a:effectRef idx="2">
+            <a:schemeClr val="accent1"/>
+          </a:effectRef>
+          <a:fontRef idx="minor">
+            <a:schemeClr val="lt1"/>
+          </a:fontRef>
+        </p:style>
+        <p:txBody>
+          <a:bodyPr rtlCol="0" anchor="ctr"/>
+          <a:lstStyle/>
+          <a:p>
+            <a:pPr algn="ctr"/>
+          </a:p>
+        </p:txBody>
+      </p:sp>
+      <p:sp>
+        <p:nvSpPr>
+          <p:cNvPr id="22" name="TextBox 21"/>
+          <p:cNvSpPr txBox="1"/>
+          <p:nvPr/>
+        </p:nvSpPr>
+        <p:spPr>
+          <a:xfrm>
+            <a:off x="548640" y="5157216"/>
+            <a:ext cx="2011680" cy="182880"/>
+          </a:xfrm>
+          <a:prstGeom prst="rect">
+            <a:avLst/>
+          </a:prstGeom>
+          <a:noFill/>
+        </p:spPr>
+        <p:txBody>
+          <a:bodyPr wrap="square" anchor="t" lIns="0" rIns="0" tIns="0" bIns="0">
+            <a:spAutoFit/>
+          </a:bodyPr>
+          <a:lstStyle/>
+          <a:p>
+            <a:pPr algn="l">
+              <a:lnSpc>
+                <a:spcPct val="100000"/>
+              </a:lnSpc>
+            </a:pPr>
+            <a:r>
+              <a:rPr sz="800" b="1">
+                <a:solidFill>
+                  <a:srgbClr val="37AB94"/>
+                </a:solidFill>
+                <a:latin typeface="Aptos"/>
+              </a:rPr>
+              <a:t>O QUE NÃO SUSTENTAMOS</a:t>
+            </a:r>
+          </a:p>
+        </p:txBody>
+      </p:sp>
+      <p:sp>
+        <p:nvSpPr>
+          <p:cNvPr id="23" name="TextBox 22"/>
+          <p:cNvSpPr txBox="1"/>
+          <p:nvPr/>
+        </p:nvSpPr>
+        <p:spPr>
+          <a:xfrm>
+            <a:off x="2651760" y="5138928"/>
+            <a:ext cx="8988552" cy="658368"/>
+          </a:xfrm>
+          <a:prstGeom prst="rect">
+            <a:avLst/>
+          </a:prstGeom>
+          <a:noFill/>
+        </p:spPr>
+        <p:txBody>
+          <a:bodyPr wrap="square" anchor="t" lIns="0" rIns="0" tIns="0" bIns="0">
+            <a:spAutoFit/>
+          </a:bodyPr>
+          <a:lstStyle/>
+          <a:p>
+            <a:pPr algn="l">
+              <a:lnSpc>
+                <a:spcPct val="115000"/>
+              </a:lnSpc>
+            </a:pPr>
+            <a:r>
+              <a:rPr sz="850" b="0">
+                <a:solidFill>
+                  <a:srgbClr val="2D3748"/>
+                </a:solidFill>
+                <a:latin typeface="Aptos"/>
+              </a:rPr>
+              <a:t>Monitoramento em tempo real · prova de ineficiência hospitalar · evasão total incluindo outras UFs · internação individual comprovadamente evitável · produto validado por gestores ou impacto comprovado. O projeto não realizou entrevistas, observação de campo, teste de usabilidade ou piloto com usuários reais: utilidade, adoção e impacto seguem como fronteira de evidência futura, declarada no slide de próximos passos.</a:t>
+            </a:r>
+          </a:p>
+        </p:txBody>
+      </p:sp>
+      <p:sp>
+        <p:nvSpPr>
+          <p:cNvPr id="24" name="TextBox 23"/>
+          <p:cNvSpPr txBox="1"/>
+          <p:nvPr/>
+        </p:nvSpPr>
+        <p:spPr>
+          <a:xfrm>
+            <a:off x="548640" y="5943600"/>
+            <a:ext cx="11091672" cy="292608"/>
+          </a:xfrm>
+          <a:prstGeom prst="rect">
+            <a:avLst/>
+          </a:prstGeom>
+          <a:noFill/>
+        </p:spPr>
+        <p:txBody>
+          <a:bodyPr wrap="square" anchor="t" lIns="0" rIns="0" tIns="0" bIns="0">
+            <a:spAutoFit/>
+          </a:bodyPr>
+          <a:lstStyle/>
+          <a:p>
+            <a:pPr algn="l">
+              <a:lnSpc>
+                <a:spcPct val="100000"/>
+              </a:lnSpc>
+            </a:pPr>
+            <a:r>
+              <a:rPr sz="850" b="0">
+                <a:solidFill>
+                  <a:srgbClr val="718096"/>
+                </a:solidFill>
+                <a:latin typeface="Aptos"/>
+              </a:rPr>
+              <a:t>Regras semânticas transversais: denominador nulo em vez de divisão por zero, ausência preservada como distinta de zero, e classificação separada para amostra insuficiente.</a:t>
+            </a:r>
           </a:p>
         </p:txBody>
       </p:sp>
@@ -15269,642 +14293,6 @@
 </file>
 
 <file path=ppt/slides/slide16.xml><?xml version="1.0" encoding="utf-8"?>
-<p:sld xmlns:a="http://schemas.openxmlformats.org/drawingml/2006/main" xmlns:r="http://schemas.openxmlformats.org/officeDocument/2006/relationships" xmlns:p="http://schemas.openxmlformats.org/presentationml/2006/main">
-  <p:cSld name="Slide 21">
-    <p:spTree>
-      <p:nvGrpSpPr>
-        <p:cNvPr id="1" name=""/>
-        <p:cNvGrpSpPr/>
-        <p:nvPr/>
-      </p:nvGrpSpPr>
-      <p:grpSpPr>
-        <a:xfrm>
-          <a:off x="0" y="0"/>
-          <a:ext cx="0" cy="0"/>
-          <a:chOff x="0" y="0"/>
-          <a:chExt cx="0" cy="0"/>
-        </a:xfrm>
-      </p:grpSpPr>
-      <p:sp>
-        <p:nvSpPr>
-          <p:cNvPr id="2" name="Shape 0"/>
-          <p:cNvSpPr/>
-          <p:nvPr/>
-        </p:nvSpPr>
-        <p:spPr>
-          <a:xfrm>
-            <a:off x="0" y="0"/>
-            <a:ext cx="12191695" cy="1024128"/>
-          </a:xfrm>
-          <a:prstGeom prst="rect">
-            <a:avLst/>
-          </a:prstGeom>
-          <a:solidFill>
-            <a:srgbClr val="1A2948"/>
-          </a:solidFill>
-          <a:ln w="12700">
-            <a:solidFill>
-              <a:srgbClr val="1A2948"/>
-            </a:solidFill>
-            <a:prstDash val="solid"/>
-          </a:ln>
-        </p:spPr>
-        <p:txBody>
-          <a:bodyPr/>
-          <a:lstStyle/>
-          <a:p>
-            <a:endParaRPr/>
-          </a:p>
-        </p:txBody>
-      </p:sp>
-      <p:sp>
-        <p:nvSpPr>
-          <p:cNvPr id="3" name="Text 1"/>
-          <p:cNvSpPr/>
-          <p:nvPr/>
-        </p:nvSpPr>
-        <p:spPr>
-          <a:xfrm>
-            <a:off x="548640" y="128016"/>
-            <a:ext cx="8716975" cy="237744"/>
-          </a:xfrm>
-          <a:prstGeom prst="rect">
-            <a:avLst/>
-          </a:prstGeom>
-          <a:noFill/>
-          <a:ln/>
-        </p:spPr>
-        <p:txBody>
-          <a:bodyPr wrap="square" lIns="0" tIns="0" rIns="0" bIns="0" rtlCol="0" anchor="ctr"/>
-          <a:lstStyle/>
-          <a:p>
-            <a:pPr marL="0" indent="0">
-              <a:buNone/>
-            </a:pPr>
-            <a:endParaRPr lang="en-US" sz="950" dirty="0"/>
-          </a:p>
-        </p:txBody>
-      </p:sp>
-      <p:sp>
-        <p:nvSpPr>
-          <p:cNvPr id="4" name="Text 2"/>
-          <p:cNvSpPr/>
-          <p:nvPr/>
-        </p:nvSpPr>
-        <p:spPr>
-          <a:xfrm>
-            <a:off x="548640" y="320040"/>
-            <a:ext cx="8716975" cy="530352"/>
-          </a:xfrm>
-          <a:prstGeom prst="rect">
-            <a:avLst/>
-          </a:prstGeom>
-          <a:noFill/>
-          <a:ln/>
-        </p:spPr>
-        <p:txBody>
-          <a:bodyPr wrap="square" lIns="0" tIns="0" rIns="0" bIns="0" rtlCol="0" anchor="t"/>
-          <a:lstStyle/>
-          <a:p>
-            <a:pPr marL="0" indent="0">
-              <a:buNone/>
-            </a:pPr>
-            <a:r>
-              <a:rPr lang="en-US" sz="2200" b="1">
-                <a:solidFill>
-                  <a:srgbClr val="FFFFFF"/>
-                </a:solidFill>
-                <a:latin typeface="Aptos" pitchFamily="34" charset="0"/>
-                <a:ea typeface="Calibri" pitchFamily="34" charset="-122"/>
-                <a:cs typeface="Calibri" pitchFamily="34" charset="-120"/>
-              </a:rPr>
-              <a:t>Evidências visuais</a:t>
-            </a:r>
-            <a:endParaRPr lang="en-US" sz="2200" dirty="0"/>
-          </a:p>
-        </p:txBody>
-      </p:sp>
-      <p:sp>
-        <p:nvSpPr>
-          <p:cNvPr id="5" name="Text 3"/>
-          <p:cNvSpPr/>
-          <p:nvPr/>
-        </p:nvSpPr>
-        <p:spPr>
-          <a:xfrm>
-            <a:off x="9357055" y="402336"/>
-            <a:ext cx="2286000" cy="292608"/>
-          </a:xfrm>
-          <a:prstGeom prst="rect">
-            <a:avLst/>
-          </a:prstGeom>
-          <a:noFill/>
-          <a:ln/>
-        </p:spPr>
-        <p:txBody>
-          <a:bodyPr wrap="square" lIns="0" tIns="0" rIns="0" bIns="0" rtlCol="0" anchor="ctr"/>
-          <a:lstStyle/>
-          <a:p>
-            <a:pPr marL="0" indent="0" algn="r">
-              <a:buNone/>
-            </a:pPr>
-            <a:r>
-              <a:rPr lang="en-US" sz="1000" dirty="0">
-                <a:solidFill>
-                  <a:srgbClr val="9DB0C8"/>
-                </a:solidFill>
-                <a:latin typeface="Aptos" pitchFamily="34" charset="0"/>
-                <a:ea typeface="Calibri" pitchFamily="34" charset="-122"/>
-                <a:cs typeface="Calibri" pitchFamily="34" charset="-120"/>
-              </a:rPr>
-              <a:t>Sprint 2</a:t>
-            </a:r>
-            <a:endParaRPr lang="en-US" sz="1000" dirty="0"/>
-          </a:p>
-        </p:txBody>
-      </p:sp>
-      <p:sp>
-        <p:nvSpPr>
-          <p:cNvPr id="6" name="Text 4"/>
-          <p:cNvSpPr/>
-          <p:nvPr/>
-        </p:nvSpPr>
-        <p:spPr>
-          <a:xfrm>
-            <a:off x="548640" y="1335024"/>
-            <a:ext cx="5394960" cy="292608"/>
-          </a:xfrm>
-          <a:prstGeom prst="rect">
-            <a:avLst/>
-          </a:prstGeom>
-          <a:noFill/>
-          <a:ln/>
-        </p:spPr>
-        <p:txBody>
-          <a:bodyPr wrap="square" lIns="0" tIns="0" rIns="0" bIns="0" rtlCol="0" anchor="ctr"/>
-          <a:lstStyle/>
-          <a:p>
-            <a:pPr marL="0" indent="0">
-              <a:buNone/>
-            </a:pPr>
-            <a:r>
-              <a:rPr lang="en-US" sz="1400" b="1" dirty="0">
-                <a:solidFill>
-                  <a:srgbClr val="1A2948"/>
-                </a:solidFill>
-                <a:latin typeface="Aptos" pitchFamily="34" charset="0"/>
-                <a:ea typeface="Calibri" pitchFamily="34" charset="-122"/>
-                <a:cs typeface="Calibri" pitchFamily="34" charset="-120"/>
-              </a:rPr>
-              <a:t>Território</a:t>
-            </a:r>
-            <a:endParaRPr lang="en-US" sz="1400" dirty="0"/>
-          </a:p>
-        </p:txBody>
-      </p:sp>
-      <p:sp>
-        <p:nvSpPr>
-          <p:cNvPr id="11" name="Shape 8"/>
-          <p:cNvSpPr/>
-          <p:nvPr/>
-        </p:nvSpPr>
-        <p:spPr>
-          <a:xfrm>
-            <a:off x="548640" y="4663440"/>
-            <a:ext cx="5394960" cy="1207008"/>
-          </a:xfrm>
-          <a:prstGeom prst="roundRect">
-            <a:avLst>
-              <a:gd name="adj" fmla="val 4545"/>
-            </a:avLst>
-          </a:prstGeom>
-          <a:solidFill>
-            <a:srgbClr val="F4F8FC"/>
-          </a:solidFill>
-          <a:ln w="9525">
-            <a:solidFill>
-              <a:srgbClr val="D7E3F2"/>
-            </a:solidFill>
-            <a:prstDash val="solid"/>
-          </a:ln>
-        </p:spPr>
-        <p:txBody>
-          <a:bodyPr/>
-          <a:lstStyle/>
-          <a:p>
-            <a:endParaRPr/>
-          </a:p>
-        </p:txBody>
-      </p:sp>
-      <p:sp>
-        <p:nvSpPr>
-          <p:cNvPr id="12" name="Text 9"/>
-          <p:cNvSpPr/>
-          <p:nvPr/>
-        </p:nvSpPr>
-        <p:spPr>
-          <a:xfrm>
-            <a:off x="768096" y="4791456"/>
-            <a:ext cx="4956048" cy="201168"/>
-          </a:xfrm>
-          <a:prstGeom prst="rect">
-            <a:avLst/>
-          </a:prstGeom>
-          <a:noFill/>
-          <a:ln/>
-        </p:spPr>
-        <p:txBody>
-          <a:bodyPr wrap="square" lIns="0" tIns="0" rIns="0" bIns="0" rtlCol="0" anchor="ctr"/>
-          <a:lstStyle/>
-          <a:p>
-            <a:pPr marL="0" indent="0">
-              <a:buNone/>
-            </a:pPr>
-            <a:r>
-              <a:rPr lang="en-US" sz="900" b="1" kern="0" spc="110" dirty="0">
-                <a:solidFill>
-                  <a:srgbClr val="2B6CB0"/>
-                </a:solidFill>
-                <a:latin typeface="Aptos" pitchFamily="34" charset="0"/>
-                <a:ea typeface="Calibri" pitchFamily="34" charset="-122"/>
-                <a:cs typeface="Calibri" pitchFamily="34" charset="-120"/>
-              </a:rPr>
-              <a:t>O QUE ESTA TELA EVIDENCIA</a:t>
-            </a:r>
-            <a:endParaRPr lang="en-US" sz="750" dirty="0"/>
-          </a:p>
-        </p:txBody>
-      </p:sp>
-      <p:sp>
-        <p:nvSpPr>
-          <p:cNvPr id="13" name="Text 10"/>
-          <p:cNvSpPr/>
-          <p:nvPr/>
-        </p:nvSpPr>
-        <p:spPr>
-          <a:xfrm>
-            <a:off x="768096" y="5010912"/>
-            <a:ext cx="4956048" cy="768096"/>
-          </a:xfrm>
-          <a:prstGeom prst="rect">
-            <a:avLst/>
-          </a:prstGeom>
-          <a:noFill/>
-          <a:ln/>
-        </p:spPr>
-        <p:txBody>
-          <a:bodyPr wrap="square" lIns="0" tIns="0" rIns="0" bIns="0" rtlCol="0" anchor="t"/>
-          <a:lstStyle/>
-          <a:p>
-            <a:pPr marL="0" indent="0">
-              <a:lnSpc>
-                <a:spcPts val="1300"/>
-              </a:lnSpc>
-              <a:buNone/>
-            </a:pPr>
-            <a:r>
-              <a:rPr lang="en-US" sz="900" dirty="0">
-                <a:solidFill>
-                  <a:srgbClr val="2D3748"/>
-                </a:solidFill>
-                <a:latin typeface="Aptos" pitchFamily="34" charset="0"/>
-                <a:ea typeface="Calibri" pitchFamily="34" charset="-122"/>
-                <a:cs typeface="Calibri" pitchFamily="34" charset="-120"/>
-              </a:rPr>
-              <a:t>Mapa das 62 regiões colorido pelo placar de sinais: o tom mais claro é o melhor do recorte, o mais escuro é o pior, e a escala se estica até o máximo observado. O gestor vê de longe onde há sinal fora do padrão, e a legenda diz que é placar para priorizar investigação, não nota de qualidade.</a:t>
-            </a:r>
-            <a:endParaRPr lang="en-US" sz="900" dirty="0"/>
-          </a:p>
-        </p:txBody>
-      </p:sp>
-      <p:sp>
-        <p:nvSpPr>
-          <p:cNvPr id="14" name="Text 11"/>
-          <p:cNvSpPr/>
-          <p:nvPr/>
-        </p:nvSpPr>
-        <p:spPr>
-          <a:xfrm>
-            <a:off x="6245352" y="1335024"/>
-            <a:ext cx="5394960" cy="292608"/>
-          </a:xfrm>
-          <a:prstGeom prst="rect">
-            <a:avLst/>
-          </a:prstGeom>
-          <a:noFill/>
-          <a:ln/>
-        </p:spPr>
-        <p:txBody>
-          <a:bodyPr wrap="square" lIns="0" tIns="0" rIns="0" bIns="0" rtlCol="0" anchor="ctr"/>
-          <a:lstStyle/>
-          <a:p>
-            <a:pPr marL="0" indent="0">
-              <a:buNone/>
-            </a:pPr>
-            <a:r>
-              <a:rPr lang="en-US" sz="1400" b="1" dirty="0">
-                <a:solidFill>
-                  <a:srgbClr val="1A2948"/>
-                </a:solidFill>
-                <a:latin typeface="Aptos" pitchFamily="34" charset="0"/>
-                <a:ea typeface="Calibri" pitchFamily="34" charset="-122"/>
-                <a:cs typeface="Calibri" pitchFamily="34" charset="-120"/>
-              </a:rPr>
-              <a:t>Hospital</a:t>
-            </a:r>
-            <a:endParaRPr lang="en-US" sz="1400" dirty="0"/>
-          </a:p>
-        </p:txBody>
-      </p:sp>
-      <p:sp>
-        <p:nvSpPr>
-          <p:cNvPr id="19" name="Shape 15"/>
-          <p:cNvSpPr/>
-          <p:nvPr/>
-        </p:nvSpPr>
-        <p:spPr>
-          <a:xfrm>
-            <a:off x="6245352" y="4663440"/>
-            <a:ext cx="5394960" cy="1207008"/>
-          </a:xfrm>
-          <a:prstGeom prst="roundRect">
-            <a:avLst>
-              <a:gd name="adj" fmla="val 4545"/>
-            </a:avLst>
-          </a:prstGeom>
-          <a:solidFill>
-            <a:srgbClr val="F4F8FC"/>
-          </a:solidFill>
-          <a:ln w="9525">
-            <a:solidFill>
-              <a:srgbClr val="D7E3F2"/>
-            </a:solidFill>
-            <a:prstDash val="solid"/>
-          </a:ln>
-        </p:spPr>
-        <p:txBody>
-          <a:bodyPr/>
-          <a:lstStyle/>
-          <a:p>
-            <a:endParaRPr/>
-          </a:p>
-        </p:txBody>
-      </p:sp>
-      <p:sp>
-        <p:nvSpPr>
-          <p:cNvPr id="20" name="Text 16"/>
-          <p:cNvSpPr/>
-          <p:nvPr/>
-        </p:nvSpPr>
-        <p:spPr>
-          <a:xfrm>
-            <a:off x="6464808" y="4791456"/>
-            <a:ext cx="4956048" cy="201168"/>
-          </a:xfrm>
-          <a:prstGeom prst="rect">
-            <a:avLst/>
-          </a:prstGeom>
-          <a:noFill/>
-          <a:ln/>
-        </p:spPr>
-        <p:txBody>
-          <a:bodyPr wrap="square" lIns="0" tIns="0" rIns="0" bIns="0" rtlCol="0" anchor="ctr"/>
-          <a:lstStyle/>
-          <a:p>
-            <a:pPr marL="0" indent="0">
-              <a:buNone/>
-            </a:pPr>
-            <a:r>
-              <a:rPr lang="en-US" sz="900" b="1" kern="0" spc="110" dirty="0">
-                <a:solidFill>
-                  <a:srgbClr val="2B6CB0"/>
-                </a:solidFill>
-                <a:latin typeface="Aptos" pitchFamily="34" charset="0"/>
-                <a:ea typeface="Calibri" pitchFamily="34" charset="-122"/>
-                <a:cs typeface="Calibri" pitchFamily="34" charset="-120"/>
-              </a:rPr>
-              <a:t>O QUE ESTA TELA EVIDENCIA</a:t>
-            </a:r>
-            <a:endParaRPr lang="en-US" sz="750" dirty="0"/>
-          </a:p>
-        </p:txBody>
-      </p:sp>
-      <p:sp>
-        <p:nvSpPr>
-          <p:cNvPr id="21" name="Text 17"/>
-          <p:cNvSpPr/>
-          <p:nvPr/>
-        </p:nvSpPr>
-        <p:spPr>
-          <a:xfrm>
-            <a:off x="6464808" y="5010912"/>
-            <a:ext cx="4956048" cy="768096"/>
-          </a:xfrm>
-          <a:prstGeom prst="rect">
-            <a:avLst/>
-          </a:prstGeom>
-          <a:noFill/>
-          <a:ln/>
-        </p:spPr>
-        <p:txBody>
-          <a:bodyPr wrap="square" lIns="0" tIns="0" rIns="0" bIns="0" rtlCol="0" anchor="t"/>
-          <a:lstStyle/>
-          <a:p>
-            <a:pPr marL="0" indent="0">
-              <a:lnSpc>
-                <a:spcPts val="1300"/>
-              </a:lnSpc>
-              <a:buNone/>
-            </a:pPr>
-            <a:r>
-              <a:rPr lang="en-US" sz="900" dirty="0">
-                <a:solidFill>
-                  <a:srgbClr val="2D3748"/>
-                </a:solidFill>
-                <a:latin typeface="Aptos" pitchFamily="34" charset="0"/>
-                <a:ea typeface="Calibri" pitchFamily="34" charset="-122"/>
-                <a:cs typeface="Calibri" pitchFamily="34" charset="-120"/>
-              </a:rPr>
-              <a:t>Comparação com pares do mesmo porte, na mesma região: faixa interquartil, mediana e posição do hospital, com critério escrito e pares nomeados. O número deixa de ser um valor solto e ganha uma régua; o porte torna a comparação mais justa.</a:t>
-            </a:r>
-            <a:endParaRPr lang="en-US" sz="900" dirty="0"/>
-          </a:p>
-        </p:txBody>
-      </p:sp>
-      <p:sp>
-        <p:nvSpPr>
-          <p:cNvPr id="22" name="Text 18"/>
-          <p:cNvSpPr/>
-          <p:nvPr/>
-        </p:nvSpPr>
-        <p:spPr>
-          <a:xfrm>
-            <a:off x="548640" y="5961888"/>
-            <a:ext cx="11094415" cy="310896"/>
-          </a:xfrm>
-          <a:prstGeom prst="rect">
-            <a:avLst/>
-          </a:prstGeom>
-          <a:noFill/>
-          <a:ln/>
-        </p:spPr>
-        <p:txBody>
-          <a:bodyPr wrap="square" lIns="0" tIns="0" rIns="0" bIns="0" rtlCol="0" anchor="t"/>
-          <a:lstStyle/>
-          <a:p>
-            <a:pPr marL="0" indent="0">
-              <a:buNone/>
-            </a:pPr>
-            <a:r>
-              <a:rPr lang="en-US" sz="900" i="1" dirty="0">
-                <a:solidFill>
-                  <a:srgbClr val="718096"/>
-                </a:solidFill>
-                <a:latin typeface="Aptos" pitchFamily="34" charset="0"/>
-                <a:ea typeface="Calibri" pitchFamily="34" charset="-122"/>
-                <a:cs typeface="Calibri" pitchFamily="34" charset="-120"/>
-              </a:rPr>
-              <a:t>A origem aparece na interface: “Oracle ao vivo” quando a API responde e “Snapshot de contingência” quando não. As duas fontes nunca são misturadas.</a:t>
-            </a:r>
-            <a:endParaRPr lang="en-US" sz="800" dirty="0"/>
-          </a:p>
-        </p:txBody>
-      </p:sp>
-      <p:sp>
-        <p:nvSpPr>
-          <p:cNvPr id="23" name="Text 19"/>
-          <p:cNvSpPr/>
-          <p:nvPr/>
-        </p:nvSpPr>
-        <p:spPr>
-          <a:xfrm>
-            <a:off x="548640" y="6419088"/>
-            <a:ext cx="10454335" cy="256032"/>
-          </a:xfrm>
-          <a:prstGeom prst="rect">
-            <a:avLst/>
-          </a:prstGeom>
-          <a:noFill/>
-          <a:ln/>
-        </p:spPr>
-        <p:txBody>
-          <a:bodyPr wrap="square" lIns="0" tIns="0" rIns="0" bIns="0" rtlCol="0" anchor="ctr"/>
-          <a:lstStyle/>
-          <a:p>
-            <a:pPr marL="0" indent="0">
-              <a:buNone/>
-            </a:pPr>
-            <a:r>
-              <a:rPr lang="en-US" sz="750" dirty="0">
-                <a:solidFill>
-                  <a:srgbClr val="9DB0C8"/>
-                </a:solidFill>
-                <a:latin typeface="Aptos" pitchFamily="34" charset="0"/>
-                <a:ea typeface="Calibri" pitchFamily="34" charset="-122"/>
-                <a:cs typeface="Calibri" pitchFamily="34" charset="-120"/>
-              </a:rPr>
-              <a:t>MedFlow  ·  Painel Inteligente de Acesso Hospitalar e Perfil de Atendimento  ·  Ômega Urban Tech  ·  Enterprise Challenge FIAP × Oracle 2026</a:t>
-            </a:r>
-            <a:endParaRPr lang="en-US" sz="750" dirty="0"/>
-          </a:p>
-        </p:txBody>
-      </p:sp>
-      <p:sp>
-        <p:nvSpPr>
-          <p:cNvPr id="24" name="Text 20"/>
-          <p:cNvSpPr/>
-          <p:nvPr/>
-        </p:nvSpPr>
-        <p:spPr>
-          <a:xfrm>
-            <a:off x="11094415" y="6419088"/>
-            <a:ext cx="548640" cy="256032"/>
-          </a:xfrm>
-          <a:prstGeom prst="rect">
-            <a:avLst/>
-          </a:prstGeom>
-          <a:noFill/>
-          <a:ln/>
-        </p:spPr>
-        <p:txBody>
-          <a:bodyPr wrap="square" lIns="0" tIns="0" rIns="0" bIns="0" rtlCol="0" anchor="ctr"/>
-          <a:lstStyle/>
-          <a:p>
-            <a:pPr marL="0" indent="0" algn="r">
-              <a:buNone/>
-            </a:pPr>
-            <a:r>
-              <a:rPr lang="en-US" sz="850" b="1" dirty="0">
-                <a:solidFill>
-                  <a:srgbClr val="2B6CB0"/>
-                </a:solidFill>
-                <a:latin typeface="Aptos" pitchFamily="34" charset="0"/>
-                <a:ea typeface="Calibri" pitchFamily="34" charset="-122"/>
-                <a:cs typeface="Calibri" pitchFamily="34" charset="-120"/>
-              </a:rPr>
-              <a:t>16</a:t>
-            </a:r>
-            <a:endParaRPr lang="en-US" sz="850" dirty="0"/>
-          </a:p>
-        </p:txBody>
-      </p:sp>
-      <p:pic>
-        <p:nvPicPr>
-          <p:cNvPr id="25" name="Picture 24" descr="jornada-1-territorio.png"/>
-          <p:cNvPicPr>
-            <a:picLocks noChangeAspect="1"/>
-          </p:cNvPicPr>
-          <p:nvPr/>
-        </p:nvPicPr>
-        <p:blipFill>
-          <a:blip r:embed="rId4"/>
-          <a:stretch>
-            <a:fillRect/>
-          </a:stretch>
-        </p:blipFill>
-        <p:spPr>
-          <a:xfrm>
-            <a:off x="1014595" y="1700784"/>
-            <a:ext cx="4463050" cy="2834640"/>
-          </a:xfrm>
-          <a:prstGeom prst="rect">
-            <a:avLst/>
-          </a:prstGeom>
-        </p:spPr>
-      </p:pic>
-      <p:pic>
-        <p:nvPicPr>
-          <p:cNvPr id="26" name="Picture 25" descr="jornada-4-pares.png"/>
-          <p:cNvPicPr>
-            <a:picLocks noChangeAspect="1"/>
-          </p:cNvPicPr>
-          <p:nvPr/>
-        </p:nvPicPr>
-        <p:blipFill>
-          <a:blip r:embed="rId5"/>
-          <a:stretch>
-            <a:fillRect/>
-          </a:stretch>
-        </p:blipFill>
-        <p:spPr>
-          <a:xfrm>
-            <a:off x="6517822" y="1700784"/>
-            <a:ext cx="4850019" cy="2834640"/>
-          </a:xfrm>
-          <a:prstGeom prst="rect">
-            <a:avLst/>
-          </a:prstGeom>
-        </p:spPr>
-      </p:pic>
-    </p:spTree>
-  </p:cSld>
-  <p:clrMapOvr>
-    <a:masterClrMapping/>
-  </p:clrMapOvr>
-</p:sld>
-</file>
-
-<file path=ppt/slides/slide17.xml><?xml version="1.0" encoding="utf-8"?>
 <p:sld xmlns:a="http://schemas.openxmlformats.org/drawingml/2006/main" xmlns:r="http://schemas.openxmlformats.org/officeDocument/2006/relationships" xmlns:p="http://schemas.openxmlformats.org/presentationml/2006/main">
   <p:cSld name="Slide 22">
     <p:spTree>
@@ -16061,84 +14449,6 @@
       </p:sp>
       <p:sp>
         <p:nvSpPr>
-          <p:cNvPr id="23" name="Text 19"/>
-          <p:cNvSpPr/>
-          <p:nvPr/>
-        </p:nvSpPr>
-        <p:spPr>
-          <a:xfrm>
-            <a:off x="548640" y="6419088"/>
-            <a:ext cx="10454335" cy="256032"/>
-          </a:xfrm>
-          <a:prstGeom prst="rect">
-            <a:avLst/>
-          </a:prstGeom>
-          <a:noFill/>
-          <a:ln/>
-        </p:spPr>
-        <p:txBody>
-          <a:bodyPr wrap="square" lIns="0" tIns="0" rIns="0" bIns="0" rtlCol="0" anchor="ctr"/>
-          <a:lstStyle/>
-          <a:p>
-            <a:pPr marL="0" indent="0">
-              <a:buNone/>
-            </a:pPr>
-            <a:r>
-              <a:rPr lang="en-US" sz="750" dirty="0">
-                <a:solidFill>
-                  <a:srgbClr val="9DB0C8"/>
-                </a:solidFill>
-                <a:latin typeface="Aptos" pitchFamily="34" charset="0"/>
-                <a:ea typeface="Calibri" pitchFamily="34" charset="-122"/>
-                <a:cs typeface="Calibri" pitchFamily="34" charset="-120"/>
-              </a:rPr>
-              <a:t>MedFlow  ·  Painel Inteligente de Acesso Hospitalar e Perfil de Atendimento  ·  Ômega Urban Tech  ·  Enterprise Challenge FIAP × Oracle 2026</a:t>
-            </a:r>
-            <a:endParaRPr lang="en-US" sz="750" dirty="0"/>
-          </a:p>
-        </p:txBody>
-      </p:sp>
-      <p:sp>
-        <p:nvSpPr>
-          <p:cNvPr id="24" name="Text 20"/>
-          <p:cNvSpPr/>
-          <p:nvPr/>
-        </p:nvSpPr>
-        <p:spPr>
-          <a:xfrm>
-            <a:off x="11094415" y="6419088"/>
-            <a:ext cx="548640" cy="256032"/>
-          </a:xfrm>
-          <a:prstGeom prst="rect">
-            <a:avLst/>
-          </a:prstGeom>
-          <a:noFill/>
-          <a:ln/>
-        </p:spPr>
-        <p:txBody>
-          <a:bodyPr wrap="square" lIns="0" tIns="0" rIns="0" bIns="0" rtlCol="0" anchor="ctr"/>
-          <a:lstStyle/>
-          <a:p>
-            <a:pPr marL="0" indent="0" algn="r">
-              <a:buNone/>
-            </a:pPr>
-            <a:r>
-              <a:rPr lang="en-US" sz="850" b="1" dirty="0">
-                <a:solidFill>
-                  <a:srgbClr val="2B6CB0"/>
-                </a:solidFill>
-                <a:latin typeface="Aptos" pitchFamily="34" charset="0"/>
-                <a:ea typeface="Calibri" pitchFamily="34" charset="-122"/>
-                <a:cs typeface="Calibri" pitchFamily="34" charset="-120"/>
-              </a:rPr>
-              <a:t>17</a:t>
-            </a:r>
-            <a:endParaRPr lang="en-US" sz="850" dirty="0"/>
-          </a:p>
-        </p:txBody>
-      </p:sp>
-      <p:sp>
-        <p:nvSpPr>
           <p:cNvPr id="25" name="TextBox 24"/>
           <p:cNvSpPr txBox="1"/>
           <p:nvPr/>
@@ -16262,8 +14572,8 @@
         </p:nvSpPr>
         <p:spPr>
           <a:xfrm>
-            <a:off x="548640" y="2029968"/>
-            <a:ext cx="2962656" cy="3246120"/>
+            <a:off x="548640" y="1920240"/>
+            <a:ext cx="2962656" cy="2761488"/>
           </a:xfrm>
           <a:prstGeom prst="rect">
             <a:avLst/>
@@ -16314,8 +14624,8 @@
         </p:blipFill>
         <p:spPr>
           <a:xfrm>
-            <a:off x="892873" y="2112264"/>
-            <a:ext cx="2274190" cy="3081528"/>
+            <a:off x="1068019" y="2011680"/>
+            <a:ext cx="1922983" cy="2606040"/>
           </a:xfrm>
           <a:prstGeom prst="rect">
             <a:avLst/>
@@ -16330,8 +14640,8 @@
         </p:nvSpPr>
         <p:spPr>
           <a:xfrm>
-            <a:off x="3950208" y="2029968"/>
-            <a:ext cx="7690104" cy="3246120"/>
+            <a:off x="3950208" y="1920240"/>
+            <a:ext cx="7690104" cy="2761488"/>
           </a:xfrm>
           <a:prstGeom prst="rect">
             <a:avLst/>
@@ -16382,8 +14692,8 @@
         </p:blipFill>
         <p:spPr>
           <a:xfrm>
-            <a:off x="4763475" y="2139696"/>
-            <a:ext cx="6063570" cy="3026664"/>
+            <a:off x="5184648" y="2011680"/>
+            <a:ext cx="5221224" cy="2606040"/>
           </a:xfrm>
           <a:prstGeom prst="rect">
             <a:avLst/>
@@ -16398,7 +14708,7 @@
         </p:nvSpPr>
         <p:spPr>
           <a:xfrm>
-            <a:off x="548640" y="5431536"/>
+            <a:off x="548640" y="4828032"/>
             <a:ext cx="11091672" cy="256032"/>
           </a:xfrm>
           <a:prstGeom prst="rect">
@@ -16437,14 +14747,14 @@
         </p:nvSpPr>
         <p:spPr>
           <a:xfrm>
-            <a:off x="548640" y="5742432"/>
-            <a:ext cx="11091672" cy="7315"/>
+            <a:off x="548640" y="5102352"/>
+            <a:ext cx="11091672" cy="1225296"/>
           </a:xfrm>
           <a:prstGeom prst="rect">
             <a:avLst/>
           </a:prstGeom>
           <a:solidFill>
-            <a:srgbClr val="D9E2EC"/>
+            <a:srgbClr val="F5F8FC"/>
           </a:solidFill>
           <a:ln>
             <a:noFill/>
@@ -16469,7 +14779,6 @@
           <a:lstStyle/>
           <a:p>
             <a:pPr algn="ctr"/>
-            <a:endParaRPr/>
           </a:p>
         </p:txBody>
       </p:sp>
@@ -16481,16 +14790,16 @@
         </p:nvSpPr>
         <p:spPr>
           <a:xfrm>
-            <a:off x="548640" y="5833872"/>
-            <a:ext cx="1170432" cy="164592"/>
-          </a:xfrm>
-          <a:prstGeom prst="rect">
-            <a:avLst/>
-          </a:prstGeom>
-          <a:noFill/>
-        </p:spPr>
-        <p:txBody>
-          <a:bodyPr wrap="square" lIns="0" tIns="0" rIns="0" bIns="0" anchor="t">
+            <a:off x="786384" y="5230368"/>
+            <a:ext cx="2926080" cy="182880"/>
+          </a:xfrm>
+          <a:prstGeom prst="rect">
+            <a:avLst/>
+          </a:prstGeom>
+          <a:noFill/>
+        </p:spPr>
+        <p:txBody>
+          <a:bodyPr wrap="square" anchor="t" lIns="0" rIns="0" tIns="0" bIns="0">
             <a:spAutoFit/>
           </a:bodyPr>
           <a:lstStyle/>
@@ -16507,47 +14816,149 @@
                 </a:solidFill>
                 <a:latin typeface="Aptos"/>
               </a:rPr>
-              <a:t>TERMOS DO SLIDE</a:t>
-            </a:r>
-          </a:p>
-        </p:txBody>
-      </p:sp>
-      <p:sp>
-        <p:nvSpPr>
-          <p:cNvPr id="35" name="TextBox 34"/>
+              <a:t>O SQL QUE SUSTENTA A RESPOSTA</a:t>
+            </a:r>
+          </a:p>
+        </p:txBody>
+      </p:sp>
+      <p:pic>
+        <p:nvPicPr>
+          <p:cNvPr id="35" name="Picture 34" descr="flowia-sql-auditavel.png"/>
+          <p:cNvPicPr>
+            <a:picLocks noChangeAspect="1"/>
+          </p:cNvPicPr>
+          <p:nvPr/>
+        </p:nvPicPr>
+        <p:blipFill>
+          <a:blip r:embed="rId5"/>
+          <a:stretch>
+            <a:fillRect/>
+          </a:stretch>
+        </p:blipFill>
+        <p:spPr>
+          <a:xfrm>
+            <a:off x="1237183" y="5394960"/>
+            <a:ext cx="2115921" cy="914400"/>
+          </a:xfrm>
+          <a:prstGeom prst="rect">
+            <a:avLst/>
+          </a:prstGeom>
+        </p:spPr>
+      </p:pic>
+      <p:sp>
+        <p:nvSpPr>
+          <p:cNvPr id="36" name="TextBox 35"/>
           <p:cNvSpPr txBox="1"/>
           <p:nvPr/>
         </p:nvSpPr>
         <p:spPr>
           <a:xfrm>
-            <a:off x="1755648" y="5806440"/>
-            <a:ext cx="9884664" cy="329184"/>
-          </a:xfrm>
-          <a:prstGeom prst="rect">
-            <a:avLst/>
-          </a:prstGeom>
-          <a:noFill/>
-        </p:spPr>
-        <p:txBody>
-          <a:bodyPr wrap="square" lIns="0" tIns="0" rIns="0" bIns="0" anchor="t">
+            <a:off x="4206240" y="5266944"/>
+            <a:ext cx="7434072" cy="877824"/>
+          </a:xfrm>
+          <a:prstGeom prst="rect">
+            <a:avLst/>
+          </a:prstGeom>
+          <a:noFill/>
+        </p:spPr>
+        <p:txBody>
+          <a:bodyPr wrap="square" anchor="t" lIns="0" rIns="0" tIns="0" bIns="0">
             <a:spAutoFit/>
           </a:bodyPr>
           <a:lstStyle/>
           <a:p>
             <a:pPr algn="l">
               <a:lnSpc>
-                <a:spcPct val="100000"/>
+                <a:spcPct val="118000"/>
               </a:lnSpc>
             </a:pPr>
             <a:r>
-              <a:rPr sz="850" b="0">
-                <a:solidFill>
-                  <a:srgbClr val="718096"/>
+              <a:rPr sz="880" b="0">
+                <a:solidFill>
+                  <a:srgbClr val="2D3748"/>
                 </a:solidFill>
                 <a:latin typeface="Aptos"/>
               </a:rPr>
-              <a:t>CNES: identificador nacional do estabelecimento de saúde. · Gold: camada final dos indicadores. · SQL: linguagem de consulta exibida pela FlowIA para auditoria.</a:t>
-            </a:r>
+              <a:t>Um clique em “Ver SQL gerado e validado” abre a consulta que respondeu: um SELECT sobre MART_INDICADOR_HOSPITAL_ESPECIALIDADE_MENSAL, o mesmo mart da Gold que alimenta a tabela ao lado. Verbo de escrita derruba a rodada antes de chegar ao banco, e cada pergunta grava uma linha auditável com o SQL, a narrativa e o que a varredura de vocabulário marcou.</a:t>
+            </a:r>
+          </a:p>
+        </p:txBody>
+      </p:sp>
+      <p:sp>
+        <p:nvSpPr>
+          <p:cNvPr id="8" name="Text 5"/>
+          <p:cNvSpPr/>
+          <p:nvPr/>
+        </p:nvSpPr>
+        <p:spPr>
+          <a:xfrm>
+            <a:off x="548640" y="6419088"/>
+            <a:ext cx="10454335" cy="256032"/>
+          </a:xfrm>
+          <a:prstGeom prst="rect">
+            <a:avLst/>
+          </a:prstGeom>
+          <a:noFill/>
+          <a:ln/>
+        </p:spPr>
+        <p:txBody>
+          <a:bodyPr wrap="square" lIns="0" tIns="0" rIns="0" bIns="0" rtlCol="0" anchor="ctr"/>
+          <a:lstStyle/>
+          <a:p>
+            <a:pPr marL="0" indent="0">
+              <a:buNone/>
+            </a:pPr>
+            <a:r>
+              <a:rPr lang="en-US" sz="750" dirty="0">
+                <a:solidFill>
+                  <a:srgbClr val="9DB0C8"/>
+                </a:solidFill>
+                <a:latin typeface="Aptos" pitchFamily="34" charset="0"/>
+                <a:ea typeface="Calibri" pitchFamily="34" charset="-122"/>
+                <a:cs typeface="Calibri" pitchFamily="34" charset="-120"/>
+              </a:rPr>
+              <a:t>MedFlow  ·  Painel Inteligente de Acesso Hospitalar e Perfil de Atendimento  ·  Ômega Urban Tech  ·  Enterprise Challenge FIAP × Oracle 2026</a:t>
+            </a:r>
+            <a:endParaRPr lang="en-US" sz="750" dirty="0"/>
+          </a:p>
+        </p:txBody>
+      </p:sp>
+      <p:sp>
+        <p:nvSpPr>
+          <p:cNvPr id="9" name="Text 6"/>
+          <p:cNvSpPr/>
+          <p:nvPr/>
+        </p:nvSpPr>
+        <p:spPr>
+          <a:xfrm>
+            <a:off x="11094415" y="6419088"/>
+            <a:ext cx="548640" cy="256032"/>
+          </a:xfrm>
+          <a:prstGeom prst="rect">
+            <a:avLst/>
+          </a:prstGeom>
+          <a:noFill/>
+          <a:ln/>
+        </p:spPr>
+        <p:txBody>
+          <a:bodyPr wrap="square" lIns="0" tIns="0" rIns="0" bIns="0" rtlCol="0" anchor="ctr"/>
+          <a:lstStyle/>
+          <a:p>
+            <a:pPr marL="0" indent="0" algn="r">
+              <a:buNone/>
+            </a:pPr>
+            <a:r>
+              <a:rPr lang="en-US" sz="850" b="1" dirty="0">
+                <a:solidFill>
+                  <a:srgbClr val="2B6CB0"/>
+                </a:solidFill>
+                <a:latin typeface="Aptos" pitchFamily="34" charset="0"/>
+                <a:ea typeface="Calibri" pitchFamily="34" charset="-122"/>
+                <a:cs typeface="Calibri" pitchFamily="34" charset="-120"/>
+              </a:rPr>
+              <a:t>16</a:t>
+            </a:r>
+            <a:endParaRPr lang="en-US" sz="850" dirty="0"/>
           </a:p>
         </p:txBody>
       </p:sp>
@@ -16559,7 +14970,7 @@
 </p:sld>
 </file>
 
-<file path=ppt/slides/slide18.xml><?xml version="1.0" encoding="utf-8"?>
+<file path=ppt/slides/slide17.xml><?xml version="1.0" encoding="utf-8"?>
 <p:sld xmlns:a="http://schemas.openxmlformats.org/drawingml/2006/main" xmlns:r="http://schemas.openxmlformats.org/officeDocument/2006/relationships" xmlns:p="http://schemas.openxmlformats.org/presentationml/2006/main">
   <p:cSld name="Slide 24">
     <p:spTree>
@@ -16786,7 +15197,7 @@
                 <a:ea typeface="Calibri" pitchFamily="34" charset="-122"/>
                 <a:cs typeface="Calibri" pitchFamily="34" charset="-120"/>
               </a:rPr>
-              <a:t>18</a:t>
+              <a:t>17</a:t>
             </a:r>
             <a:endParaRPr lang="en-US" sz="850" dirty="0"/>
           </a:p>
@@ -17800,7 +16211,7 @@
 </p:sld>
 </file>
 
-<file path=ppt/slides/slide19.xml><?xml version="1.0" encoding="utf-8"?>
+<file path=ppt/slides/slide18.xml><?xml version="1.0" encoding="utf-8"?>
 <p:sld xmlns:a="http://schemas.openxmlformats.org/drawingml/2006/main" xmlns:r="http://schemas.openxmlformats.org/officeDocument/2006/relationships" xmlns:p="http://schemas.openxmlformats.org/presentationml/2006/main">
   <p:cSld name="Slide 26">
     <p:spTree>
@@ -19815,9 +18226,1191 @@
                 <a:ea typeface="Calibri" pitchFamily="34" charset="-122"/>
                 <a:cs typeface="Calibri" pitchFamily="34" charset="-120"/>
               </a:rPr>
+              <a:t>18</a:t>
+            </a:r>
+            <a:endParaRPr lang="en-US" sz="850" dirty="0"/>
+          </a:p>
+        </p:txBody>
+      </p:sp>
+    </p:spTree>
+  </p:cSld>
+  <p:clrMapOvr>
+    <a:masterClrMapping/>
+  </p:clrMapOvr>
+</p:sld>
+</file>
+
+<file path=ppt/slides/slide19.xml><?xml version="1.0" encoding="utf-8"?>
+<p:sld xmlns:a="http://schemas.openxmlformats.org/drawingml/2006/main" xmlns:r="http://schemas.openxmlformats.org/officeDocument/2006/relationships" xmlns:p="http://schemas.openxmlformats.org/presentationml/2006/main">
+  <p:cSld name="Slide 28">
+    <p:spTree>
+      <p:nvGrpSpPr>
+        <p:cNvPr id="1" name=""/>
+        <p:cNvGrpSpPr/>
+        <p:nvPr/>
+      </p:nvGrpSpPr>
+      <p:grpSpPr>
+        <a:xfrm>
+          <a:off x="0" y="0"/>
+          <a:ext cx="0" cy="0"/>
+          <a:chOff x="0" y="0"/>
+          <a:chExt cx="0" cy="0"/>
+        </a:xfrm>
+      </p:grpSpPr>
+      <p:sp>
+        <p:nvSpPr>
+          <p:cNvPr id="2" name="Shape 0"/>
+          <p:cNvSpPr/>
+          <p:nvPr/>
+        </p:nvSpPr>
+        <p:spPr>
+          <a:xfrm>
+            <a:off x="0" y="0"/>
+            <a:ext cx="12191695" cy="1024128"/>
+          </a:xfrm>
+          <a:prstGeom prst="rect">
+            <a:avLst/>
+          </a:prstGeom>
+          <a:solidFill>
+            <a:srgbClr val="1A2948"/>
+          </a:solidFill>
+          <a:ln w="12700">
+            <a:solidFill>
+              <a:srgbClr val="1A2948"/>
+            </a:solidFill>
+            <a:prstDash val="solid"/>
+          </a:ln>
+        </p:spPr>
+        <p:txBody>
+          <a:bodyPr/>
+          <a:lstStyle/>
+          <a:p>
+            <a:endParaRPr/>
+          </a:p>
+        </p:txBody>
+      </p:sp>
+      <p:sp>
+        <p:nvSpPr>
+          <p:cNvPr id="3" name="Text 1"/>
+          <p:cNvSpPr/>
+          <p:nvPr/>
+        </p:nvSpPr>
+        <p:spPr>
+          <a:xfrm>
+            <a:off x="548640" y="128016"/>
+            <a:ext cx="8716975" cy="237744"/>
+          </a:xfrm>
+          <a:prstGeom prst="rect">
+            <a:avLst/>
+          </a:prstGeom>
+          <a:noFill/>
+          <a:ln/>
+        </p:spPr>
+        <p:txBody>
+          <a:bodyPr wrap="square" lIns="0" tIns="0" rIns="0" bIns="0" rtlCol="0" anchor="ctr"/>
+          <a:lstStyle/>
+          <a:p>
+            <a:pPr marL="0" indent="0">
+              <a:buNone/>
+            </a:pPr>
+            <a:endParaRPr lang="en-US" sz="950" dirty="0"/>
+          </a:p>
+        </p:txBody>
+      </p:sp>
+      <p:sp>
+        <p:nvSpPr>
+          <p:cNvPr id="4" name="Text 2"/>
+          <p:cNvSpPr/>
+          <p:nvPr/>
+        </p:nvSpPr>
+        <p:spPr>
+          <a:xfrm>
+            <a:off x="548640" y="320040"/>
+            <a:ext cx="8716975" cy="530352"/>
+          </a:xfrm>
+          <a:prstGeom prst="rect">
+            <a:avLst/>
+          </a:prstGeom>
+          <a:noFill/>
+          <a:ln/>
+        </p:spPr>
+        <p:txBody>
+          <a:bodyPr wrap="square" lIns="0" tIns="0" rIns="0" bIns="0" rtlCol="0" anchor="t"/>
+          <a:lstStyle/>
+          <a:p>
+            <a:pPr marL="0" indent="0">
+              <a:buNone/>
+            </a:pPr>
+            <a:r>
+              <a:rPr lang="en-US" sz="2200" b="1">
+                <a:solidFill>
+                  <a:srgbClr val="FFFFFF"/>
+                </a:solidFill>
+                <a:latin typeface="Aptos" pitchFamily="34" charset="0"/>
+                <a:ea typeface="Calibri" pitchFamily="34" charset="-122"/>
+                <a:cs typeface="Calibri" pitchFamily="34" charset="-120"/>
+              </a:rPr>
+              <a:t>Resultados</a:t>
+            </a:r>
+            <a:endParaRPr lang="en-US" sz="2200" dirty="0"/>
+          </a:p>
+        </p:txBody>
+      </p:sp>
+      <p:sp>
+        <p:nvSpPr>
+          <p:cNvPr id="5" name="Text 3"/>
+          <p:cNvSpPr/>
+          <p:nvPr/>
+        </p:nvSpPr>
+        <p:spPr>
+          <a:xfrm>
+            <a:off x="9357055" y="402336"/>
+            <a:ext cx="2286000" cy="292608"/>
+          </a:xfrm>
+          <a:prstGeom prst="rect">
+            <a:avLst/>
+          </a:prstGeom>
+          <a:noFill/>
+          <a:ln/>
+        </p:spPr>
+        <p:txBody>
+          <a:bodyPr wrap="square" lIns="0" tIns="0" rIns="0" bIns="0" rtlCol="0" anchor="ctr"/>
+          <a:lstStyle/>
+          <a:p>
+            <a:pPr marL="0" indent="0" algn="r">
+              <a:buNone/>
+            </a:pPr>
+            <a:r>
+              <a:rPr lang="en-US" sz="1000" dirty="0">
+                <a:solidFill>
+                  <a:srgbClr val="9DB0C8"/>
+                </a:solidFill>
+                <a:latin typeface="Aptos" pitchFamily="34" charset="0"/>
+                <a:ea typeface="Calibri" pitchFamily="34" charset="-122"/>
+                <a:cs typeface="Calibri" pitchFamily="34" charset="-120"/>
+              </a:rPr>
+              <a:t>Sprint 2</a:t>
+            </a:r>
+            <a:endParaRPr lang="en-US" sz="1000" dirty="0"/>
+          </a:p>
+        </p:txBody>
+      </p:sp>
+      <p:sp>
+        <p:nvSpPr>
+          <p:cNvPr id="52" name="Text 44"/>
+          <p:cNvSpPr/>
+          <p:nvPr/>
+        </p:nvSpPr>
+        <p:spPr>
+          <a:xfrm>
+            <a:off x="548640" y="6419088"/>
+            <a:ext cx="10454335" cy="256032"/>
+          </a:xfrm>
+          <a:prstGeom prst="rect">
+            <a:avLst/>
+          </a:prstGeom>
+          <a:noFill/>
+          <a:ln/>
+        </p:spPr>
+        <p:txBody>
+          <a:bodyPr wrap="square" lIns="0" tIns="0" rIns="0" bIns="0" rtlCol="0" anchor="ctr"/>
+          <a:lstStyle/>
+          <a:p>
+            <a:pPr marL="0" indent="0">
+              <a:buNone/>
+            </a:pPr>
+            <a:r>
+              <a:rPr lang="en-US" sz="750" dirty="0">
+                <a:solidFill>
+                  <a:srgbClr val="9DB0C8"/>
+                </a:solidFill>
+                <a:latin typeface="Aptos" pitchFamily="34" charset="0"/>
+                <a:ea typeface="Calibri" pitchFamily="34" charset="-122"/>
+                <a:cs typeface="Calibri" pitchFamily="34" charset="-120"/>
+              </a:rPr>
+              <a:t>MedFlow  ·  Painel Inteligente de Acesso Hospitalar e Perfil de Atendimento  ·  Ômega Urban Tech  ·  Enterprise Challenge FIAP × Oracle 2026</a:t>
+            </a:r>
+            <a:endParaRPr lang="en-US" sz="750" dirty="0"/>
+          </a:p>
+        </p:txBody>
+      </p:sp>
+      <p:sp>
+        <p:nvSpPr>
+          <p:cNvPr id="53" name="Text 45"/>
+          <p:cNvSpPr/>
+          <p:nvPr/>
+        </p:nvSpPr>
+        <p:spPr>
+          <a:xfrm>
+            <a:off x="11094415" y="6419088"/>
+            <a:ext cx="548640" cy="256032"/>
+          </a:xfrm>
+          <a:prstGeom prst="rect">
+            <a:avLst/>
+          </a:prstGeom>
+          <a:noFill/>
+          <a:ln/>
+        </p:spPr>
+        <p:txBody>
+          <a:bodyPr wrap="square" lIns="0" tIns="0" rIns="0" bIns="0" rtlCol="0" anchor="ctr"/>
+          <a:lstStyle/>
+          <a:p>
+            <a:pPr marL="0" indent="0" algn="r">
+              <a:buNone/>
+            </a:pPr>
+            <a:r>
+              <a:rPr lang="en-US" sz="850" b="1" dirty="0">
+                <a:solidFill>
+                  <a:srgbClr val="2B6CB0"/>
+                </a:solidFill>
+                <a:latin typeface="Aptos" pitchFamily="34" charset="0"/>
+                <a:ea typeface="Calibri" pitchFamily="34" charset="-122"/>
+                <a:cs typeface="Calibri" pitchFamily="34" charset="-120"/>
+              </a:rPr>
               <a:t>19</a:t>
             </a:r>
             <a:endParaRPr lang="en-US" sz="850" dirty="0"/>
+          </a:p>
+        </p:txBody>
+      </p:sp>
+      <p:sp>
+        <p:nvSpPr>
+          <p:cNvPr id="54" name="TextBox 53"/>
+          <p:cNvSpPr txBox="1"/>
+          <p:nvPr/>
+        </p:nvSpPr>
+        <p:spPr>
+          <a:xfrm>
+            <a:off x="548640" y="1307592"/>
+            <a:ext cx="11091672" cy="347472"/>
+          </a:xfrm>
+          <a:prstGeom prst="rect">
+            <a:avLst/>
+          </a:prstGeom>
+          <a:noFill/>
+        </p:spPr>
+        <p:txBody>
+          <a:bodyPr wrap="square" lIns="0" tIns="0" rIns="0" bIns="0" anchor="t">
+            <a:spAutoFit/>
+          </a:bodyPr>
+          <a:lstStyle/>
+          <a:p>
+            <a:pPr algn="l">
+              <a:lnSpc>
+                <a:spcPct val="100000"/>
+              </a:lnSpc>
+            </a:pPr>
+            <a:r>
+              <a:rPr sz="1450" b="1">
+                <a:solidFill>
+                  <a:srgbClr val="1A2948"/>
+                </a:solidFill>
+                <a:latin typeface="Aptos"/>
+              </a:rPr>
+              <a:t>O MVP saiu da arquitetura e virou uma investigação pública, navegável e auditável.</a:t>
+            </a:r>
+          </a:p>
+        </p:txBody>
+      </p:sp>
+      <p:sp>
+        <p:nvSpPr>
+          <p:cNvPr id="55" name="TextBox 54"/>
+          <p:cNvSpPr txBox="1"/>
+          <p:nvPr/>
+        </p:nvSpPr>
+        <p:spPr>
+          <a:xfrm>
+            <a:off x="548640" y="1847088"/>
+            <a:ext cx="2176272" cy="201168"/>
+          </a:xfrm>
+          <a:prstGeom prst="rect">
+            <a:avLst/>
+          </a:prstGeom>
+          <a:noFill/>
+        </p:spPr>
+        <p:txBody>
+          <a:bodyPr wrap="square" lIns="0" tIns="0" rIns="0" bIns="0" anchor="t">
+            <a:spAutoFit/>
+          </a:bodyPr>
+          <a:lstStyle/>
+          <a:p>
+            <a:pPr algn="l">
+              <a:lnSpc>
+                <a:spcPct val="100000"/>
+              </a:lnSpc>
+            </a:pPr>
+            <a:r>
+              <a:rPr sz="850" b="1">
+                <a:solidFill>
+                  <a:srgbClr val="718096"/>
+                </a:solidFill>
+                <a:latin typeface="Aptos"/>
+              </a:rPr>
+              <a:t>COMO ERA</a:t>
+            </a:r>
+          </a:p>
+        </p:txBody>
+      </p:sp>
+      <p:sp>
+        <p:nvSpPr>
+          <p:cNvPr id="56" name="TextBox 55"/>
+          <p:cNvSpPr txBox="1"/>
+          <p:nvPr/>
+        </p:nvSpPr>
+        <p:spPr>
+          <a:xfrm>
+            <a:off x="2971800" y="1847088"/>
+            <a:ext cx="2523744" cy="201168"/>
+          </a:xfrm>
+          <a:prstGeom prst="rect">
+            <a:avLst/>
+          </a:prstGeom>
+          <a:noFill/>
+        </p:spPr>
+        <p:txBody>
+          <a:bodyPr wrap="square" lIns="0" tIns="0" rIns="0" bIns="0" anchor="t">
+            <a:spAutoFit/>
+          </a:bodyPr>
+          <a:lstStyle/>
+          <a:p>
+            <a:pPr algn="l">
+              <a:lnSpc>
+                <a:spcPct val="100000"/>
+              </a:lnSpc>
+            </a:pPr>
+            <a:r>
+              <a:rPr sz="850" b="1">
+                <a:solidFill>
+                  <a:srgbClr val="37AB94"/>
+                </a:solidFill>
+                <a:latin typeface="Aptos"/>
+              </a:rPr>
+              <a:t>COMO FICOU</a:t>
+            </a:r>
+          </a:p>
+        </p:txBody>
+      </p:sp>
+      <p:sp>
+        <p:nvSpPr>
+          <p:cNvPr id="57" name="TextBox 56"/>
+          <p:cNvSpPr txBox="1"/>
+          <p:nvPr/>
+        </p:nvSpPr>
+        <p:spPr>
+          <a:xfrm>
+            <a:off x="548640" y="2258568"/>
+            <a:ext cx="347472" cy="201168"/>
+          </a:xfrm>
+          <a:prstGeom prst="rect">
+            <a:avLst/>
+          </a:prstGeom>
+          <a:noFill/>
+        </p:spPr>
+        <p:txBody>
+          <a:bodyPr wrap="square" lIns="0" tIns="0" rIns="0" bIns="0" anchor="t">
+            <a:spAutoFit/>
+          </a:bodyPr>
+          <a:lstStyle/>
+          <a:p>
+            <a:pPr algn="l">
+              <a:lnSpc>
+                <a:spcPct val="100000"/>
+              </a:lnSpc>
+            </a:pPr>
+            <a:r>
+              <a:rPr sz="850" b="1">
+                <a:solidFill>
+                  <a:srgbClr val="718096"/>
+                </a:solidFill>
+                <a:latin typeface="Aptos"/>
+              </a:rPr>
+              <a:t>01</a:t>
+            </a:r>
+          </a:p>
+        </p:txBody>
+      </p:sp>
+      <p:sp>
+        <p:nvSpPr>
+          <p:cNvPr id="58" name="TextBox 57"/>
+          <p:cNvSpPr txBox="1"/>
+          <p:nvPr/>
+        </p:nvSpPr>
+        <p:spPr>
+          <a:xfrm>
+            <a:off x="987552" y="2231136"/>
+            <a:ext cx="1783080" cy="256032"/>
+          </a:xfrm>
+          <a:prstGeom prst="rect">
+            <a:avLst/>
+          </a:prstGeom>
+          <a:noFill/>
+        </p:spPr>
+        <p:txBody>
+          <a:bodyPr wrap="square" lIns="0" tIns="0" rIns="0" bIns="0" anchor="t">
+            <a:spAutoFit/>
+          </a:bodyPr>
+          <a:lstStyle/>
+          <a:p>
+            <a:pPr algn="l">
+              <a:lnSpc>
+                <a:spcPct val="100000"/>
+              </a:lnSpc>
+            </a:pPr>
+            <a:r>
+              <a:rPr sz="1050" b="1">
+                <a:solidFill>
+                  <a:srgbClr val="1A2948"/>
+                </a:solidFill>
+                <a:latin typeface="Aptos"/>
+              </a:rPr>
+              <a:t>Novo cruzamento</a:t>
+            </a:r>
+          </a:p>
+        </p:txBody>
+      </p:sp>
+      <p:sp>
+        <p:nvSpPr>
+          <p:cNvPr id="59" name="TextBox 58"/>
+          <p:cNvSpPr txBox="1"/>
+          <p:nvPr/>
+        </p:nvSpPr>
+        <p:spPr>
+          <a:xfrm>
+            <a:off x="2587752" y="2231136"/>
+            <a:ext cx="274320" cy="256032"/>
+          </a:xfrm>
+          <a:prstGeom prst="rect">
+            <a:avLst/>
+          </a:prstGeom>
+          <a:noFill/>
+        </p:spPr>
+        <p:txBody>
+          <a:bodyPr wrap="square" lIns="0" tIns="0" rIns="0" bIns="0" anchor="t">
+            <a:spAutoFit/>
+          </a:bodyPr>
+          <a:lstStyle/>
+          <a:p>
+            <a:pPr algn="ctr">
+              <a:lnSpc>
+                <a:spcPct val="100000"/>
+              </a:lnSpc>
+            </a:pPr>
+            <a:r>
+              <a:rPr sz="1100" b="1">
+                <a:solidFill>
+                  <a:srgbClr val="37AB94"/>
+                </a:solidFill>
+                <a:latin typeface="Aptos"/>
+              </a:rPr>
+              <a:t>→</a:t>
+            </a:r>
+          </a:p>
+        </p:txBody>
+      </p:sp>
+      <p:sp>
+        <p:nvSpPr>
+          <p:cNvPr id="60" name="TextBox 59"/>
+          <p:cNvSpPr txBox="1"/>
+          <p:nvPr/>
+        </p:nvSpPr>
+        <p:spPr>
+          <a:xfrm>
+            <a:off x="2971800" y="2231136"/>
+            <a:ext cx="2606040" cy="438912"/>
+          </a:xfrm>
+          <a:prstGeom prst="rect">
+            <a:avLst/>
+          </a:prstGeom>
+          <a:noFill/>
+        </p:spPr>
+        <p:txBody>
+          <a:bodyPr wrap="square" lIns="0" tIns="0" rIns="0" bIns="0" anchor="t">
+            <a:spAutoFit/>
+          </a:bodyPr>
+          <a:lstStyle/>
+          <a:p>
+            <a:pPr algn="l">
+              <a:lnSpc>
+                <a:spcPct val="100000"/>
+              </a:lnSpc>
+            </a:pPr>
+            <a:r>
+              <a:rPr sz="1019" b="1">
+                <a:solidFill>
+                  <a:srgbClr val="2D3748"/>
+                </a:solidFill>
+                <a:latin typeface="Aptos"/>
+              </a:rPr>
+              <a:t>Jornada região → hospital → especialidade</a:t>
+            </a:r>
+          </a:p>
+        </p:txBody>
+      </p:sp>
+      <p:sp>
+        <p:nvSpPr>
+          <p:cNvPr id="61" name="Rectangle 60"/>
+          <p:cNvSpPr/>
+          <p:nvPr/>
+        </p:nvSpPr>
+        <p:spPr>
+          <a:xfrm>
+            <a:off x="987552" y="2761488"/>
+            <a:ext cx="4599432" cy="7315"/>
+          </a:xfrm>
+          <a:prstGeom prst="rect">
+            <a:avLst/>
+          </a:prstGeom>
+          <a:solidFill>
+            <a:srgbClr val="D9E2EC"/>
+          </a:solidFill>
+          <a:ln>
+            <a:noFill/>
+          </a:ln>
+        </p:spPr>
+        <p:style>
+          <a:lnRef idx="1">
+            <a:schemeClr val="accent1"/>
+          </a:lnRef>
+          <a:fillRef idx="3">
+            <a:schemeClr val="accent1"/>
+          </a:fillRef>
+          <a:effectRef idx="2">
+            <a:schemeClr val="accent1"/>
+          </a:effectRef>
+          <a:fontRef idx="minor">
+            <a:schemeClr val="lt1"/>
+          </a:fontRef>
+        </p:style>
+        <p:txBody>
+          <a:bodyPr rtlCol="0" anchor="ctr"/>
+          <a:lstStyle/>
+          <a:p>
+            <a:pPr algn="ctr"/>
+            <a:endParaRPr/>
+          </a:p>
+        </p:txBody>
+      </p:sp>
+      <p:sp>
+        <p:nvSpPr>
+          <p:cNvPr id="62" name="TextBox 61"/>
+          <p:cNvSpPr txBox="1"/>
+          <p:nvPr/>
+        </p:nvSpPr>
+        <p:spPr>
+          <a:xfrm>
+            <a:off x="548640" y="2953512"/>
+            <a:ext cx="347472" cy="201168"/>
+          </a:xfrm>
+          <a:prstGeom prst="rect">
+            <a:avLst/>
+          </a:prstGeom>
+          <a:noFill/>
+        </p:spPr>
+        <p:txBody>
+          <a:bodyPr wrap="square" lIns="0" tIns="0" rIns="0" bIns="0" anchor="t">
+            <a:spAutoFit/>
+          </a:bodyPr>
+          <a:lstStyle/>
+          <a:p>
+            <a:pPr algn="l">
+              <a:lnSpc>
+                <a:spcPct val="100000"/>
+              </a:lnSpc>
+            </a:pPr>
+            <a:r>
+              <a:rPr sz="850" b="1">
+                <a:solidFill>
+                  <a:srgbClr val="718096"/>
+                </a:solidFill>
+                <a:latin typeface="Aptos"/>
+              </a:rPr>
+              <a:t>02</a:t>
+            </a:r>
+          </a:p>
+        </p:txBody>
+      </p:sp>
+      <p:sp>
+        <p:nvSpPr>
+          <p:cNvPr id="63" name="TextBox 62"/>
+          <p:cNvSpPr txBox="1"/>
+          <p:nvPr/>
+        </p:nvSpPr>
+        <p:spPr>
+          <a:xfrm>
+            <a:off x="987552" y="2926080"/>
+            <a:ext cx="1783080" cy="256032"/>
+          </a:xfrm>
+          <a:prstGeom prst="rect">
+            <a:avLst/>
+          </a:prstGeom>
+          <a:noFill/>
+        </p:spPr>
+        <p:txBody>
+          <a:bodyPr wrap="square" lIns="0" tIns="0" rIns="0" bIns="0" anchor="t">
+            <a:spAutoFit/>
+          </a:bodyPr>
+          <a:lstStyle/>
+          <a:p>
+            <a:pPr algn="l">
+              <a:lnSpc>
+                <a:spcPct val="100000"/>
+              </a:lnSpc>
+            </a:pPr>
+            <a:r>
+              <a:rPr sz="1050" b="1">
+                <a:solidFill>
+                  <a:srgbClr val="1A2948"/>
+                </a:solidFill>
+                <a:latin typeface="Aptos"/>
+              </a:rPr>
+              <a:t>Número isolado</a:t>
+            </a:r>
+          </a:p>
+        </p:txBody>
+      </p:sp>
+      <p:sp>
+        <p:nvSpPr>
+          <p:cNvPr id="64" name="TextBox 63"/>
+          <p:cNvSpPr txBox="1"/>
+          <p:nvPr/>
+        </p:nvSpPr>
+        <p:spPr>
+          <a:xfrm>
+            <a:off x="2587752" y="2926080"/>
+            <a:ext cx="274320" cy="256032"/>
+          </a:xfrm>
+          <a:prstGeom prst="rect">
+            <a:avLst/>
+          </a:prstGeom>
+          <a:noFill/>
+        </p:spPr>
+        <p:txBody>
+          <a:bodyPr wrap="square" lIns="0" tIns="0" rIns="0" bIns="0" anchor="t">
+            <a:spAutoFit/>
+          </a:bodyPr>
+          <a:lstStyle/>
+          <a:p>
+            <a:pPr algn="ctr">
+              <a:lnSpc>
+                <a:spcPct val="100000"/>
+              </a:lnSpc>
+            </a:pPr>
+            <a:r>
+              <a:rPr sz="1100" b="1">
+                <a:solidFill>
+                  <a:srgbClr val="37AB94"/>
+                </a:solidFill>
+                <a:latin typeface="Aptos"/>
+              </a:rPr>
+              <a:t>→</a:t>
+            </a:r>
+          </a:p>
+        </p:txBody>
+      </p:sp>
+      <p:sp>
+        <p:nvSpPr>
+          <p:cNvPr id="65" name="TextBox 64"/>
+          <p:cNvSpPr txBox="1"/>
+          <p:nvPr/>
+        </p:nvSpPr>
+        <p:spPr>
+          <a:xfrm>
+            <a:off x="2971800" y="2926080"/>
+            <a:ext cx="2606040" cy="438912"/>
+          </a:xfrm>
+          <a:prstGeom prst="rect">
+            <a:avLst/>
+          </a:prstGeom>
+          <a:noFill/>
+        </p:spPr>
+        <p:txBody>
+          <a:bodyPr wrap="square" lIns="0" tIns="0" rIns="0" bIns="0" anchor="t">
+            <a:spAutoFit/>
+          </a:bodyPr>
+          <a:lstStyle/>
+          <a:p>
+            <a:pPr algn="l">
+              <a:lnSpc>
+                <a:spcPct val="100000"/>
+              </a:lnSpc>
+            </a:pPr>
+            <a:r>
+              <a:rPr sz="1019" b="1">
+                <a:solidFill>
+                  <a:srgbClr val="2D3748"/>
+                </a:solidFill>
+                <a:latin typeface="Aptos"/>
+              </a:rPr>
+              <a:t>Histórico, referência e amostra à vista</a:t>
+            </a:r>
+          </a:p>
+        </p:txBody>
+      </p:sp>
+      <p:sp>
+        <p:nvSpPr>
+          <p:cNvPr id="66" name="Rectangle 65"/>
+          <p:cNvSpPr/>
+          <p:nvPr/>
+        </p:nvSpPr>
+        <p:spPr>
+          <a:xfrm>
+            <a:off x="987552" y="3456432"/>
+            <a:ext cx="4599432" cy="7315"/>
+          </a:xfrm>
+          <a:prstGeom prst="rect">
+            <a:avLst/>
+          </a:prstGeom>
+          <a:solidFill>
+            <a:srgbClr val="D9E2EC"/>
+          </a:solidFill>
+          <a:ln>
+            <a:noFill/>
+          </a:ln>
+        </p:spPr>
+        <p:style>
+          <a:lnRef idx="1">
+            <a:schemeClr val="accent1"/>
+          </a:lnRef>
+          <a:fillRef idx="3">
+            <a:schemeClr val="accent1"/>
+          </a:fillRef>
+          <a:effectRef idx="2">
+            <a:schemeClr val="accent1"/>
+          </a:effectRef>
+          <a:fontRef idx="minor">
+            <a:schemeClr val="lt1"/>
+          </a:fontRef>
+        </p:style>
+        <p:txBody>
+          <a:bodyPr rtlCol="0" anchor="ctr"/>
+          <a:lstStyle/>
+          <a:p>
+            <a:pPr algn="ctr"/>
+            <a:endParaRPr/>
+          </a:p>
+        </p:txBody>
+      </p:sp>
+      <p:sp>
+        <p:nvSpPr>
+          <p:cNvPr id="67" name="TextBox 66"/>
+          <p:cNvSpPr txBox="1"/>
+          <p:nvPr/>
+        </p:nvSpPr>
+        <p:spPr>
+          <a:xfrm>
+            <a:off x="548640" y="3648456"/>
+            <a:ext cx="347472" cy="201168"/>
+          </a:xfrm>
+          <a:prstGeom prst="rect">
+            <a:avLst/>
+          </a:prstGeom>
+          <a:noFill/>
+        </p:spPr>
+        <p:txBody>
+          <a:bodyPr wrap="square" lIns="0" tIns="0" rIns="0" bIns="0" anchor="t">
+            <a:spAutoFit/>
+          </a:bodyPr>
+          <a:lstStyle/>
+          <a:p>
+            <a:pPr algn="l">
+              <a:lnSpc>
+                <a:spcPct val="100000"/>
+              </a:lnSpc>
+            </a:pPr>
+            <a:r>
+              <a:rPr sz="850" b="1">
+                <a:solidFill>
+                  <a:srgbClr val="718096"/>
+                </a:solidFill>
+                <a:latin typeface="Aptos"/>
+              </a:rPr>
+              <a:t>03</a:t>
+            </a:r>
+          </a:p>
+        </p:txBody>
+      </p:sp>
+      <p:sp>
+        <p:nvSpPr>
+          <p:cNvPr id="68" name="TextBox 67"/>
+          <p:cNvSpPr txBox="1"/>
+          <p:nvPr/>
+        </p:nvSpPr>
+        <p:spPr>
+          <a:xfrm>
+            <a:off x="987552" y="3621024"/>
+            <a:ext cx="1783080" cy="256032"/>
+          </a:xfrm>
+          <a:prstGeom prst="rect">
+            <a:avLst/>
+          </a:prstGeom>
+          <a:noFill/>
+        </p:spPr>
+        <p:txBody>
+          <a:bodyPr wrap="square" lIns="0" tIns="0" rIns="0" bIns="0" anchor="t">
+            <a:spAutoFit/>
+          </a:bodyPr>
+          <a:lstStyle/>
+          <a:p>
+            <a:pPr algn="l">
+              <a:lnSpc>
+                <a:spcPct val="100000"/>
+              </a:lnSpc>
+            </a:pPr>
+            <a:r>
+              <a:rPr sz="1050" b="1">
+                <a:solidFill>
+                  <a:srgbClr val="1A2948"/>
+                </a:solidFill>
+                <a:latin typeface="Aptos"/>
+              </a:rPr>
+              <a:t>Pergunta técnica</a:t>
+            </a:r>
+          </a:p>
+        </p:txBody>
+      </p:sp>
+      <p:sp>
+        <p:nvSpPr>
+          <p:cNvPr id="69" name="TextBox 68"/>
+          <p:cNvSpPr txBox="1"/>
+          <p:nvPr/>
+        </p:nvSpPr>
+        <p:spPr>
+          <a:xfrm>
+            <a:off x="2587752" y="3621024"/>
+            <a:ext cx="274320" cy="256032"/>
+          </a:xfrm>
+          <a:prstGeom prst="rect">
+            <a:avLst/>
+          </a:prstGeom>
+          <a:noFill/>
+        </p:spPr>
+        <p:txBody>
+          <a:bodyPr wrap="square" lIns="0" tIns="0" rIns="0" bIns="0" anchor="t">
+            <a:spAutoFit/>
+          </a:bodyPr>
+          <a:lstStyle/>
+          <a:p>
+            <a:pPr algn="ctr">
+              <a:lnSpc>
+                <a:spcPct val="100000"/>
+              </a:lnSpc>
+            </a:pPr>
+            <a:r>
+              <a:rPr sz="1100" b="1">
+                <a:solidFill>
+                  <a:srgbClr val="37AB94"/>
+                </a:solidFill>
+                <a:latin typeface="Aptos"/>
+              </a:rPr>
+              <a:t>→</a:t>
+            </a:r>
+          </a:p>
+        </p:txBody>
+      </p:sp>
+      <p:sp>
+        <p:nvSpPr>
+          <p:cNvPr id="70" name="TextBox 69"/>
+          <p:cNvSpPr txBox="1"/>
+          <p:nvPr/>
+        </p:nvSpPr>
+        <p:spPr>
+          <a:xfrm>
+            <a:off x="2971800" y="3621024"/>
+            <a:ext cx="2606040" cy="438912"/>
+          </a:xfrm>
+          <a:prstGeom prst="rect">
+            <a:avLst/>
+          </a:prstGeom>
+          <a:noFill/>
+        </p:spPr>
+        <p:txBody>
+          <a:bodyPr wrap="square" lIns="0" tIns="0" rIns="0" bIns="0" anchor="t">
+            <a:spAutoFit/>
+          </a:bodyPr>
+          <a:lstStyle/>
+          <a:p>
+            <a:pPr algn="l">
+              <a:lnSpc>
+                <a:spcPct val="100000"/>
+              </a:lnSpc>
+            </a:pPr>
+            <a:r>
+              <a:rPr sz="1019" b="1">
+                <a:solidFill>
+                  <a:srgbClr val="2D3748"/>
+                </a:solidFill>
+                <a:latin typeface="Aptos"/>
+              </a:rPr>
+              <a:t>FlowIA com contexto e SQL auditável</a:t>
+            </a:r>
+          </a:p>
+        </p:txBody>
+      </p:sp>
+      <p:sp>
+        <p:nvSpPr>
+          <p:cNvPr id="71" name="Rectangle 70"/>
+          <p:cNvSpPr/>
+          <p:nvPr/>
+        </p:nvSpPr>
+        <p:spPr>
+          <a:xfrm>
+            <a:off x="5907024" y="1810512"/>
+            <a:ext cx="5733288" cy="3355848"/>
+          </a:xfrm>
+          <a:prstGeom prst="rect">
+            <a:avLst/>
+          </a:prstGeom>
+          <a:solidFill>
+            <a:srgbClr val="F5F8FC"/>
+          </a:solidFill>
+          <a:ln>
+            <a:noFill/>
+          </a:ln>
+        </p:spPr>
+        <p:style>
+          <a:lnRef idx="1">
+            <a:schemeClr val="accent1"/>
+          </a:lnRef>
+          <a:fillRef idx="3">
+            <a:schemeClr val="accent1"/>
+          </a:fillRef>
+          <a:effectRef idx="2">
+            <a:schemeClr val="accent1"/>
+          </a:effectRef>
+          <a:fontRef idx="minor">
+            <a:schemeClr val="lt1"/>
+          </a:fontRef>
+        </p:style>
+        <p:txBody>
+          <a:bodyPr rtlCol="0" anchor="ctr"/>
+          <a:lstStyle/>
+          <a:p>
+            <a:pPr algn="ctr"/>
+            <a:endParaRPr/>
+          </a:p>
+        </p:txBody>
+      </p:sp>
+      <p:pic>
+        <p:nvPicPr>
+          <p:cNvPr id="72" name="Picture 71" descr="image.png"/>
+          <p:cNvPicPr>
+            <a:picLocks noChangeAspect="1"/>
+          </p:cNvPicPr>
+          <p:nvPr/>
+        </p:nvPicPr>
+        <p:blipFill>
+          <a:blip r:embed="rId3"/>
+          <a:stretch>
+            <a:fillRect/>
+          </a:stretch>
+        </p:blipFill>
+        <p:spPr>
+          <a:xfrm>
+            <a:off x="6304593" y="1920240"/>
+            <a:ext cx="4938149" cy="3136392"/>
+          </a:xfrm>
+          <a:prstGeom prst="rect">
+            <a:avLst/>
+          </a:prstGeom>
+        </p:spPr>
+      </p:pic>
+      <p:sp>
+        <p:nvSpPr>
+          <p:cNvPr id="73" name="TextBox 72"/>
+          <p:cNvSpPr txBox="1"/>
+          <p:nvPr/>
+        </p:nvSpPr>
+        <p:spPr>
+          <a:xfrm>
+            <a:off x="548640" y="5047488"/>
+            <a:ext cx="11091672" cy="347472"/>
+          </a:xfrm>
+          <a:prstGeom prst="rect">
+            <a:avLst/>
+          </a:prstGeom>
+          <a:noFill/>
+        </p:spPr>
+        <p:txBody>
+          <a:bodyPr wrap="square" lIns="0" tIns="0" rIns="0" bIns="0" anchor="t">
+            <a:spAutoFit/>
+          </a:bodyPr>
+          <a:lstStyle/>
+          <a:p>
+            <a:pPr algn="ctr">
+              <a:lnSpc>
+                <a:spcPct val="100000"/>
+              </a:lnSpc>
+            </a:pPr>
+            <a:r>
+              <a:rPr sz="1080" b="1">
+                <a:solidFill>
+                  <a:srgbClr val="1A2948"/>
+                </a:solidFill>
+                <a:latin typeface="Aptos"/>
+              </a:rPr>
+              <a:t>O resultado está menos no volume processado e mais na investigação: uma pergunta dispersa vira um percurso que pode ser refeito e conferido.</a:t>
+            </a:r>
+          </a:p>
+        </p:txBody>
+      </p:sp>
+      <p:sp>
+        <p:nvSpPr>
+          <p:cNvPr id="74" name="TextBox 73"/>
+          <p:cNvSpPr txBox="1"/>
+          <p:nvPr/>
+        </p:nvSpPr>
+        <p:spPr>
+          <a:xfrm>
+            <a:off x="548640" y="5468112"/>
+            <a:ext cx="11091672" cy="219456"/>
+          </a:xfrm>
+          <a:prstGeom prst="rect">
+            <a:avLst/>
+          </a:prstGeom>
+          <a:noFill/>
+        </p:spPr>
+        <p:txBody>
+          <a:bodyPr wrap="square" lIns="0" tIns="0" rIns="0" bIns="0" anchor="t">
+            <a:spAutoFit/>
+          </a:bodyPr>
+          <a:lstStyle/>
+          <a:p>
+            <a:pPr algn="ctr">
+              <a:lnSpc>
+                <a:spcPct val="100000"/>
+              </a:lnSpc>
+            </a:pPr>
+            <a:r>
+              <a:rPr sz="860" b="0">
+                <a:solidFill>
+                  <a:srgbClr val="718096"/>
+                </a:solidFill>
+                <a:latin typeface="Aptos"/>
+              </a:rPr>
+              <a:t>30 competências · 62 regiões · 655 hospitais · 7,28 milhões de AIHs · 0 divergências na validação executada</a:t>
+            </a:r>
+          </a:p>
+        </p:txBody>
+      </p:sp>
+      <p:sp>
+        <p:nvSpPr>
+          <p:cNvPr id="75" name="Rectangle 74"/>
+          <p:cNvSpPr/>
+          <p:nvPr/>
+        </p:nvSpPr>
+        <p:spPr>
+          <a:xfrm>
+            <a:off x="548640" y="5769864"/>
+            <a:ext cx="11091672" cy="7315"/>
+          </a:xfrm>
+          <a:prstGeom prst="rect">
+            <a:avLst/>
+          </a:prstGeom>
+          <a:solidFill>
+            <a:srgbClr val="D9E2EC"/>
+          </a:solidFill>
+          <a:ln>
+            <a:noFill/>
+          </a:ln>
+        </p:spPr>
+        <p:style>
+          <a:lnRef idx="1">
+            <a:schemeClr val="accent1"/>
+          </a:lnRef>
+          <a:fillRef idx="3">
+            <a:schemeClr val="accent1"/>
+          </a:fillRef>
+          <a:effectRef idx="2">
+            <a:schemeClr val="accent1"/>
+          </a:effectRef>
+          <a:fontRef idx="minor">
+            <a:schemeClr val="lt1"/>
+          </a:fontRef>
+        </p:style>
+        <p:txBody>
+          <a:bodyPr rtlCol="0" anchor="ctr"/>
+          <a:lstStyle/>
+          <a:p>
+            <a:pPr algn="ctr"/>
+            <a:endParaRPr/>
+          </a:p>
+        </p:txBody>
+      </p:sp>
+      <p:sp>
+        <p:nvSpPr>
+          <p:cNvPr id="76" name="TextBox 75"/>
+          <p:cNvSpPr txBox="1"/>
+          <p:nvPr/>
+        </p:nvSpPr>
+        <p:spPr>
+          <a:xfrm>
+            <a:off x="548640" y="5861303"/>
+            <a:ext cx="1170432" cy="164592"/>
+          </a:xfrm>
+          <a:prstGeom prst="rect">
+            <a:avLst/>
+          </a:prstGeom>
+          <a:noFill/>
+        </p:spPr>
+        <p:txBody>
+          <a:bodyPr wrap="square" lIns="0" tIns="0" rIns="0" bIns="0" anchor="t">
+            <a:spAutoFit/>
+          </a:bodyPr>
+          <a:lstStyle/>
+          <a:p>
+            <a:pPr algn="l">
+              <a:lnSpc>
+                <a:spcPct val="100000"/>
+              </a:lnSpc>
+            </a:pPr>
+            <a:r>
+              <a:rPr sz="800" b="1">
+                <a:solidFill>
+                  <a:srgbClr val="37AB94"/>
+                </a:solidFill>
+                <a:latin typeface="Aptos"/>
+              </a:rPr>
+              <a:t>TERMOS DO SLIDE</a:t>
+            </a:r>
+          </a:p>
+        </p:txBody>
+      </p:sp>
+      <p:sp>
+        <p:nvSpPr>
+          <p:cNvPr id="77" name="TextBox 76"/>
+          <p:cNvSpPr txBox="1"/>
+          <p:nvPr/>
+        </p:nvSpPr>
+        <p:spPr>
+          <a:xfrm>
+            <a:off x="1755648" y="5833872"/>
+            <a:ext cx="9884664" cy="365760"/>
+          </a:xfrm>
+          <a:prstGeom prst="rect">
+            <a:avLst/>
+          </a:prstGeom>
+          <a:noFill/>
+        </p:spPr>
+        <p:txBody>
+          <a:bodyPr wrap="square" lIns="0" tIns="0" rIns="0" bIns="0" anchor="t">
+            <a:spAutoFit/>
+          </a:bodyPr>
+          <a:lstStyle/>
+          <a:p>
+            <a:pPr algn="l">
+              <a:lnSpc>
+                <a:spcPct val="100000"/>
+              </a:lnSpc>
+            </a:pPr>
+            <a:r>
+              <a:rPr sz="850" b="0">
+                <a:solidFill>
+                  <a:srgbClr val="718096"/>
+                </a:solidFill>
+                <a:latin typeface="Aptos"/>
+              </a:rPr>
+              <a:t>AIH: Autorização de Internação Hospitalar, registro administrativo do SUS; uma AIH aprovada nem sempre equivale a uma nova internação. · Competência: mês de referência da publicação.</a:t>
+            </a:r>
           </a:p>
         </p:txBody>
       </p:sp>
@@ -21766,22 +21359,15 @@
 </file>
 
 <file path=ppt/slides/slide20.xml><?xml version="1.0" encoding="utf-8"?>
-<p:sld xmlns:a="http://schemas.openxmlformats.org/drawingml/2006/main" xmlns:r="http://schemas.openxmlformats.org/officeDocument/2006/relationships" xmlns:p="http://schemas.openxmlformats.org/presentationml/2006/main">
-  <p:cSld name="Slide 27">
+<p:sld xmlns:a="http://schemas.openxmlformats.org/drawingml/2006/main" xmlns:p="http://schemas.openxmlformats.org/presentationml/2006/main" xmlns:r="http://schemas.openxmlformats.org/officeDocument/2006/relationships">
+  <p:cSld>
     <p:spTree>
       <p:nvGrpSpPr>
         <p:cNvPr id="1" name=""/>
         <p:cNvGrpSpPr/>
         <p:nvPr/>
       </p:nvGrpSpPr>
-      <p:grpSpPr>
-        <a:xfrm>
-          <a:off x="0" y="0"/>
-          <a:ext cx="0" cy="0"/>
-          <a:chOff x="0" y="0"/>
-          <a:chExt cx="0" cy="0"/>
-        </a:xfrm>
-      </p:grpSpPr>
+      <p:grpSpPr/>
       <p:sp>
         <p:nvSpPr>
           <p:cNvPr id="2" name="Shape 0"/>
@@ -21875,7 +21461,7 @@
                 <a:ea typeface="Calibri" pitchFamily="34" charset="-122"/>
                 <a:cs typeface="Calibri" pitchFamily="34" charset="-120"/>
               </a:rPr>
-              <a:t>Rigor analítico</a:t>
+              <a:t>Próximos passos</a:t>
             </a:r>
             <a:endParaRPr lang="en-US" sz="2200" dirty="0"/>
           </a:p>
@@ -21922,14 +21508,14 @@
       </p:sp>
       <p:sp>
         <p:nvSpPr>
-          <p:cNvPr id="6" name="Text 4"/>
-          <p:cNvSpPr/>
-          <p:nvPr/>
-        </p:nvSpPr>
-        <p:spPr>
-          <a:xfrm>
-            <a:off x="548640" y="1335024"/>
-            <a:ext cx="11091672" cy="329184"/>
+          <p:cNvPr id="52" name="Text 44"/>
+          <p:cNvSpPr/>
+          <p:nvPr/>
+        </p:nvSpPr>
+        <p:spPr>
+          <a:xfrm>
+            <a:off x="548640" y="6419088"/>
+            <a:ext cx="10454335" cy="256032"/>
           </a:xfrm>
           <a:prstGeom prst="rect">
             <a:avLst/>
@@ -21945,1345 +21531,30 @@
               <a:buNone/>
             </a:pPr>
             <a:r>
-              <a:rPr lang="en-US" sz="1100" dirty="0">
-                <a:solidFill>
-                  <a:srgbClr val="2D3748"/>
+              <a:rPr lang="en-US" sz="750" dirty="0">
+                <a:solidFill>
+                  <a:srgbClr val="9DB0C8"/>
                 </a:solidFill>
                 <a:latin typeface="Aptos" pitchFamily="34" charset="0"/>
                 <a:ea typeface="Calibri" pitchFamily="34" charset="-122"/>
                 <a:cs typeface="Calibri" pitchFamily="34" charset="-120"/>
               </a:rPr>
-              <a:t>Cada indicador do MedFlow nasce de um dado administrativo com finalidade própria. O limite viaja junto com o número, na mesma tela em que ele é lido.</a:t>
-            </a:r>
-            <a:endParaRPr lang="en-US" sz="1100" dirty="0"/>
-          </a:p>
-        </p:txBody>
-      </p:sp>
-      <p:graphicFrame>
-        <p:nvGraphicFramePr>
-          <p:cNvPr id="28" name="Table 0"/>
-          <p:cNvGraphicFramePr>
-            <a:graphicFrameLocks noGrp="1"/>
-          </p:cNvGraphicFramePr>
-          <p:nvPr>
-            <p:extLst>
-              <p:ext uri="{D42A27DB-BD31-4B8C-83A1-F6EECF244321}">
-                <p14:modId xmlns:p14="http://schemas.microsoft.com/office/powerpoint/2010/main" val="1579011935"/>
-              </p:ext>
-            </p:extLst>
-          </p:nvPr>
-        </p:nvGraphicFramePr>
-        <p:xfrm>
-          <a:off x="548640" y="1755648"/>
-          <a:ext cx="11091672" cy="3657600"/>
-        </p:xfrm>
-        <a:graphic>
-          <a:graphicData uri="http://schemas.openxmlformats.org/drawingml/2006/table">
-            <a:tbl>
-              <a:tblPr/>
-              <a:tblGrid>
-                <a:gridCol w="3703320">
-                  <a:extLst>
-                    <a:ext uri="{9D8B030D-6E8A-4147-A177-3AD203B41FA5}">
-                      <a16:colId xmlns:a16="http://schemas.microsoft.com/office/drawing/2014/main" val="20000"/>
-                    </a:ext>
-                  </a:extLst>
-                </a:gridCol>
-                <a:gridCol w="3913632">
-                  <a:extLst>
-                    <a:ext uri="{9D8B030D-6E8A-4147-A177-3AD203B41FA5}">
-                      <a16:colId xmlns:a16="http://schemas.microsoft.com/office/drawing/2014/main" val="20001"/>
-                    </a:ext>
-                  </a:extLst>
-                </a:gridCol>
-                <a:gridCol w="3474720">
-                  <a:extLst>
-                    <a:ext uri="{9D8B030D-6E8A-4147-A177-3AD203B41FA5}">
-                      <a16:colId xmlns:a16="http://schemas.microsoft.com/office/drawing/2014/main" val="20002"/>
-                    </a:ext>
-                  </a:extLst>
-                </a:gridCol>
-              </a:tblGrid>
-              <a:tr h="365760">
-                <a:tc>
-                  <a:txBody>
-                    <a:bodyPr/>
-                    <a:lstStyle/>
-                    <a:p>
-                      <a:pPr marL="0" indent="0" algn="l">
-                        <a:buNone/>
-                      </a:pPr>
-                      <a:r>
-                        <a:rPr lang="en-US" sz="950" b="1" dirty="0">
-                          <a:solidFill>
-                            <a:srgbClr val="FFFFFF"/>
-                          </a:solidFill>
-                          <a:latin typeface="Aptos" pitchFamily="34" charset="0"/>
-                          <a:ea typeface="Calibri" pitchFamily="34" charset="-122"/>
-                          <a:cs typeface="Calibri" pitchFamily="34" charset="-120"/>
-                        </a:rPr>
-                        <a:t>Fato documentado</a:t>
-                      </a:r>
-                      <a:endParaRPr lang="en-US" sz="950" dirty="0">
-                        <a:latin typeface="Calibri" charset="0"/>
-                        <a:ea typeface="Calibri" charset="0"/>
-                        <a:cs typeface="Calibri" charset="0"/>
-                      </a:endParaRPr>
-                    </a:p>
-                  </a:txBody>
-                  <a:tcPr marL="76200" marR="76200" marT="50800" marB="50800" anchor="ctr">
-                    <a:lnL w="9525" cap="flat" cmpd="sng" algn="ctr">
-                      <a:solidFill>
-                        <a:srgbClr val="D7E3F2"/>
-                      </a:solidFill>
-                      <a:prstDash val="solid"/>
-                      <a:round/>
-                      <a:headEnd type="none" w="med" len="med"/>
-                      <a:tailEnd type="none" w="med" len="med"/>
-                    </a:lnL>
-                    <a:lnR w="9525" cap="flat" cmpd="sng" algn="ctr">
-                      <a:solidFill>
-                        <a:srgbClr val="D7E3F2"/>
-                      </a:solidFill>
-                      <a:prstDash val="solid"/>
-                      <a:round/>
-                      <a:headEnd type="none" w="med" len="med"/>
-                      <a:tailEnd type="none" w="med" len="med"/>
-                    </a:lnR>
-                    <a:lnT w="9525" cap="flat" cmpd="sng" algn="ctr">
-                      <a:solidFill>
-                        <a:srgbClr val="D7E3F2"/>
-                      </a:solidFill>
-                      <a:prstDash val="solid"/>
-                      <a:round/>
-                      <a:headEnd type="none" w="med" len="med"/>
-                      <a:tailEnd type="none" w="med" len="med"/>
-                    </a:lnT>
-                    <a:lnB w="9525" cap="flat" cmpd="sng" algn="ctr">
-                      <a:solidFill>
-                        <a:srgbClr val="D7E3F2"/>
-                      </a:solidFill>
-                      <a:prstDash val="solid"/>
-                      <a:round/>
-                      <a:headEnd type="none" w="med" len="med"/>
-                      <a:tailEnd type="none" w="med" len="med"/>
-                    </a:lnB>
-                    <a:solidFill>
-                      <a:srgbClr val="1A2948"/>
-                    </a:solidFill>
-                  </a:tcPr>
-                </a:tc>
-                <a:tc>
-                  <a:txBody>
-                    <a:bodyPr/>
-                    <a:lstStyle/>
-                    <a:p>
-                      <a:pPr marL="0" indent="0" algn="l">
-                        <a:buNone/>
-                      </a:pPr>
-                      <a:r>
-                        <a:rPr lang="en-US" sz="950" b="1" dirty="0">
-                          <a:solidFill>
-                            <a:srgbClr val="FFFFFF"/>
-                          </a:solidFill>
-                          <a:latin typeface="Aptos" pitchFamily="34" charset="0"/>
-                          <a:ea typeface="Calibri" pitchFamily="34" charset="-122"/>
-                          <a:cs typeface="Calibri" pitchFamily="34" charset="-120"/>
-                        </a:rPr>
-                        <a:t>Interpretação correta</a:t>
-                      </a:r>
-                      <a:endParaRPr lang="en-US" sz="950" dirty="0">
-                        <a:latin typeface="Calibri" charset="0"/>
-                        <a:ea typeface="Calibri" charset="0"/>
-                        <a:cs typeface="Calibri" charset="0"/>
-                      </a:endParaRPr>
-                    </a:p>
-                  </a:txBody>
-                  <a:tcPr marL="76200" marR="76200" marT="50800" marB="50800" anchor="ctr">
-                    <a:lnL w="9525" cap="flat" cmpd="sng" algn="ctr">
-                      <a:solidFill>
-                        <a:srgbClr val="D7E3F2"/>
-                      </a:solidFill>
-                      <a:prstDash val="solid"/>
-                      <a:round/>
-                      <a:headEnd type="none" w="med" len="med"/>
-                      <a:tailEnd type="none" w="med" len="med"/>
-                    </a:lnL>
-                    <a:lnR w="9525" cap="flat" cmpd="sng" algn="ctr">
-                      <a:solidFill>
-                        <a:srgbClr val="D7E3F2"/>
-                      </a:solidFill>
-                      <a:prstDash val="solid"/>
-                      <a:round/>
-                      <a:headEnd type="none" w="med" len="med"/>
-                      <a:tailEnd type="none" w="med" len="med"/>
-                    </a:lnR>
-                    <a:lnT w="9525" cap="flat" cmpd="sng" algn="ctr">
-                      <a:solidFill>
-                        <a:srgbClr val="D7E3F2"/>
-                      </a:solidFill>
-                      <a:prstDash val="solid"/>
-                      <a:round/>
-                      <a:headEnd type="none" w="med" len="med"/>
-                      <a:tailEnd type="none" w="med" len="med"/>
-                    </a:lnT>
-                    <a:lnB w="9525" cap="flat" cmpd="sng" algn="ctr">
-                      <a:solidFill>
-                        <a:srgbClr val="D7E3F2"/>
-                      </a:solidFill>
-                      <a:prstDash val="solid"/>
-                      <a:round/>
-                      <a:headEnd type="none" w="med" len="med"/>
-                      <a:tailEnd type="none" w="med" len="med"/>
-                    </a:lnB>
-                    <a:solidFill>
-                      <a:srgbClr val="1A2948"/>
-                    </a:solidFill>
-                  </a:tcPr>
-                </a:tc>
-                <a:tc>
-                  <a:txBody>
-                    <a:bodyPr/>
-                    <a:lstStyle/>
-                    <a:p>
-                      <a:pPr marL="0" indent="0" algn="l">
-                        <a:buNone/>
-                      </a:pPr>
-                      <a:r>
-                        <a:rPr lang="en-US" sz="950" b="1" dirty="0">
-                          <a:solidFill>
-                            <a:srgbClr val="FFFFFF"/>
-                          </a:solidFill>
-                          <a:latin typeface="Aptos" pitchFamily="34" charset="0"/>
-                          <a:ea typeface="Calibri" pitchFamily="34" charset="-122"/>
-                          <a:cs typeface="Calibri" pitchFamily="34" charset="-120"/>
-                        </a:rPr>
-                        <a:t>Alegação que NÃO sustentamos</a:t>
-                      </a:r>
-                      <a:endParaRPr lang="en-US" sz="950" dirty="0">
-                        <a:latin typeface="Calibri" charset="0"/>
-                        <a:ea typeface="Calibri" charset="0"/>
-                        <a:cs typeface="Calibri" charset="0"/>
-                      </a:endParaRPr>
-                    </a:p>
-                  </a:txBody>
-                  <a:tcPr marL="76200" marR="76200" marT="50800" marB="50800" anchor="ctr">
-                    <a:lnL w="9525" cap="flat" cmpd="sng" algn="ctr">
-                      <a:solidFill>
-                        <a:srgbClr val="D7E3F2"/>
-                      </a:solidFill>
-                      <a:prstDash val="solid"/>
-                      <a:round/>
-                      <a:headEnd type="none" w="med" len="med"/>
-                      <a:tailEnd type="none" w="med" len="med"/>
-                    </a:lnL>
-                    <a:lnR w="9525" cap="flat" cmpd="sng" algn="ctr">
-                      <a:solidFill>
-                        <a:srgbClr val="D7E3F2"/>
-                      </a:solidFill>
-                      <a:prstDash val="solid"/>
-                      <a:round/>
-                      <a:headEnd type="none" w="med" len="med"/>
-                      <a:tailEnd type="none" w="med" len="med"/>
-                    </a:lnR>
-                    <a:lnT w="9525" cap="flat" cmpd="sng" algn="ctr">
-                      <a:solidFill>
-                        <a:srgbClr val="D7E3F2"/>
-                      </a:solidFill>
-                      <a:prstDash val="solid"/>
-                      <a:round/>
-                      <a:headEnd type="none" w="med" len="med"/>
-                      <a:tailEnd type="none" w="med" len="med"/>
-                    </a:lnT>
-                    <a:lnB w="9525" cap="flat" cmpd="sng" algn="ctr">
-                      <a:solidFill>
-                        <a:srgbClr val="D7E3F2"/>
-                      </a:solidFill>
-                      <a:prstDash val="solid"/>
-                      <a:round/>
-                      <a:headEnd type="none" w="med" len="med"/>
-                      <a:tailEnd type="none" w="med" len="med"/>
-                    </a:lnB>
-                    <a:solidFill>
-                      <a:srgbClr val="1A2948"/>
-                    </a:solidFill>
-                  </a:tcPr>
-                </a:tc>
-                <a:extLst>
-                  <a:ext uri="{0D108BD9-81ED-4DB2-BD59-A6C34878D82A}">
-                    <a16:rowId xmlns:a16="http://schemas.microsoft.com/office/drawing/2014/main" val="10000"/>
-                  </a:ext>
-                </a:extLst>
-              </a:tr>
-              <a:tr h="365760">
-                <a:tc>
-                  <a:txBody>
-                    <a:bodyPr/>
-                    <a:lstStyle/>
-                    <a:p>
-                      <a:pPr marL="0" indent="0">
-                        <a:buNone/>
-                      </a:pPr>
-                      <a:r>
-                        <a:rPr lang="en-US" sz="850" dirty="0">
-                          <a:solidFill>
-                            <a:srgbClr val="2D3748"/>
-                          </a:solidFill>
-                          <a:latin typeface="Aptos" pitchFamily="34" charset="0"/>
-                          <a:ea typeface="Calibri" pitchFamily="34" charset="-122"/>
-                          <a:cs typeface="Calibri" pitchFamily="34" charset="-120"/>
-                        </a:rPr>
-                        <a:t>Dados publicados por competência mensal</a:t>
-                      </a:r>
-                      <a:endParaRPr lang="en-US" sz="850" dirty="0">
-                        <a:latin typeface="Calibri" charset="0"/>
-                        <a:ea typeface="Calibri" charset="0"/>
-                        <a:cs typeface="Calibri" charset="0"/>
-                      </a:endParaRPr>
-                    </a:p>
-                  </a:txBody>
-                  <a:tcPr marL="76200" marR="76200" marT="50800" marB="50800" anchor="ctr">
-                    <a:lnL w="9525" cap="flat" cmpd="sng" algn="ctr">
-                      <a:solidFill>
-                        <a:srgbClr val="D7E3F2"/>
-                      </a:solidFill>
-                      <a:prstDash val="solid"/>
-                      <a:round/>
-                      <a:headEnd type="none" w="med" len="med"/>
-                      <a:tailEnd type="none" w="med" len="med"/>
-                    </a:lnL>
-                    <a:lnR w="9525" cap="flat" cmpd="sng" algn="ctr">
-                      <a:solidFill>
-                        <a:srgbClr val="D7E3F2"/>
-                      </a:solidFill>
-                      <a:prstDash val="solid"/>
-                      <a:round/>
-                      <a:headEnd type="none" w="med" len="med"/>
-                      <a:tailEnd type="none" w="med" len="med"/>
-                    </a:lnR>
-                    <a:lnT w="9525" cap="flat" cmpd="sng" algn="ctr">
-                      <a:solidFill>
-                        <a:srgbClr val="D7E3F2"/>
-                      </a:solidFill>
-                      <a:prstDash val="solid"/>
-                      <a:round/>
-                      <a:headEnd type="none" w="med" len="med"/>
-                      <a:tailEnd type="none" w="med" len="med"/>
-                    </a:lnT>
-                    <a:lnB w="9525" cap="flat" cmpd="sng" algn="ctr">
-                      <a:solidFill>
-                        <a:srgbClr val="D7E3F2"/>
-                      </a:solidFill>
-                      <a:prstDash val="solid"/>
-                      <a:round/>
-                      <a:headEnd type="none" w="med" len="med"/>
-                      <a:tailEnd type="none" w="med" len="med"/>
-                    </a:lnB>
-                    <a:solidFill>
-                      <a:srgbClr val="FFFFFF"/>
-                    </a:solidFill>
-                  </a:tcPr>
-                </a:tc>
-                <a:tc>
-                  <a:txBody>
-                    <a:bodyPr/>
-                    <a:lstStyle/>
-                    <a:p>
-                      <a:pPr marL="0" indent="0">
-                        <a:buNone/>
-                      </a:pPr>
-                      <a:r>
-                        <a:rPr lang="en-US" sz="850" b="1" dirty="0">
-                          <a:solidFill>
-                            <a:srgbClr val="1A2948"/>
-                          </a:solidFill>
-                          <a:latin typeface="Aptos" pitchFamily="34" charset="0"/>
-                          <a:ea typeface="Calibri" pitchFamily="34" charset="-122"/>
-                          <a:cs typeface="Calibri" pitchFamily="34" charset="-120"/>
-                        </a:rPr>
-                        <a:t>Leitura mensal das competências disponíveis</a:t>
-                      </a:r>
-                      <a:endParaRPr lang="en-US" sz="850" dirty="0">
-                        <a:latin typeface="Calibri" charset="0"/>
-                        <a:ea typeface="Calibri" charset="0"/>
-                        <a:cs typeface="Calibri" charset="0"/>
-                      </a:endParaRPr>
-                    </a:p>
-                  </a:txBody>
-                  <a:tcPr marL="76200" marR="76200" marT="50800" marB="50800" anchor="ctr">
-                    <a:lnL w="9525" cap="flat" cmpd="sng" algn="ctr">
-                      <a:solidFill>
-                        <a:srgbClr val="D7E3F2"/>
-                      </a:solidFill>
-                      <a:prstDash val="solid"/>
-                      <a:round/>
-                      <a:headEnd type="none" w="med" len="med"/>
-                      <a:tailEnd type="none" w="med" len="med"/>
-                    </a:lnL>
-                    <a:lnR w="9525" cap="flat" cmpd="sng" algn="ctr">
-                      <a:solidFill>
-                        <a:srgbClr val="D7E3F2"/>
-                      </a:solidFill>
-                      <a:prstDash val="solid"/>
-                      <a:round/>
-                      <a:headEnd type="none" w="med" len="med"/>
-                      <a:tailEnd type="none" w="med" len="med"/>
-                    </a:lnR>
-                    <a:lnT w="9525" cap="flat" cmpd="sng" algn="ctr">
-                      <a:solidFill>
-                        <a:srgbClr val="D7E3F2"/>
-                      </a:solidFill>
-                      <a:prstDash val="solid"/>
-                      <a:round/>
-                      <a:headEnd type="none" w="med" len="med"/>
-                      <a:tailEnd type="none" w="med" len="med"/>
-                    </a:lnT>
-                    <a:lnB w="9525" cap="flat" cmpd="sng" algn="ctr">
-                      <a:solidFill>
-                        <a:srgbClr val="D7E3F2"/>
-                      </a:solidFill>
-                      <a:prstDash val="solid"/>
-                      <a:round/>
-                      <a:headEnd type="none" w="med" len="med"/>
-                      <a:tailEnd type="none" w="med" len="med"/>
-                    </a:lnB>
-                    <a:solidFill>
-                      <a:srgbClr val="FFFFFF"/>
-                    </a:solidFill>
-                  </a:tcPr>
-                </a:tc>
-                <a:tc>
-                  <a:txBody>
-                    <a:bodyPr/>
-                    <a:lstStyle/>
-                    <a:p>
-                      <a:pPr marL="0" indent="0">
-                        <a:buNone/>
-                      </a:pPr>
-                      <a:r>
-                        <a:rPr lang="en-US" sz="850" dirty="0">
-                          <a:solidFill>
-                            <a:srgbClr val="B5761B"/>
-                          </a:solidFill>
-                          <a:latin typeface="Aptos" pitchFamily="34" charset="0"/>
-                          <a:ea typeface="Calibri" pitchFamily="34" charset="-122"/>
-                          <a:cs typeface="Calibri" pitchFamily="34" charset="-120"/>
-                        </a:rPr>
-                        <a:t>Monitoramento em tempo real</a:t>
-                      </a:r>
-                      <a:endParaRPr lang="en-US" sz="850" dirty="0">
-                        <a:latin typeface="Calibri" charset="0"/>
-                        <a:ea typeface="Calibri" charset="0"/>
-                        <a:cs typeface="Calibri" charset="0"/>
-                      </a:endParaRPr>
-                    </a:p>
-                  </a:txBody>
-                  <a:tcPr marL="76200" marR="76200" marT="50800" marB="50800" anchor="ctr">
-                    <a:lnL w="9525" cap="flat" cmpd="sng" algn="ctr">
-                      <a:solidFill>
-                        <a:srgbClr val="D7E3F2"/>
-                      </a:solidFill>
-                      <a:prstDash val="solid"/>
-                      <a:round/>
-                      <a:headEnd type="none" w="med" len="med"/>
-                      <a:tailEnd type="none" w="med" len="med"/>
-                    </a:lnL>
-                    <a:lnR w="9525" cap="flat" cmpd="sng" algn="ctr">
-                      <a:solidFill>
-                        <a:srgbClr val="D7E3F2"/>
-                      </a:solidFill>
-                      <a:prstDash val="solid"/>
-                      <a:round/>
-                      <a:headEnd type="none" w="med" len="med"/>
-                      <a:tailEnd type="none" w="med" len="med"/>
-                    </a:lnR>
-                    <a:lnT w="9525" cap="flat" cmpd="sng" algn="ctr">
-                      <a:solidFill>
-                        <a:srgbClr val="D7E3F2"/>
-                      </a:solidFill>
-                      <a:prstDash val="solid"/>
-                      <a:round/>
-                      <a:headEnd type="none" w="med" len="med"/>
-                      <a:tailEnd type="none" w="med" len="med"/>
-                    </a:lnT>
-                    <a:lnB w="9525" cap="flat" cmpd="sng" algn="ctr">
-                      <a:solidFill>
-                        <a:srgbClr val="D7E3F2"/>
-                      </a:solidFill>
-                      <a:prstDash val="solid"/>
-                      <a:round/>
-                      <a:headEnd type="none" w="med" len="med"/>
-                      <a:tailEnd type="none" w="med" len="med"/>
-                    </a:lnB>
-                    <a:solidFill>
-                      <a:srgbClr val="FFFFFF"/>
-                    </a:solidFill>
-                  </a:tcPr>
-                </a:tc>
-                <a:extLst>
-                  <a:ext uri="{0D108BD9-81ED-4DB2-BD59-A6C34878D82A}">
-                    <a16:rowId xmlns:a16="http://schemas.microsoft.com/office/drawing/2014/main" val="10001"/>
-                  </a:ext>
-                </a:extLst>
-              </a:tr>
-              <a:tr h="365760">
-                <a:tc>
-                  <a:txBody>
-                    <a:bodyPr/>
-                    <a:lstStyle/>
-                    <a:p>
-                      <a:pPr marL="0" indent="0">
-                        <a:buNone/>
-                      </a:pPr>
-                      <a:r>
-                        <a:rPr lang="en-US" sz="850" dirty="0">
-                          <a:solidFill>
-                            <a:srgbClr val="2D3748"/>
-                          </a:solidFill>
-                          <a:latin typeface="Aptos" pitchFamily="34" charset="0"/>
-                          <a:ea typeface="Calibri" pitchFamily="34" charset="-122"/>
-                          <a:cs typeface="Calibri" pitchFamily="34" charset="-120"/>
-                        </a:rPr>
-                        <a:t>IPR compara com benchmark regional elegível</a:t>
-                      </a:r>
-                      <a:endParaRPr lang="en-US" sz="850" dirty="0">
-                        <a:latin typeface="Calibri" charset="0"/>
-                        <a:ea typeface="Calibri" charset="0"/>
-                        <a:cs typeface="Calibri" charset="0"/>
-                      </a:endParaRPr>
-                    </a:p>
-                  </a:txBody>
-                  <a:tcPr marL="76200" marR="76200" marT="50800" marB="50800" anchor="ctr">
-                    <a:lnL w="9525" cap="flat" cmpd="sng" algn="ctr">
-                      <a:solidFill>
-                        <a:srgbClr val="D7E3F2"/>
-                      </a:solidFill>
-                      <a:prstDash val="solid"/>
-                      <a:round/>
-                      <a:headEnd type="none" w="med" len="med"/>
-                      <a:tailEnd type="none" w="med" len="med"/>
-                    </a:lnL>
-                    <a:lnR w="9525" cap="flat" cmpd="sng" algn="ctr">
-                      <a:solidFill>
-                        <a:srgbClr val="D7E3F2"/>
-                      </a:solidFill>
-                      <a:prstDash val="solid"/>
-                      <a:round/>
-                      <a:headEnd type="none" w="med" len="med"/>
-                      <a:tailEnd type="none" w="med" len="med"/>
-                    </a:lnR>
-                    <a:lnT w="9525" cap="flat" cmpd="sng" algn="ctr">
-                      <a:solidFill>
-                        <a:srgbClr val="D7E3F2"/>
-                      </a:solidFill>
-                      <a:prstDash val="solid"/>
-                      <a:round/>
-                      <a:headEnd type="none" w="med" len="med"/>
-                      <a:tailEnd type="none" w="med" len="med"/>
-                    </a:lnT>
-                    <a:lnB w="9525" cap="flat" cmpd="sng" algn="ctr">
-                      <a:solidFill>
-                        <a:srgbClr val="D7E3F2"/>
-                      </a:solidFill>
-                      <a:prstDash val="solid"/>
-                      <a:round/>
-                      <a:headEnd type="none" w="med" len="med"/>
-                      <a:tailEnd type="none" w="med" len="med"/>
-                    </a:lnB>
-                    <a:solidFill>
-                      <a:srgbClr val="FFFFFF"/>
-                    </a:solidFill>
-                  </a:tcPr>
-                </a:tc>
-                <a:tc>
-                  <a:txBody>
-                    <a:bodyPr/>
-                    <a:lstStyle/>
-                    <a:p>
-                      <a:pPr marL="0" indent="0">
-                        <a:buNone/>
-                      </a:pPr>
-                      <a:r>
-                        <a:rPr lang="en-US" sz="850" b="1" dirty="0">
-                          <a:solidFill>
-                            <a:srgbClr val="1A2948"/>
-                          </a:solidFill>
-                          <a:latin typeface="Aptos" pitchFamily="34" charset="0"/>
-                          <a:ea typeface="Calibri" pitchFamily="34" charset="-122"/>
-                          <a:cs typeface="Calibri" pitchFamily="34" charset="-120"/>
-                        </a:rPr>
-                        <a:t>Sinal de permanência que exige amostra e contexto clínico</a:t>
-                      </a:r>
-                      <a:endParaRPr lang="en-US" sz="850" dirty="0">
-                        <a:latin typeface="Calibri" charset="0"/>
-                        <a:ea typeface="Calibri" charset="0"/>
-                        <a:cs typeface="Calibri" charset="0"/>
-                      </a:endParaRPr>
-                    </a:p>
-                  </a:txBody>
-                  <a:tcPr marL="76200" marR="76200" marT="50800" marB="50800" anchor="ctr">
-                    <a:lnL w="9525" cap="flat" cmpd="sng" algn="ctr">
-                      <a:solidFill>
-                        <a:srgbClr val="D7E3F2"/>
-                      </a:solidFill>
-                      <a:prstDash val="solid"/>
-                      <a:round/>
-                      <a:headEnd type="none" w="med" len="med"/>
-                      <a:tailEnd type="none" w="med" len="med"/>
-                    </a:lnL>
-                    <a:lnR w="9525" cap="flat" cmpd="sng" algn="ctr">
-                      <a:solidFill>
-                        <a:srgbClr val="D7E3F2"/>
-                      </a:solidFill>
-                      <a:prstDash val="solid"/>
-                      <a:round/>
-                      <a:headEnd type="none" w="med" len="med"/>
-                      <a:tailEnd type="none" w="med" len="med"/>
-                    </a:lnR>
-                    <a:lnT w="9525" cap="flat" cmpd="sng" algn="ctr">
-                      <a:solidFill>
-                        <a:srgbClr val="D7E3F2"/>
-                      </a:solidFill>
-                      <a:prstDash val="solid"/>
-                      <a:round/>
-                      <a:headEnd type="none" w="med" len="med"/>
-                      <a:tailEnd type="none" w="med" len="med"/>
-                    </a:lnT>
-                    <a:lnB w="9525" cap="flat" cmpd="sng" algn="ctr">
-                      <a:solidFill>
-                        <a:srgbClr val="D7E3F2"/>
-                      </a:solidFill>
-                      <a:prstDash val="solid"/>
-                      <a:round/>
-                      <a:headEnd type="none" w="med" len="med"/>
-                      <a:tailEnd type="none" w="med" len="med"/>
-                    </a:lnB>
-                    <a:solidFill>
-                      <a:srgbClr val="FFFFFF"/>
-                    </a:solidFill>
-                  </a:tcPr>
-                </a:tc>
-                <a:tc>
-                  <a:txBody>
-                    <a:bodyPr/>
-                    <a:lstStyle/>
-                    <a:p>
-                      <a:pPr marL="0" indent="0">
-                        <a:buNone/>
-                      </a:pPr>
-                      <a:r>
-                        <a:rPr lang="en-US" sz="850" dirty="0">
-                          <a:solidFill>
-                            <a:srgbClr val="B5761B"/>
-                          </a:solidFill>
-                          <a:latin typeface="Aptos" pitchFamily="34" charset="0"/>
-                          <a:ea typeface="Calibri" pitchFamily="34" charset="-122"/>
-                          <a:cs typeface="Calibri" pitchFamily="34" charset="-120"/>
-                        </a:rPr>
-                        <a:t>Prova de ineficiência hospitalar</a:t>
-                      </a:r>
-                      <a:endParaRPr lang="en-US" sz="850" dirty="0">
-                        <a:latin typeface="Calibri" charset="0"/>
-                        <a:ea typeface="Calibri" charset="0"/>
-                        <a:cs typeface="Calibri" charset="0"/>
-                      </a:endParaRPr>
-                    </a:p>
-                  </a:txBody>
-                  <a:tcPr marL="76200" marR="76200" marT="50800" marB="50800" anchor="ctr">
-                    <a:lnL w="9525" cap="flat" cmpd="sng" algn="ctr">
-                      <a:solidFill>
-                        <a:srgbClr val="D7E3F2"/>
-                      </a:solidFill>
-                      <a:prstDash val="solid"/>
-                      <a:round/>
-                      <a:headEnd type="none" w="med" len="med"/>
-                      <a:tailEnd type="none" w="med" len="med"/>
-                    </a:lnL>
-                    <a:lnR w="9525" cap="flat" cmpd="sng" algn="ctr">
-                      <a:solidFill>
-                        <a:srgbClr val="D7E3F2"/>
-                      </a:solidFill>
-                      <a:prstDash val="solid"/>
-                      <a:round/>
-                      <a:headEnd type="none" w="med" len="med"/>
-                      <a:tailEnd type="none" w="med" len="med"/>
-                    </a:lnR>
-                    <a:lnT w="9525" cap="flat" cmpd="sng" algn="ctr">
-                      <a:solidFill>
-                        <a:srgbClr val="D7E3F2"/>
-                      </a:solidFill>
-                      <a:prstDash val="solid"/>
-                      <a:round/>
-                      <a:headEnd type="none" w="med" len="med"/>
-                      <a:tailEnd type="none" w="med" len="med"/>
-                    </a:lnT>
-                    <a:lnB w="9525" cap="flat" cmpd="sng" algn="ctr">
-                      <a:solidFill>
-                        <a:srgbClr val="D7E3F2"/>
-                      </a:solidFill>
-                      <a:prstDash val="solid"/>
-                      <a:round/>
-                      <a:headEnd type="none" w="med" len="med"/>
-                      <a:tailEnd type="none" w="med" len="med"/>
-                    </a:lnB>
-                    <a:solidFill>
-                      <a:srgbClr val="FFFFFF"/>
-                    </a:solidFill>
-                  </a:tcPr>
-                </a:tc>
-                <a:extLst>
-                  <a:ext uri="{0D108BD9-81ED-4DB2-BD59-A6C34878D82A}">
-                    <a16:rowId xmlns:a16="http://schemas.microsoft.com/office/drawing/2014/main" val="10005"/>
-                  </a:ext>
-                </a:extLst>
-              </a:tr>
-              <a:tr h="365760">
-                <a:tc>
-                  <a:txBody>
-                    <a:bodyPr/>
-                    <a:lstStyle/>
-                    <a:p>
-                      <a:pPr marL="0" indent="0">
-                        <a:buNone/>
-                      </a:pPr>
-                      <a:r>
-                        <a:rPr lang="en-US" sz="850" dirty="0">
-                          <a:solidFill>
-                            <a:srgbClr val="2D3748"/>
-                          </a:solidFill>
-                          <a:latin typeface="Aptos" pitchFamily="34" charset="0"/>
-                          <a:ea typeface="Calibri" pitchFamily="34" charset="-122"/>
-                          <a:cs typeface="Calibri" pitchFamily="34" charset="-120"/>
-                        </a:rPr>
-                        <a:t>Fluxo é observado nos atendimentos em SP</a:t>
-                      </a:r>
-                      <a:endParaRPr lang="en-US" sz="850" dirty="0">
-                        <a:latin typeface="Calibri" charset="0"/>
-                        <a:ea typeface="Calibri" charset="0"/>
-                        <a:cs typeface="Calibri" charset="0"/>
-                      </a:endParaRPr>
-                    </a:p>
-                  </a:txBody>
-                  <a:tcPr marL="76200" marR="76200" marT="50800" marB="50800" anchor="ctr">
-                    <a:lnL w="9525" cap="flat" cmpd="sng" algn="ctr">
-                      <a:solidFill>
-                        <a:srgbClr val="D7E3F2"/>
-                      </a:solidFill>
-                      <a:prstDash val="solid"/>
-                      <a:round/>
-                      <a:headEnd type="none" w="med" len="med"/>
-                      <a:tailEnd type="none" w="med" len="med"/>
-                    </a:lnL>
-                    <a:lnR w="9525" cap="flat" cmpd="sng" algn="ctr">
-                      <a:solidFill>
-                        <a:srgbClr val="D7E3F2"/>
-                      </a:solidFill>
-                      <a:prstDash val="solid"/>
-                      <a:round/>
-                      <a:headEnd type="none" w="med" len="med"/>
-                      <a:tailEnd type="none" w="med" len="med"/>
-                    </a:lnR>
-                    <a:lnT w="9525" cap="flat" cmpd="sng" algn="ctr">
-                      <a:solidFill>
-                        <a:srgbClr val="D7E3F2"/>
-                      </a:solidFill>
-                      <a:prstDash val="solid"/>
-                      <a:round/>
-                      <a:headEnd type="none" w="med" len="med"/>
-                      <a:tailEnd type="none" w="med" len="med"/>
-                    </a:lnT>
-                    <a:lnB w="9525" cap="flat" cmpd="sng" algn="ctr">
-                      <a:solidFill>
-                        <a:srgbClr val="D7E3F2"/>
-                      </a:solidFill>
-                      <a:prstDash val="solid"/>
-                      <a:round/>
-                      <a:headEnd type="none" w="med" len="med"/>
-                      <a:tailEnd type="none" w="med" len="med"/>
-                    </a:lnB>
-                    <a:solidFill>
-                      <a:srgbClr val="F4F8FC"/>
-                    </a:solidFill>
-                  </a:tcPr>
-                </a:tc>
-                <a:tc>
-                  <a:txBody>
-                    <a:bodyPr/>
-                    <a:lstStyle/>
-                    <a:p>
-                      <a:pPr marL="0" indent="0">
-                        <a:buNone/>
-                      </a:pPr>
-                      <a:r>
-                        <a:rPr lang="en-US" sz="850" b="1" dirty="0">
-                          <a:solidFill>
-                            <a:srgbClr val="1A2948"/>
-                          </a:solidFill>
-                          <a:latin typeface="Aptos" pitchFamily="34" charset="0"/>
-                          <a:ea typeface="Calibri" pitchFamily="34" charset="-122"/>
-                          <a:cs typeface="Calibri" pitchFamily="34" charset="-120"/>
-                        </a:rPr>
-                        <a:t>Evasão intrastadual observada e atração assistencial</a:t>
-                      </a:r>
-                      <a:endParaRPr lang="en-US" sz="850" dirty="0">
-                        <a:latin typeface="Calibri" charset="0"/>
-                        <a:ea typeface="Calibri" charset="0"/>
-                        <a:cs typeface="Calibri" charset="0"/>
-                      </a:endParaRPr>
-                    </a:p>
-                  </a:txBody>
-                  <a:tcPr marL="76200" marR="76200" marT="50800" marB="50800" anchor="ctr">
-                    <a:lnL w="9525" cap="flat" cmpd="sng" algn="ctr">
-                      <a:solidFill>
-                        <a:srgbClr val="D7E3F2"/>
-                      </a:solidFill>
-                      <a:prstDash val="solid"/>
-                      <a:round/>
-                      <a:headEnd type="none" w="med" len="med"/>
-                      <a:tailEnd type="none" w="med" len="med"/>
-                    </a:lnL>
-                    <a:lnR w="9525" cap="flat" cmpd="sng" algn="ctr">
-                      <a:solidFill>
-                        <a:srgbClr val="D7E3F2"/>
-                      </a:solidFill>
-                      <a:prstDash val="solid"/>
-                      <a:round/>
-                      <a:headEnd type="none" w="med" len="med"/>
-                      <a:tailEnd type="none" w="med" len="med"/>
-                    </a:lnR>
-                    <a:lnT w="9525" cap="flat" cmpd="sng" algn="ctr">
-                      <a:solidFill>
-                        <a:srgbClr val="D7E3F2"/>
-                      </a:solidFill>
-                      <a:prstDash val="solid"/>
-                      <a:round/>
-                      <a:headEnd type="none" w="med" len="med"/>
-                      <a:tailEnd type="none" w="med" len="med"/>
-                    </a:lnT>
-                    <a:lnB w="9525" cap="flat" cmpd="sng" algn="ctr">
-                      <a:solidFill>
-                        <a:srgbClr val="D7E3F2"/>
-                      </a:solidFill>
-                      <a:prstDash val="solid"/>
-                      <a:round/>
-                      <a:headEnd type="none" w="med" len="med"/>
-                      <a:tailEnd type="none" w="med" len="med"/>
-                    </a:lnB>
-                    <a:solidFill>
-                      <a:srgbClr val="F4F8FC"/>
-                    </a:solidFill>
-                  </a:tcPr>
-                </a:tc>
-                <a:tc>
-                  <a:txBody>
-                    <a:bodyPr/>
-                    <a:lstStyle/>
-                    <a:p>
-                      <a:pPr marL="0" indent="0">
-                        <a:buNone/>
-                      </a:pPr>
-                      <a:r>
-                        <a:rPr lang="en-US" sz="850" dirty="0">
-                          <a:solidFill>
-                            <a:srgbClr val="B5761B"/>
-                          </a:solidFill>
-                          <a:latin typeface="Aptos" pitchFamily="34" charset="0"/>
-                          <a:ea typeface="Calibri" pitchFamily="34" charset="-122"/>
-                          <a:cs typeface="Calibri" pitchFamily="34" charset="-120"/>
-                        </a:rPr>
-                        <a:t>Evasão total, incluindo outras UFs</a:t>
-                      </a:r>
-                      <a:endParaRPr lang="en-US" sz="850" dirty="0">
-                        <a:latin typeface="Calibri" charset="0"/>
-                        <a:ea typeface="Calibri" charset="0"/>
-                        <a:cs typeface="Calibri" charset="0"/>
-                      </a:endParaRPr>
-                    </a:p>
-                  </a:txBody>
-                  <a:tcPr marL="76200" marR="76200" marT="50800" marB="50800" anchor="ctr">
-                    <a:lnL w="9525" cap="flat" cmpd="sng" algn="ctr">
-                      <a:solidFill>
-                        <a:srgbClr val="D7E3F2"/>
-                      </a:solidFill>
-                      <a:prstDash val="solid"/>
-                      <a:round/>
-                      <a:headEnd type="none" w="med" len="med"/>
-                      <a:tailEnd type="none" w="med" len="med"/>
-                    </a:lnL>
-                    <a:lnR w="9525" cap="flat" cmpd="sng" algn="ctr">
-                      <a:solidFill>
-                        <a:srgbClr val="D7E3F2"/>
-                      </a:solidFill>
-                      <a:prstDash val="solid"/>
-                      <a:round/>
-                      <a:headEnd type="none" w="med" len="med"/>
-                      <a:tailEnd type="none" w="med" len="med"/>
-                    </a:lnR>
-                    <a:lnT w="9525" cap="flat" cmpd="sng" algn="ctr">
-                      <a:solidFill>
-                        <a:srgbClr val="D7E3F2"/>
-                      </a:solidFill>
-                      <a:prstDash val="solid"/>
-                      <a:round/>
-                      <a:headEnd type="none" w="med" len="med"/>
-                      <a:tailEnd type="none" w="med" len="med"/>
-                    </a:lnT>
-                    <a:lnB w="9525" cap="flat" cmpd="sng" algn="ctr">
-                      <a:solidFill>
-                        <a:srgbClr val="D7E3F2"/>
-                      </a:solidFill>
-                      <a:prstDash val="solid"/>
-                      <a:round/>
-                      <a:headEnd type="none" w="med" len="med"/>
-                      <a:tailEnd type="none" w="med" len="med"/>
-                    </a:lnB>
-                    <a:solidFill>
-                      <a:srgbClr val="F4F8FC"/>
-                    </a:solidFill>
-                  </a:tcPr>
-                </a:tc>
-                <a:extLst>
-                  <a:ext uri="{0D108BD9-81ED-4DB2-BD59-A6C34878D82A}">
-                    <a16:rowId xmlns:a16="http://schemas.microsoft.com/office/drawing/2014/main" val="10006"/>
-                  </a:ext>
-                </a:extLst>
-              </a:tr>
-              <a:tr h="365760">
-                <a:tc>
-                  <a:txBody>
-                    <a:bodyPr/>
-                    <a:lstStyle/>
-                    <a:p>
-                      <a:pPr marL="0" indent="0">
-                        <a:buNone/>
-                      </a:pPr>
-                      <a:r>
-                        <a:rPr lang="en-US" sz="850" dirty="0">
-                          <a:solidFill>
-                            <a:srgbClr val="2D3748"/>
-                          </a:solidFill>
-                          <a:latin typeface="Aptos" pitchFamily="34" charset="0"/>
-                          <a:ea typeface="Calibri" pitchFamily="34" charset="-122"/>
-                          <a:cs typeface="Calibri" pitchFamily="34" charset="-120"/>
-                        </a:rPr>
-                        <a:t>ICSAP segue lista oficial por CID</a:t>
-                      </a:r>
-                      <a:endParaRPr lang="en-US" sz="850" dirty="0">
-                        <a:latin typeface="Calibri" charset="0"/>
-                        <a:ea typeface="Calibri" charset="0"/>
-                        <a:cs typeface="Calibri" charset="0"/>
-                      </a:endParaRPr>
-                    </a:p>
-                  </a:txBody>
-                  <a:tcPr marL="76200" marR="76200" marT="50800" marB="50800" anchor="ctr">
-                    <a:lnL w="9525" cap="flat" cmpd="sng" algn="ctr">
-                      <a:solidFill>
-                        <a:srgbClr val="D7E3F2"/>
-                      </a:solidFill>
-                      <a:prstDash val="solid"/>
-                      <a:round/>
-                      <a:headEnd type="none" w="med" len="med"/>
-                      <a:tailEnd type="none" w="med" len="med"/>
-                    </a:lnL>
-                    <a:lnR w="9525" cap="flat" cmpd="sng" algn="ctr">
-                      <a:solidFill>
-                        <a:srgbClr val="D7E3F2"/>
-                      </a:solidFill>
-                      <a:prstDash val="solid"/>
-                      <a:round/>
-                      <a:headEnd type="none" w="med" len="med"/>
-                      <a:tailEnd type="none" w="med" len="med"/>
-                    </a:lnR>
-                    <a:lnT w="9525" cap="flat" cmpd="sng" algn="ctr">
-                      <a:solidFill>
-                        <a:srgbClr val="D7E3F2"/>
-                      </a:solidFill>
-                      <a:prstDash val="solid"/>
-                      <a:round/>
-                      <a:headEnd type="none" w="med" len="med"/>
-                      <a:tailEnd type="none" w="med" len="med"/>
-                    </a:lnT>
-                    <a:lnB w="9525" cap="flat" cmpd="sng" algn="ctr">
-                      <a:solidFill>
-                        <a:srgbClr val="D7E3F2"/>
-                      </a:solidFill>
-                      <a:prstDash val="solid"/>
-                      <a:round/>
-                      <a:headEnd type="none" w="med" len="med"/>
-                      <a:tailEnd type="none" w="med" len="med"/>
-                    </a:lnB>
-                    <a:solidFill>
-                      <a:srgbClr val="FFFFFF"/>
-                    </a:solidFill>
-                  </a:tcPr>
-                </a:tc>
-                <a:tc>
-                  <a:txBody>
-                    <a:bodyPr/>
-                    <a:lstStyle/>
-                    <a:p>
-                      <a:pPr marL="0" indent="0">
-                        <a:buNone/>
-                      </a:pPr>
-                      <a:r>
-                        <a:rPr lang="en-US" sz="850" b="1" dirty="0">
-                          <a:solidFill>
-                            <a:srgbClr val="1A2948"/>
-                          </a:solidFill>
-                          <a:latin typeface="Aptos" pitchFamily="34" charset="0"/>
-                          <a:ea typeface="Calibri" pitchFamily="34" charset="-122"/>
-                          <a:cs typeface="Calibri" pitchFamily="34" charset="-120"/>
-                        </a:rPr>
-                        <a:t>Sinal populacional indireto sobre atenção primária</a:t>
-                      </a:r>
-                      <a:endParaRPr lang="en-US" sz="850" dirty="0">
-                        <a:latin typeface="Calibri" charset="0"/>
-                        <a:ea typeface="Calibri" charset="0"/>
-                        <a:cs typeface="Calibri" charset="0"/>
-                      </a:endParaRPr>
-                    </a:p>
-                  </a:txBody>
-                  <a:tcPr marL="76200" marR="76200" marT="50800" marB="50800" anchor="ctr">
-                    <a:lnL w="9525" cap="flat" cmpd="sng" algn="ctr">
-                      <a:solidFill>
-                        <a:srgbClr val="D7E3F2"/>
-                      </a:solidFill>
-                      <a:prstDash val="solid"/>
-                      <a:round/>
-                      <a:headEnd type="none" w="med" len="med"/>
-                      <a:tailEnd type="none" w="med" len="med"/>
-                    </a:lnL>
-                    <a:lnR w="9525" cap="flat" cmpd="sng" algn="ctr">
-                      <a:solidFill>
-                        <a:srgbClr val="D7E3F2"/>
-                      </a:solidFill>
-                      <a:prstDash val="solid"/>
-                      <a:round/>
-                      <a:headEnd type="none" w="med" len="med"/>
-                      <a:tailEnd type="none" w="med" len="med"/>
-                    </a:lnR>
-                    <a:lnT w="9525" cap="flat" cmpd="sng" algn="ctr">
-                      <a:solidFill>
-                        <a:srgbClr val="D7E3F2"/>
-                      </a:solidFill>
-                      <a:prstDash val="solid"/>
-                      <a:round/>
-                      <a:headEnd type="none" w="med" len="med"/>
-                      <a:tailEnd type="none" w="med" len="med"/>
-                    </a:lnT>
-                    <a:lnB w="9525" cap="flat" cmpd="sng" algn="ctr">
-                      <a:solidFill>
-                        <a:srgbClr val="D7E3F2"/>
-                      </a:solidFill>
-                      <a:prstDash val="solid"/>
-                      <a:round/>
-                      <a:headEnd type="none" w="med" len="med"/>
-                      <a:tailEnd type="none" w="med" len="med"/>
-                    </a:lnB>
-                    <a:solidFill>
-                      <a:srgbClr val="FFFFFF"/>
-                    </a:solidFill>
-                  </a:tcPr>
-                </a:tc>
-                <a:tc>
-                  <a:txBody>
-                    <a:bodyPr/>
-                    <a:lstStyle/>
-                    <a:p>
-                      <a:pPr marL="0" indent="0">
-                        <a:buNone/>
-                      </a:pPr>
-                      <a:r>
-                        <a:rPr lang="en-US" sz="850" dirty="0">
-                          <a:solidFill>
-                            <a:srgbClr val="B5761B"/>
-                          </a:solidFill>
-                          <a:latin typeface="Aptos" pitchFamily="34" charset="0"/>
-                          <a:ea typeface="Calibri" pitchFamily="34" charset="-122"/>
-                          <a:cs typeface="Calibri" pitchFamily="34" charset="-120"/>
-                        </a:rPr>
-                        <a:t>Internação individual comprovadamente evitável</a:t>
-                      </a:r>
-                      <a:endParaRPr lang="en-US" sz="850" dirty="0">
-                        <a:latin typeface="Calibri" charset="0"/>
-                        <a:ea typeface="Calibri" charset="0"/>
-                        <a:cs typeface="Calibri" charset="0"/>
-                      </a:endParaRPr>
-                    </a:p>
-                  </a:txBody>
-                  <a:tcPr marL="76200" marR="76200" marT="50800" marB="50800" anchor="ctr">
-                    <a:lnL w="9525" cap="flat" cmpd="sng" algn="ctr">
-                      <a:solidFill>
-                        <a:srgbClr val="D7E3F2"/>
-                      </a:solidFill>
-                      <a:prstDash val="solid"/>
-                      <a:round/>
-                      <a:headEnd type="none" w="med" len="med"/>
-                      <a:tailEnd type="none" w="med" len="med"/>
-                    </a:lnL>
-                    <a:lnR w="9525" cap="flat" cmpd="sng" algn="ctr">
-                      <a:solidFill>
-                        <a:srgbClr val="D7E3F2"/>
-                      </a:solidFill>
-                      <a:prstDash val="solid"/>
-                      <a:round/>
-                      <a:headEnd type="none" w="med" len="med"/>
-                      <a:tailEnd type="none" w="med" len="med"/>
-                    </a:lnR>
-                    <a:lnT w="9525" cap="flat" cmpd="sng" algn="ctr">
-                      <a:solidFill>
-                        <a:srgbClr val="D7E3F2"/>
-                      </a:solidFill>
-                      <a:prstDash val="solid"/>
-                      <a:round/>
-                      <a:headEnd type="none" w="med" len="med"/>
-                      <a:tailEnd type="none" w="med" len="med"/>
-                    </a:lnT>
-                    <a:lnB w="9525" cap="flat" cmpd="sng" algn="ctr">
-                      <a:solidFill>
-                        <a:srgbClr val="D7E3F2"/>
-                      </a:solidFill>
-                      <a:prstDash val="solid"/>
-                      <a:round/>
-                      <a:headEnd type="none" w="med" len="med"/>
-                      <a:tailEnd type="none" w="med" len="med"/>
-                    </a:lnB>
-                    <a:solidFill>
-                      <a:srgbClr val="FFFFFF"/>
-                    </a:solidFill>
-                  </a:tcPr>
-                </a:tc>
-                <a:extLst>
-                  <a:ext uri="{0D108BD9-81ED-4DB2-BD59-A6C34878D82A}">
-                    <a16:rowId xmlns:a16="http://schemas.microsoft.com/office/drawing/2014/main" val="10007"/>
-                  </a:ext>
-                </a:extLst>
-              </a:tr>
-              <a:tr h="365760">
-                <a:tc>
-                  <a:txBody>
-                    <a:bodyPr/>
-                    <a:lstStyle/>
-                    <a:p>
-                      <a:pPr marL="0" indent="0">
-                        <a:buNone/>
-                      </a:pPr>
-                      <a:r>
-                        <a:rPr lang="en-US" sz="850" dirty="0">
-                          <a:solidFill>
-                            <a:srgbClr val="2D3748"/>
-                          </a:solidFill>
-                          <a:latin typeface="Aptos" pitchFamily="34" charset="0"/>
-                          <a:ea typeface="Calibri" pitchFamily="34" charset="-122"/>
-                          <a:cs typeface="Calibri" pitchFamily="34" charset="-120"/>
-                        </a:rPr>
-                        <a:t>O MVP foi validado tecnicamente</a:t>
-                      </a:r>
-                      <a:endParaRPr lang="en-US" sz="850" dirty="0">
-                        <a:latin typeface="Calibri" charset="0"/>
-                        <a:ea typeface="Calibri" charset="0"/>
-                        <a:cs typeface="Calibri" charset="0"/>
-                      </a:endParaRPr>
-                    </a:p>
-                  </a:txBody>
-                  <a:tcPr marL="76200" marR="76200" marT="50800" marB="50800" anchor="ctr">
-                    <a:lnL w="9525" cap="flat" cmpd="sng" algn="ctr">
-                      <a:solidFill>
-                        <a:srgbClr val="D7E3F2"/>
-                      </a:solidFill>
-                      <a:prstDash val="solid"/>
-                      <a:round/>
-                      <a:headEnd type="none" w="med" len="med"/>
-                      <a:tailEnd type="none" w="med" len="med"/>
-                    </a:lnL>
-                    <a:lnR w="9525" cap="flat" cmpd="sng" algn="ctr">
-                      <a:solidFill>
-                        <a:srgbClr val="D7E3F2"/>
-                      </a:solidFill>
-                      <a:prstDash val="solid"/>
-                      <a:round/>
-                      <a:headEnd type="none" w="med" len="med"/>
-                      <a:tailEnd type="none" w="med" len="med"/>
-                    </a:lnR>
-                    <a:lnT w="9525" cap="flat" cmpd="sng" algn="ctr">
-                      <a:solidFill>
-                        <a:srgbClr val="D7E3F2"/>
-                      </a:solidFill>
-                      <a:prstDash val="solid"/>
-                      <a:round/>
-                      <a:headEnd type="none" w="med" len="med"/>
-                      <a:tailEnd type="none" w="med" len="med"/>
-                    </a:lnT>
-                    <a:lnB w="9525" cap="flat" cmpd="sng" algn="ctr">
-                      <a:solidFill>
-                        <a:srgbClr val="D7E3F2"/>
-                      </a:solidFill>
-                      <a:prstDash val="solid"/>
-                      <a:round/>
-                      <a:headEnd type="none" w="med" len="med"/>
-                      <a:tailEnd type="none" w="med" len="med"/>
-                    </a:lnB>
-                    <a:solidFill>
-                      <a:srgbClr val="FFFFFF"/>
-                    </a:solidFill>
-                  </a:tcPr>
-                </a:tc>
-                <a:tc>
-                  <a:txBody>
-                    <a:bodyPr/>
-                    <a:lstStyle/>
-                    <a:p>
-                      <a:pPr marL="0" indent="0">
-                        <a:buNone/>
-                      </a:pPr>
-                      <a:r>
-                        <a:rPr lang="en-US" sz="850" b="1" dirty="0">
-                          <a:solidFill>
-                            <a:srgbClr val="1A2948"/>
-                          </a:solidFill>
-                          <a:latin typeface="Aptos" pitchFamily="34" charset="0"/>
-                          <a:ea typeface="Calibri" pitchFamily="34" charset="-122"/>
-                          <a:cs typeface="Calibri" pitchFamily="34" charset="-120"/>
-                        </a:rPr>
-                        <a:t>Viabilidade e coerência técnica no recorte vigente</a:t>
-                      </a:r>
-                      <a:endParaRPr lang="en-US" sz="850" dirty="0">
-                        <a:latin typeface="Calibri" charset="0"/>
-                        <a:ea typeface="Calibri" charset="0"/>
-                        <a:cs typeface="Calibri" charset="0"/>
-                      </a:endParaRPr>
-                    </a:p>
-                  </a:txBody>
-                  <a:tcPr marL="76200" marR="76200" marT="50800" marB="50800" anchor="ctr">
-                    <a:lnL w="9525" cap="flat" cmpd="sng" algn="ctr">
-                      <a:solidFill>
-                        <a:srgbClr val="D7E3F2"/>
-                      </a:solidFill>
-                      <a:prstDash val="solid"/>
-                      <a:round/>
-                      <a:headEnd type="none" w="med" len="med"/>
-                      <a:tailEnd type="none" w="med" len="med"/>
-                    </a:lnL>
-                    <a:lnR w="9525" cap="flat" cmpd="sng" algn="ctr">
-                      <a:solidFill>
-                        <a:srgbClr val="D7E3F2"/>
-                      </a:solidFill>
-                      <a:prstDash val="solid"/>
-                      <a:round/>
-                      <a:headEnd type="none" w="med" len="med"/>
-                      <a:tailEnd type="none" w="med" len="med"/>
-                    </a:lnR>
-                    <a:lnT w="9525" cap="flat" cmpd="sng" algn="ctr">
-                      <a:solidFill>
-                        <a:srgbClr val="D7E3F2"/>
-                      </a:solidFill>
-                      <a:prstDash val="solid"/>
-                      <a:round/>
-                      <a:headEnd type="none" w="med" len="med"/>
-                      <a:tailEnd type="none" w="med" len="med"/>
-                    </a:lnT>
-                    <a:lnB w="9525" cap="flat" cmpd="sng" algn="ctr">
-                      <a:solidFill>
-                        <a:srgbClr val="D7E3F2"/>
-                      </a:solidFill>
-                      <a:prstDash val="solid"/>
-                      <a:round/>
-                      <a:headEnd type="none" w="med" len="med"/>
-                      <a:tailEnd type="none" w="med" len="med"/>
-                    </a:lnB>
-                    <a:solidFill>
-                      <a:srgbClr val="FFFFFF"/>
-                    </a:solidFill>
-                  </a:tcPr>
-                </a:tc>
-                <a:tc>
-                  <a:txBody>
-                    <a:bodyPr/>
-                    <a:lstStyle/>
-                    <a:p>
-                      <a:pPr marL="0" indent="0">
-                        <a:buNone/>
-                      </a:pPr>
-                      <a:r>
-                        <a:rPr lang="en-US" sz="850" dirty="0">
-                          <a:solidFill>
-                            <a:srgbClr val="B5761B"/>
-                          </a:solidFill>
-                          <a:latin typeface="Aptos" pitchFamily="34" charset="0"/>
-                          <a:ea typeface="Calibri" pitchFamily="34" charset="-122"/>
-                          <a:cs typeface="Calibri" pitchFamily="34" charset="-120"/>
-                        </a:rPr>
-                        <a:t>Produto validado por gestores ou impacto comprovado</a:t>
-                      </a:r>
-                      <a:endParaRPr lang="en-US" sz="850" dirty="0">
-                        <a:latin typeface="Calibri" charset="0"/>
-                        <a:ea typeface="Calibri" charset="0"/>
-                        <a:cs typeface="Calibri" charset="0"/>
-                      </a:endParaRPr>
-                    </a:p>
-                  </a:txBody>
-                  <a:tcPr marL="76200" marR="76200" marT="50800" marB="50800" anchor="ctr">
-                    <a:lnL w="9525" cap="flat" cmpd="sng" algn="ctr">
-                      <a:solidFill>
-                        <a:srgbClr val="D7E3F2"/>
-                      </a:solidFill>
-                      <a:prstDash val="solid"/>
-                      <a:round/>
-                      <a:headEnd type="none" w="med" len="med"/>
-                      <a:tailEnd type="none" w="med" len="med"/>
-                    </a:lnL>
-                    <a:lnR w="9525" cap="flat" cmpd="sng" algn="ctr">
-                      <a:solidFill>
-                        <a:srgbClr val="D7E3F2"/>
-                      </a:solidFill>
-                      <a:prstDash val="solid"/>
-                      <a:round/>
-                      <a:headEnd type="none" w="med" len="med"/>
-                      <a:tailEnd type="none" w="med" len="med"/>
-                    </a:lnR>
-                    <a:lnT w="9525" cap="flat" cmpd="sng" algn="ctr">
-                      <a:solidFill>
-                        <a:srgbClr val="D7E3F2"/>
-                      </a:solidFill>
-                      <a:prstDash val="solid"/>
-                      <a:round/>
-                      <a:headEnd type="none" w="med" len="med"/>
-                      <a:tailEnd type="none" w="med" len="med"/>
-                    </a:lnT>
-                    <a:lnB w="9525" cap="flat" cmpd="sng" algn="ctr">
-                      <a:solidFill>
-                        <a:srgbClr val="D7E3F2"/>
-                      </a:solidFill>
-                      <a:prstDash val="solid"/>
-                      <a:round/>
-                      <a:headEnd type="none" w="med" len="med"/>
-                      <a:tailEnd type="none" w="med" len="med"/>
-                    </a:lnB>
-                    <a:solidFill>
-                      <a:srgbClr val="FFFFFF"/>
-                    </a:solidFill>
-                  </a:tcPr>
-                </a:tc>
-                <a:extLst>
-                  <a:ext uri="{0D108BD9-81ED-4DB2-BD59-A6C34878D82A}">
-                    <a16:rowId xmlns:a16="http://schemas.microsoft.com/office/drawing/2014/main" val="10009"/>
-                  </a:ext>
-                </a:extLst>
-              </a:tr>
-            </a:tbl>
-          </a:graphicData>
-        </a:graphic>
-      </p:graphicFrame>
-      <p:sp>
-        <p:nvSpPr>
-          <p:cNvPr id="9" name="Text 6"/>
-          <p:cNvSpPr/>
-          <p:nvPr/>
-        </p:nvSpPr>
-        <p:spPr>
-          <a:xfrm>
-            <a:off x="548640" y="6419088"/>
-            <a:ext cx="10454335" cy="256032"/>
+              <a:t>MedFlow  ·  Painel Inteligente de Acesso Hospitalar e Perfil de Atendimento  ·  Ômega Urban Tech  ·  Enterprise Challenge FIAP × Oracle 2026</a:t>
+            </a:r>
+            <a:endParaRPr lang="en-US" sz="750" dirty="0"/>
+          </a:p>
+        </p:txBody>
+      </p:sp>
+      <p:sp>
+        <p:nvSpPr>
+          <p:cNvPr id="53" name="Text 45"/>
+          <p:cNvSpPr/>
+          <p:nvPr/>
+        </p:nvSpPr>
+        <p:spPr>
+          <a:xfrm>
+            <a:off x="11094415" y="6419088"/>
+            <a:ext cx="548640" cy="256032"/>
           </a:xfrm>
           <a:prstGeom prst="rect">
             <a:avLst/>
@@ -23295,57 +21566,18 @@
           <a:bodyPr wrap="square" lIns="0" tIns="0" rIns="0" bIns="0" rtlCol="0" anchor="ctr"/>
           <a:lstStyle/>
           <a:p>
-            <a:pPr marL="0" indent="0">
+            <a:pPr marL="0" indent="0" algn="r">
               <a:buNone/>
             </a:pPr>
             <a:r>
-              <a:rPr lang="en-US" sz="750" dirty="0">
-                <a:solidFill>
-                  <a:srgbClr val="9DB0C8"/>
+              <a:rPr lang="en-US" sz="850" b="1" dirty="0">
+                <a:solidFill>
+                  <a:srgbClr val="2B6CB0"/>
                 </a:solidFill>
                 <a:latin typeface="Aptos" pitchFamily="34" charset="0"/>
                 <a:ea typeface="Calibri" pitchFamily="34" charset="-122"/>
                 <a:cs typeface="Calibri" pitchFamily="34" charset="-120"/>
               </a:rPr>
-              <a:t>MedFlow  ·  Painel Inteligente de Acesso Hospitalar e Perfil de Atendimento  ·  Ômega Urban Tech  ·  Enterprise Challenge FIAP × Oracle 2026</a:t>
-            </a:r>
-            <a:endParaRPr lang="en-US" sz="750" dirty="0"/>
-          </a:p>
-        </p:txBody>
-      </p:sp>
-      <p:sp>
-        <p:nvSpPr>
-          <p:cNvPr id="10" name="Text 7"/>
-          <p:cNvSpPr/>
-          <p:nvPr/>
-        </p:nvSpPr>
-        <p:spPr>
-          <a:xfrm>
-            <a:off x="11094415" y="6419088"/>
-            <a:ext cx="548640" cy="256032"/>
-          </a:xfrm>
-          <a:prstGeom prst="rect">
-            <a:avLst/>
-          </a:prstGeom>
-          <a:noFill/>
-          <a:ln/>
-        </p:spPr>
-        <p:txBody>
-          <a:bodyPr wrap="square" lIns="0" tIns="0" rIns="0" bIns="0" rtlCol="0" anchor="ctr"/>
-          <a:lstStyle/>
-          <a:p>
-            <a:pPr marL="0" indent="0" algn="r">
-              <a:buNone/>
-            </a:pPr>
-            <a:r>
-              <a:rPr lang="en-US" sz="850" b="1" dirty="0">
-                <a:solidFill>
-                  <a:srgbClr val="2B6CB0"/>
-                </a:solidFill>
-                <a:latin typeface="Aptos" pitchFamily="34" charset="0"/>
-                <a:ea typeface="Calibri" pitchFamily="34" charset="-122"/>
-                <a:cs typeface="Calibri" pitchFamily="34" charset="-120"/>
-              </a:rPr>
               <a:t>20</a:t>
             </a:r>
             <a:endParaRPr lang="en-US" sz="850" dirty="0"/>
@@ -23354,23 +21586,64 @@
       </p:sp>
       <p:sp>
         <p:nvSpPr>
-          <p:cNvPr id="29" name="Rectangle 28"/>
-          <p:cNvSpPr/>
-          <p:nvPr/>
-        </p:nvSpPr>
-        <p:spPr>
-          <a:xfrm>
-            <a:off x="548640" y="5065776"/>
-            <a:ext cx="11091672" cy="7315"/>
+          <p:cNvPr id="54" name="TextBox 53"/>
+          <p:cNvSpPr txBox="1"/>
+          <p:nvPr/>
+        </p:nvSpPr>
+        <p:spPr>
+          <a:xfrm>
+            <a:off x="548640" y="1316736"/>
+            <a:ext cx="11091672" cy="365760"/>
+          </a:xfrm>
+          <a:prstGeom prst="rect">
+            <a:avLst/>
+          </a:prstGeom>
+          <a:noFill/>
+        </p:spPr>
+        <p:txBody>
+          <a:bodyPr wrap="square" anchor="t" lIns="0" rIns="0" tIns="0" bIns="0">
+            <a:spAutoFit/>
+          </a:bodyPr>
+          <a:lstStyle/>
+          <a:p>
+            <a:pPr algn="l">
+              <a:lnSpc>
+                <a:spcPct val="100000"/>
+              </a:lnSpc>
+            </a:pPr>
+            <a:r>
+              <a:rPr sz="1100" b="0">
+                <a:solidFill>
+                  <a:srgbClr val="2D3748"/>
+                </a:solidFill>
+                <a:latin typeface="Aptos"/>
+              </a:rPr>
+              <a:t>O MVP está validado tecnicamente. O que vem a seguir é o que falta para falar em utilidade, adoção e impacto — e é também o caminho honesto até a previsão.</a:t>
+            </a:r>
+          </a:p>
+        </p:txBody>
+      </p:sp>
+      <p:sp>
+        <p:nvSpPr>
+          <p:cNvPr id="55" name="Rectangle 54"/>
+          <p:cNvSpPr/>
+          <p:nvPr/>
+        </p:nvSpPr>
+        <p:spPr>
+          <a:xfrm>
+            <a:off x="548640" y="1874519"/>
+            <a:ext cx="3566160" cy="1417320"/>
           </a:xfrm>
           <a:prstGeom prst="rect">
             <a:avLst/>
           </a:prstGeom>
           <a:solidFill>
-            <a:srgbClr val="D9E2EC"/>
+            <a:srgbClr val="FFFFFF"/>
           </a:solidFill>
-          <a:ln>
-            <a:noFill/>
+          <a:ln w="9525">
+            <a:solidFill>
+              <a:srgbClr val="D9E2EC"/>
+            </a:solidFill>
           </a:ln>
         </p:spPr>
         <p:style>
@@ -23397,14 +21670,14 @@
       </p:sp>
       <p:sp>
         <p:nvSpPr>
-          <p:cNvPr id="30" name="TextBox 29"/>
+          <p:cNvPr id="56" name="TextBox 55"/>
           <p:cNvSpPr txBox="1"/>
           <p:nvPr/>
         </p:nvSpPr>
         <p:spPr>
           <a:xfrm>
-            <a:off x="548640" y="5212080"/>
-            <a:ext cx="3840480" cy="182880"/>
+            <a:off x="786384" y="2066543"/>
+            <a:ext cx="384048" cy="219456"/>
           </a:xfrm>
           <a:prstGeom prst="rect">
             <a:avLst/>
@@ -23423,27 +21696,27 @@
               </a:lnSpc>
             </a:pPr>
             <a:r>
-              <a:rPr sz="900" b="1">
+              <a:rPr sz="1000" b="1">
                 <a:solidFill>
                   <a:srgbClr val="37AB94"/>
                 </a:solidFill>
                 <a:latin typeface="Aptos"/>
               </a:rPr>
-              <a:t>O LIMITE DE CADA INDICADOR ESTÁ NO CATÁLOGO</a:t>
-            </a:r>
-          </a:p>
-        </p:txBody>
-      </p:sp>
-      <p:sp>
-        <p:nvSpPr>
-          <p:cNvPr id="31" name="TextBox 30"/>
+              <a:t>01</a:t>
+            </a:r>
+          </a:p>
+        </p:txBody>
+      </p:sp>
+      <p:sp>
+        <p:nvSpPr>
+          <p:cNvPr id="57" name="TextBox 56"/>
           <p:cNvSpPr txBox="1"/>
           <p:nvPr/>
         </p:nvSpPr>
         <p:spPr>
           <a:xfrm>
-            <a:off x="548640" y="5449824"/>
-            <a:ext cx="5486400" cy="548640"/>
+            <a:off x="1280160" y="2048256"/>
+            <a:ext cx="2651760" cy="256032"/>
           </a:xfrm>
           <a:prstGeom prst="rect">
             <a:avLst/>
@@ -23452,325 +21725,6 @@
         </p:spPr>
         <p:txBody>
           <a:bodyPr wrap="square" anchor="t" lIns="0" rIns="0" tIns="0" bIns="0">
-            <a:spAutoFit/>
-          </a:bodyPr>
-          <a:lstStyle/>
-          <a:p>
-            <a:pPr algn="l">
-              <a:lnSpc>
-                <a:spcPct val="115000"/>
-              </a:lnSpc>
-            </a:pPr>
-            <a:r>
-              <a:rPr sz="900" b="0">
-                <a:solidFill>
-                  <a:srgbClr val="718096"/>
-                </a:solidFill>
-                <a:latin typeface="Aptos"/>
-              </a:rPr>
-              <a:t>IPH, TMH, CMI e IS trazem o próprio limite ao lado da fórmula, no slide anterior. Aqui ficam as leituras que nenhum indicador isolado desautoriza.</a:t>
-            </a:r>
-          </a:p>
-        </p:txBody>
-      </p:sp>
-      <p:sp>
-        <p:nvSpPr>
-          <p:cNvPr id="32" name="TextBox 31"/>
-          <p:cNvSpPr txBox="1"/>
-          <p:nvPr/>
-        </p:nvSpPr>
-        <p:spPr>
-          <a:xfrm>
-            <a:off x="6355080" y="5212080"/>
-            <a:ext cx="5285232" cy="822960"/>
-          </a:xfrm>
-          <a:prstGeom prst="rect">
-            <a:avLst/>
-          </a:prstGeom>
-          <a:noFill/>
-        </p:spPr>
-        <p:txBody>
-          <a:bodyPr wrap="square" anchor="t" lIns="0" rIns="0" tIns="0" bIns="0">
-            <a:spAutoFit/>
-          </a:bodyPr>
-          <a:lstStyle/>
-          <a:p>
-            <a:pPr algn="l">
-              <a:lnSpc>
-                <a:spcPct val="115000"/>
-              </a:lnSpc>
-            </a:pPr>
-            <a:r>
-              <a:rPr sz="900" b="0">
-                <a:solidFill>
-                  <a:srgbClr val="2D3748"/>
-                </a:solidFill>
-                <a:latin typeface="Aptos"/>
-              </a:rPr>
-              <a:t>O projeto não realizou entrevistas, observação de campo, teste de usabilidade ou piloto com usuários reais. Utilidade, adoção e impacto seguem como fronteira de evidência futura, declarada no slide de próximos passos.</a:t>
-            </a:r>
-          </a:p>
-        </p:txBody>
-      </p:sp>
-    </p:spTree>
-  </p:cSld>
-  <p:clrMapOvr>
-    <a:masterClrMapping/>
-  </p:clrMapOvr>
-</p:sld>
-</file>
-
-<file path=ppt/slides/slide21.xml><?xml version="1.0" encoding="utf-8"?>
-<p:sld xmlns:a="http://schemas.openxmlformats.org/drawingml/2006/main" xmlns:r="http://schemas.openxmlformats.org/officeDocument/2006/relationships" xmlns:p="http://schemas.openxmlformats.org/presentationml/2006/main">
-  <p:cSld name="Slide 28">
-    <p:spTree>
-      <p:nvGrpSpPr>
-        <p:cNvPr id="1" name=""/>
-        <p:cNvGrpSpPr/>
-        <p:nvPr/>
-      </p:nvGrpSpPr>
-      <p:grpSpPr>
-        <a:xfrm>
-          <a:off x="0" y="0"/>
-          <a:ext cx="0" cy="0"/>
-          <a:chOff x="0" y="0"/>
-          <a:chExt cx="0" cy="0"/>
-        </a:xfrm>
-      </p:grpSpPr>
-      <p:sp>
-        <p:nvSpPr>
-          <p:cNvPr id="2" name="Shape 0"/>
-          <p:cNvSpPr/>
-          <p:nvPr/>
-        </p:nvSpPr>
-        <p:spPr>
-          <a:xfrm>
-            <a:off x="0" y="0"/>
-            <a:ext cx="12191695" cy="1024128"/>
-          </a:xfrm>
-          <a:prstGeom prst="rect">
-            <a:avLst/>
-          </a:prstGeom>
-          <a:solidFill>
-            <a:srgbClr val="1A2948"/>
-          </a:solidFill>
-          <a:ln w="12700">
-            <a:solidFill>
-              <a:srgbClr val="1A2948"/>
-            </a:solidFill>
-            <a:prstDash val="solid"/>
-          </a:ln>
-        </p:spPr>
-        <p:txBody>
-          <a:bodyPr/>
-          <a:lstStyle/>
-          <a:p>
-            <a:endParaRPr/>
-          </a:p>
-        </p:txBody>
-      </p:sp>
-      <p:sp>
-        <p:nvSpPr>
-          <p:cNvPr id="3" name="Text 1"/>
-          <p:cNvSpPr/>
-          <p:nvPr/>
-        </p:nvSpPr>
-        <p:spPr>
-          <a:xfrm>
-            <a:off x="548640" y="128016"/>
-            <a:ext cx="8716975" cy="237744"/>
-          </a:xfrm>
-          <a:prstGeom prst="rect">
-            <a:avLst/>
-          </a:prstGeom>
-          <a:noFill/>
-          <a:ln/>
-        </p:spPr>
-        <p:txBody>
-          <a:bodyPr wrap="square" lIns="0" tIns="0" rIns="0" bIns="0" rtlCol="0" anchor="ctr"/>
-          <a:lstStyle/>
-          <a:p>
-            <a:pPr marL="0" indent="0">
-              <a:buNone/>
-            </a:pPr>
-            <a:endParaRPr lang="en-US" sz="950" dirty="0"/>
-          </a:p>
-        </p:txBody>
-      </p:sp>
-      <p:sp>
-        <p:nvSpPr>
-          <p:cNvPr id="4" name="Text 2"/>
-          <p:cNvSpPr/>
-          <p:nvPr/>
-        </p:nvSpPr>
-        <p:spPr>
-          <a:xfrm>
-            <a:off x="548640" y="320040"/>
-            <a:ext cx="8716975" cy="530352"/>
-          </a:xfrm>
-          <a:prstGeom prst="rect">
-            <a:avLst/>
-          </a:prstGeom>
-          <a:noFill/>
-          <a:ln/>
-        </p:spPr>
-        <p:txBody>
-          <a:bodyPr wrap="square" lIns="0" tIns="0" rIns="0" bIns="0" rtlCol="0" anchor="t"/>
-          <a:lstStyle/>
-          <a:p>
-            <a:pPr marL="0" indent="0">
-              <a:buNone/>
-            </a:pPr>
-            <a:r>
-              <a:rPr lang="en-US" sz="2200" b="1">
-                <a:solidFill>
-                  <a:srgbClr val="FFFFFF"/>
-                </a:solidFill>
-                <a:latin typeface="Aptos" pitchFamily="34" charset="0"/>
-                <a:ea typeface="Calibri" pitchFamily="34" charset="-122"/>
-                <a:cs typeface="Calibri" pitchFamily="34" charset="-120"/>
-              </a:rPr>
-              <a:t>Resultados</a:t>
-            </a:r>
-            <a:endParaRPr lang="en-US" sz="2200" dirty="0"/>
-          </a:p>
-        </p:txBody>
-      </p:sp>
-      <p:sp>
-        <p:nvSpPr>
-          <p:cNvPr id="5" name="Text 3"/>
-          <p:cNvSpPr/>
-          <p:nvPr/>
-        </p:nvSpPr>
-        <p:spPr>
-          <a:xfrm>
-            <a:off x="9357055" y="402336"/>
-            <a:ext cx="2286000" cy="292608"/>
-          </a:xfrm>
-          <a:prstGeom prst="rect">
-            <a:avLst/>
-          </a:prstGeom>
-          <a:noFill/>
-          <a:ln/>
-        </p:spPr>
-        <p:txBody>
-          <a:bodyPr wrap="square" lIns="0" tIns="0" rIns="0" bIns="0" rtlCol="0" anchor="ctr"/>
-          <a:lstStyle/>
-          <a:p>
-            <a:pPr marL="0" indent="0" algn="r">
-              <a:buNone/>
-            </a:pPr>
-            <a:r>
-              <a:rPr lang="en-US" sz="1000" dirty="0">
-                <a:solidFill>
-                  <a:srgbClr val="9DB0C8"/>
-                </a:solidFill>
-                <a:latin typeface="Aptos" pitchFamily="34" charset="0"/>
-                <a:ea typeface="Calibri" pitchFamily="34" charset="-122"/>
-                <a:cs typeface="Calibri" pitchFamily="34" charset="-120"/>
-              </a:rPr>
-              <a:t>Sprint 2</a:t>
-            </a:r>
-            <a:endParaRPr lang="en-US" sz="1000" dirty="0"/>
-          </a:p>
-        </p:txBody>
-      </p:sp>
-      <p:sp>
-        <p:nvSpPr>
-          <p:cNvPr id="52" name="Text 44"/>
-          <p:cNvSpPr/>
-          <p:nvPr/>
-        </p:nvSpPr>
-        <p:spPr>
-          <a:xfrm>
-            <a:off x="548640" y="6419088"/>
-            <a:ext cx="10454335" cy="256032"/>
-          </a:xfrm>
-          <a:prstGeom prst="rect">
-            <a:avLst/>
-          </a:prstGeom>
-          <a:noFill/>
-          <a:ln/>
-        </p:spPr>
-        <p:txBody>
-          <a:bodyPr wrap="square" lIns="0" tIns="0" rIns="0" bIns="0" rtlCol="0" anchor="ctr"/>
-          <a:lstStyle/>
-          <a:p>
-            <a:pPr marL="0" indent="0">
-              <a:buNone/>
-            </a:pPr>
-            <a:r>
-              <a:rPr lang="en-US" sz="750" dirty="0">
-                <a:solidFill>
-                  <a:srgbClr val="9DB0C8"/>
-                </a:solidFill>
-                <a:latin typeface="Aptos" pitchFamily="34" charset="0"/>
-                <a:ea typeface="Calibri" pitchFamily="34" charset="-122"/>
-                <a:cs typeface="Calibri" pitchFamily="34" charset="-120"/>
-              </a:rPr>
-              <a:t>MedFlow  ·  Painel Inteligente de Acesso Hospitalar e Perfil de Atendimento  ·  Ômega Urban Tech  ·  Enterprise Challenge FIAP × Oracle 2026</a:t>
-            </a:r>
-            <a:endParaRPr lang="en-US" sz="750" dirty="0"/>
-          </a:p>
-        </p:txBody>
-      </p:sp>
-      <p:sp>
-        <p:nvSpPr>
-          <p:cNvPr id="53" name="Text 45"/>
-          <p:cNvSpPr/>
-          <p:nvPr/>
-        </p:nvSpPr>
-        <p:spPr>
-          <a:xfrm>
-            <a:off x="11094415" y="6419088"/>
-            <a:ext cx="548640" cy="256032"/>
-          </a:xfrm>
-          <a:prstGeom prst="rect">
-            <a:avLst/>
-          </a:prstGeom>
-          <a:noFill/>
-          <a:ln/>
-        </p:spPr>
-        <p:txBody>
-          <a:bodyPr wrap="square" lIns="0" tIns="0" rIns="0" bIns="0" rtlCol="0" anchor="ctr"/>
-          <a:lstStyle/>
-          <a:p>
-            <a:pPr marL="0" indent="0" algn="r">
-              <a:buNone/>
-            </a:pPr>
-            <a:r>
-              <a:rPr lang="en-US" sz="850" b="1" dirty="0">
-                <a:solidFill>
-                  <a:srgbClr val="2B6CB0"/>
-                </a:solidFill>
-                <a:latin typeface="Aptos" pitchFamily="34" charset="0"/>
-                <a:ea typeface="Calibri" pitchFamily="34" charset="-122"/>
-                <a:cs typeface="Calibri" pitchFamily="34" charset="-120"/>
-              </a:rPr>
-              <a:t>21</a:t>
-            </a:r>
-            <a:endParaRPr lang="en-US" sz="850" dirty="0"/>
-          </a:p>
-        </p:txBody>
-      </p:sp>
-      <p:sp>
-        <p:nvSpPr>
-          <p:cNvPr id="54" name="TextBox 53"/>
-          <p:cNvSpPr txBox="1"/>
-          <p:nvPr/>
-        </p:nvSpPr>
-        <p:spPr>
-          <a:xfrm>
-            <a:off x="548640" y="1307592"/>
-            <a:ext cx="11091672" cy="347472"/>
-          </a:xfrm>
-          <a:prstGeom prst="rect">
-            <a:avLst/>
-          </a:prstGeom>
-          <a:noFill/>
-        </p:spPr>
-        <p:txBody>
-          <a:bodyPr wrap="square" lIns="0" tIns="0" rIns="0" bIns="0" anchor="t">
             <a:spAutoFit/>
           </a:bodyPr>
           <a:lstStyle/>
@@ -23781,270 +21735,77 @@
               </a:lnSpc>
             </a:pPr>
             <a:r>
-              <a:rPr sz="1450" b="1">
+              <a:rPr sz="1150" b="1">
                 <a:solidFill>
                   <a:srgbClr val="1A2948"/>
                 </a:solidFill>
                 <a:latin typeface="Aptos"/>
               </a:rPr>
-              <a:t>O MVP saiu da arquitetura e virou uma investigação pública, navegável e auditável.</a:t>
-            </a:r>
-          </a:p>
-        </p:txBody>
-      </p:sp>
-      <p:sp>
-        <p:nvSpPr>
-          <p:cNvPr id="55" name="TextBox 54"/>
+              <a:t>Validação com usuários</a:t>
+            </a:r>
+          </a:p>
+        </p:txBody>
+      </p:sp>
+      <p:sp>
+        <p:nvSpPr>
+          <p:cNvPr id="58" name="TextBox 57"/>
           <p:cNvSpPr txBox="1"/>
           <p:nvPr/>
         </p:nvSpPr>
         <p:spPr>
           <a:xfrm>
-            <a:off x="548640" y="1847088"/>
-            <a:ext cx="2176272" cy="201168"/>
-          </a:xfrm>
-          <a:prstGeom prst="rect">
-            <a:avLst/>
-          </a:prstGeom>
-          <a:noFill/>
-        </p:spPr>
-        <p:txBody>
-          <a:bodyPr wrap="square" lIns="0" tIns="0" rIns="0" bIns="0" anchor="t">
+            <a:off x="786384" y="2487168"/>
+            <a:ext cx="3090672" cy="960120"/>
+          </a:xfrm>
+          <a:prstGeom prst="rect">
+            <a:avLst/>
+          </a:prstGeom>
+          <a:noFill/>
+        </p:spPr>
+        <p:txBody>
+          <a:bodyPr wrap="square" anchor="t" lIns="0" rIns="0" tIns="0" bIns="0">
             <a:spAutoFit/>
           </a:bodyPr>
           <a:lstStyle/>
           <a:p>
             <a:pPr algn="l">
               <a:lnSpc>
-                <a:spcPct val="100000"/>
+                <a:spcPct val="120000"/>
               </a:lnSpc>
             </a:pPr>
             <a:r>
-              <a:rPr sz="850" b="1">
-                <a:solidFill>
-                  <a:srgbClr val="718096"/>
+              <a:rPr sz="900" b="0">
+                <a:solidFill>
+                  <a:srgbClr val="2D3748"/>
                 </a:solidFill>
                 <a:latin typeface="Aptos"/>
               </a:rPr>
-              <a:t>COMO ERA</a:t>
-            </a:r>
-          </a:p>
-        </p:txBody>
-      </p:sp>
-      <p:sp>
-        <p:nvSpPr>
-          <p:cNvPr id="56" name="TextBox 55"/>
-          <p:cNvSpPr txBox="1"/>
-          <p:nvPr/>
-        </p:nvSpPr>
-        <p:spPr>
-          <a:xfrm>
-            <a:off x="2971800" y="1847088"/>
-            <a:ext cx="2523744" cy="201168"/>
-          </a:xfrm>
-          <a:prstGeom prst="rect">
-            <a:avLst/>
-          </a:prstGeom>
-          <a:noFill/>
-        </p:spPr>
-        <p:txBody>
-          <a:bodyPr wrap="square" lIns="0" tIns="0" rIns="0" bIns="0" anchor="t">
-            <a:spAutoFit/>
-          </a:bodyPr>
-          <a:lstStyle/>
-          <a:p>
-            <a:pPr algn="l">
-              <a:lnSpc>
-                <a:spcPct val="100000"/>
-              </a:lnSpc>
-            </a:pPr>
-            <a:r>
-              <a:rPr sz="850" b="1">
-                <a:solidFill>
-                  <a:srgbClr val="37AB94"/>
-                </a:solidFill>
-                <a:latin typeface="Aptos"/>
-              </a:rPr>
-              <a:t>COMO FICOU</a:t>
-            </a:r>
-          </a:p>
-        </p:txBody>
-      </p:sp>
-      <p:sp>
-        <p:nvSpPr>
-          <p:cNvPr id="57" name="TextBox 56"/>
-          <p:cNvSpPr txBox="1"/>
-          <p:nvPr/>
-        </p:nvSpPr>
-        <p:spPr>
-          <a:xfrm>
-            <a:off x="548640" y="2258568"/>
-            <a:ext cx="347472" cy="201168"/>
-          </a:xfrm>
-          <a:prstGeom prst="rect">
-            <a:avLst/>
-          </a:prstGeom>
-          <a:noFill/>
-        </p:spPr>
-        <p:txBody>
-          <a:bodyPr wrap="square" lIns="0" tIns="0" rIns="0" bIns="0" anchor="t">
-            <a:spAutoFit/>
-          </a:bodyPr>
-          <a:lstStyle/>
-          <a:p>
-            <a:pPr algn="l">
-              <a:lnSpc>
-                <a:spcPct val="100000"/>
-              </a:lnSpc>
-            </a:pPr>
-            <a:r>
-              <a:rPr sz="850" b="1">
-                <a:solidFill>
-                  <a:srgbClr val="718096"/>
-                </a:solidFill>
-                <a:latin typeface="Aptos"/>
-              </a:rPr>
-              <a:t>01</a:t>
-            </a:r>
-          </a:p>
-        </p:txBody>
-      </p:sp>
-      <p:sp>
-        <p:nvSpPr>
-          <p:cNvPr id="58" name="TextBox 57"/>
-          <p:cNvSpPr txBox="1"/>
-          <p:nvPr/>
-        </p:nvSpPr>
-        <p:spPr>
-          <a:xfrm>
-            <a:off x="987552" y="2231136"/>
-            <a:ext cx="1783080" cy="256032"/>
-          </a:xfrm>
-          <a:prstGeom prst="rect">
-            <a:avLst/>
-          </a:prstGeom>
-          <a:noFill/>
-        </p:spPr>
-        <p:txBody>
-          <a:bodyPr wrap="square" lIns="0" tIns="0" rIns="0" bIns="0" anchor="t">
-            <a:spAutoFit/>
-          </a:bodyPr>
-          <a:lstStyle/>
-          <a:p>
-            <a:pPr algn="l">
-              <a:lnSpc>
-                <a:spcPct val="100000"/>
-              </a:lnSpc>
-            </a:pPr>
-            <a:r>
-              <a:rPr sz="1050" b="1">
-                <a:solidFill>
-                  <a:srgbClr val="1A2948"/>
-                </a:solidFill>
-                <a:latin typeface="Aptos"/>
-              </a:rPr>
-              <a:t>Novo cruzamento</a:t>
-            </a:r>
-          </a:p>
-        </p:txBody>
-      </p:sp>
-      <p:sp>
-        <p:nvSpPr>
-          <p:cNvPr id="59" name="TextBox 58"/>
-          <p:cNvSpPr txBox="1"/>
-          <p:nvPr/>
-        </p:nvSpPr>
-        <p:spPr>
-          <a:xfrm>
-            <a:off x="2587752" y="2231136"/>
-            <a:ext cx="274320" cy="256032"/>
-          </a:xfrm>
-          <a:prstGeom prst="rect">
-            <a:avLst/>
-          </a:prstGeom>
-          <a:noFill/>
-        </p:spPr>
-        <p:txBody>
-          <a:bodyPr wrap="square" lIns="0" tIns="0" rIns="0" bIns="0" anchor="t">
-            <a:spAutoFit/>
-          </a:bodyPr>
-          <a:lstStyle/>
-          <a:p>
-            <a:pPr algn="ctr">
-              <a:lnSpc>
-                <a:spcPct val="100000"/>
-              </a:lnSpc>
-            </a:pPr>
-            <a:r>
-              <a:rPr sz="1100" b="1">
-                <a:solidFill>
-                  <a:srgbClr val="37AB94"/>
-                </a:solidFill>
-                <a:latin typeface="Aptos"/>
-              </a:rPr>
-              <a:t>→</a:t>
-            </a:r>
-          </a:p>
-        </p:txBody>
-      </p:sp>
-      <p:sp>
-        <p:nvSpPr>
-          <p:cNvPr id="60" name="TextBox 59"/>
-          <p:cNvSpPr txBox="1"/>
-          <p:nvPr/>
-        </p:nvSpPr>
-        <p:spPr>
-          <a:xfrm>
-            <a:off x="2971800" y="2231136"/>
-            <a:ext cx="2606040" cy="438912"/>
-          </a:xfrm>
-          <a:prstGeom prst="rect">
-            <a:avLst/>
-          </a:prstGeom>
-          <a:noFill/>
-        </p:spPr>
-        <p:txBody>
-          <a:bodyPr wrap="square" lIns="0" tIns="0" rIns="0" bIns="0" anchor="t">
-            <a:spAutoFit/>
-          </a:bodyPr>
-          <a:lstStyle/>
-          <a:p>
-            <a:pPr algn="l">
-              <a:lnSpc>
-                <a:spcPct val="100000"/>
-              </a:lnSpc>
-            </a:pPr>
-            <a:r>
-              <a:rPr sz="1019" b="1">
-                <a:solidFill>
-                  <a:srgbClr val="2D3748"/>
-                </a:solidFill>
-                <a:latin typeface="Aptos"/>
-              </a:rPr>
-              <a:t>Jornada região → hospital → especialidade</a:t>
-            </a:r>
-          </a:p>
-        </p:txBody>
-      </p:sp>
-      <p:sp>
-        <p:nvSpPr>
-          <p:cNvPr id="61" name="Rectangle 60"/>
-          <p:cNvSpPr/>
-          <p:nvPr/>
-        </p:nvSpPr>
-        <p:spPr>
-          <a:xfrm>
-            <a:off x="987552" y="2761488"/>
-            <a:ext cx="4599432" cy="7315"/>
+              <a:t>Levar o produto a gestores regionais e medir compreensão, utilidade e tempo até a hipótese. É a evidência que hoje falta para falar em adoção.</a:t>
+            </a:r>
+          </a:p>
+        </p:txBody>
+      </p:sp>
+      <p:sp>
+        <p:nvSpPr>
+          <p:cNvPr id="59" name="Rectangle 58"/>
+          <p:cNvSpPr/>
+          <p:nvPr/>
+        </p:nvSpPr>
+        <p:spPr>
+          <a:xfrm>
+            <a:off x="4315968" y="1874519"/>
+            <a:ext cx="3566160" cy="1417320"/>
           </a:xfrm>
           <a:prstGeom prst="rect">
             <a:avLst/>
           </a:prstGeom>
           <a:solidFill>
-            <a:srgbClr val="D9E2EC"/>
+            <a:srgbClr val="FFFFFF"/>
           </a:solidFill>
-          <a:ln>
-            <a:noFill/>
+          <a:ln w="9525">
+            <a:solidFill>
+              <a:srgbClr val="D9E2EC"/>
+            </a:solidFill>
           </a:ln>
         </p:spPr>
         <p:style>
@@ -24066,28 +21827,27 @@
           <a:lstStyle/>
           <a:p>
             <a:pPr algn="ctr"/>
-            <a:endParaRPr/>
-          </a:p>
-        </p:txBody>
-      </p:sp>
-      <p:sp>
-        <p:nvSpPr>
-          <p:cNvPr id="62" name="TextBox 61"/>
+          </a:p>
+        </p:txBody>
+      </p:sp>
+      <p:sp>
+        <p:nvSpPr>
+          <p:cNvPr id="60" name="TextBox 59"/>
           <p:cNvSpPr txBox="1"/>
           <p:nvPr/>
         </p:nvSpPr>
         <p:spPr>
           <a:xfrm>
-            <a:off x="548640" y="2953512"/>
-            <a:ext cx="347472" cy="201168"/>
-          </a:xfrm>
-          <a:prstGeom prst="rect">
-            <a:avLst/>
-          </a:prstGeom>
-          <a:noFill/>
-        </p:spPr>
-        <p:txBody>
-          <a:bodyPr wrap="square" lIns="0" tIns="0" rIns="0" bIns="0" anchor="t">
+            <a:off x="4553712" y="2066543"/>
+            <a:ext cx="384048" cy="219456"/>
+          </a:xfrm>
+          <a:prstGeom prst="rect">
+            <a:avLst/>
+          </a:prstGeom>
+          <a:noFill/>
+        </p:spPr>
+        <p:txBody>
+          <a:bodyPr wrap="square" anchor="t" lIns="0" rIns="0" tIns="0" bIns="0">
             <a:spAutoFit/>
           </a:bodyPr>
           <a:lstStyle/>
@@ -24098,9 +21858,9 @@
               </a:lnSpc>
             </a:pPr>
             <a:r>
-              <a:rPr sz="850" b="1">
-                <a:solidFill>
-                  <a:srgbClr val="718096"/>
+              <a:rPr sz="1000" b="1">
+                <a:solidFill>
+                  <a:srgbClr val="37AB94"/>
                 </a:solidFill>
                 <a:latin typeface="Aptos"/>
               </a:rPr>
@@ -24111,22 +21871,22 @@
       </p:sp>
       <p:sp>
         <p:nvSpPr>
-          <p:cNvPr id="63" name="TextBox 62"/>
+          <p:cNvPr id="61" name="TextBox 60"/>
           <p:cNvSpPr txBox="1"/>
           <p:nvPr/>
         </p:nvSpPr>
         <p:spPr>
           <a:xfrm>
-            <a:off x="987552" y="2926080"/>
-            <a:ext cx="1783080" cy="256032"/>
-          </a:xfrm>
-          <a:prstGeom prst="rect">
-            <a:avLst/>
-          </a:prstGeom>
-          <a:noFill/>
-        </p:spPr>
-        <p:txBody>
-          <a:bodyPr wrap="square" lIns="0" tIns="0" rIns="0" bIns="0" anchor="t">
+            <a:off x="5047488" y="2048256"/>
+            <a:ext cx="2651760" cy="256032"/>
+          </a:xfrm>
+          <a:prstGeom prst="rect">
+            <a:avLst/>
+          </a:prstGeom>
+          <a:noFill/>
+        </p:spPr>
+        <p:txBody>
+          <a:bodyPr wrap="square" anchor="t" lIns="0" rIns="0" tIns="0" bIns="0">
             <a:spAutoFit/>
           </a:bodyPr>
           <a:lstStyle/>
@@ -24137,114 +21897,77 @@
               </a:lnSpc>
             </a:pPr>
             <a:r>
-              <a:rPr sz="1050" b="1">
+              <a:rPr sz="1150" b="1">
                 <a:solidFill>
                   <a:srgbClr val="1A2948"/>
                 </a:solidFill>
                 <a:latin typeface="Aptos"/>
               </a:rPr>
-              <a:t>Número isolado</a:t>
-            </a:r>
-          </a:p>
-        </p:txBody>
-      </p:sp>
-      <p:sp>
-        <p:nvSpPr>
-          <p:cNvPr id="64" name="TextBox 63"/>
+              <a:t>Série mais longa</a:t>
+            </a:r>
+          </a:p>
+        </p:txBody>
+      </p:sp>
+      <p:sp>
+        <p:nvSpPr>
+          <p:cNvPr id="62" name="TextBox 61"/>
           <p:cNvSpPr txBox="1"/>
           <p:nvPr/>
         </p:nvSpPr>
         <p:spPr>
           <a:xfrm>
-            <a:off x="2587752" y="2926080"/>
-            <a:ext cx="274320" cy="256032"/>
-          </a:xfrm>
-          <a:prstGeom prst="rect">
-            <a:avLst/>
-          </a:prstGeom>
-          <a:noFill/>
-        </p:spPr>
-        <p:txBody>
-          <a:bodyPr wrap="square" lIns="0" tIns="0" rIns="0" bIns="0" anchor="t">
+            <a:off x="4553712" y="2487168"/>
+            <a:ext cx="3090672" cy="960120"/>
+          </a:xfrm>
+          <a:prstGeom prst="rect">
+            <a:avLst/>
+          </a:prstGeom>
+          <a:noFill/>
+        </p:spPr>
+        <p:txBody>
+          <a:bodyPr wrap="square" anchor="t" lIns="0" rIns="0" tIns="0" bIns="0">
             <a:spAutoFit/>
           </a:bodyPr>
           <a:lstStyle/>
           <a:p>
-            <a:pPr algn="ctr">
-              <a:lnSpc>
-                <a:spcPct val="100000"/>
-              </a:lnSpc>
-            </a:pPr>
-            <a:r>
-              <a:rPr sz="1100" b="1">
-                <a:solidFill>
-                  <a:srgbClr val="37AB94"/>
-                </a:solidFill>
-                <a:latin typeface="Aptos"/>
-              </a:rPr>
-              <a:t>→</a:t>
-            </a:r>
-          </a:p>
-        </p:txBody>
-      </p:sp>
-      <p:sp>
-        <p:nvSpPr>
-          <p:cNvPr id="65" name="TextBox 64"/>
-          <p:cNvSpPr txBox="1"/>
-          <p:nvPr/>
-        </p:nvSpPr>
-        <p:spPr>
-          <a:xfrm>
-            <a:off x="2971800" y="2926080"/>
-            <a:ext cx="2606040" cy="438912"/>
-          </a:xfrm>
-          <a:prstGeom prst="rect">
-            <a:avLst/>
-          </a:prstGeom>
-          <a:noFill/>
-        </p:spPr>
-        <p:txBody>
-          <a:bodyPr wrap="square" lIns="0" tIns="0" rIns="0" bIns="0" anchor="t">
-            <a:spAutoFit/>
-          </a:bodyPr>
-          <a:lstStyle/>
-          <a:p>
             <a:pPr algn="l">
               <a:lnSpc>
-                <a:spcPct val="100000"/>
+                <a:spcPct val="120000"/>
               </a:lnSpc>
             </a:pPr>
             <a:r>
-              <a:rPr sz="1019" b="1">
+              <a:rPr sz="900" b="0">
                 <a:solidFill>
                   <a:srgbClr val="2D3748"/>
                 </a:solidFill>
                 <a:latin typeface="Aptos"/>
               </a:rPr>
-              <a:t>Histórico, referência e amostra à vista</a:t>
-            </a:r>
-          </a:p>
-        </p:txBody>
-      </p:sp>
-      <p:sp>
-        <p:nvSpPr>
-          <p:cNvPr id="66" name="Rectangle 65"/>
-          <p:cNvSpPr/>
-          <p:nvPr/>
-        </p:nvSpPr>
-        <p:spPr>
-          <a:xfrm>
-            <a:off x="987552" y="3456432"/>
-            <a:ext cx="4599432" cy="7315"/>
+              <a:t>Estender o recorte além das 30 competências e acompanhar a reapresentação retroativa das AIHs, que altera números já publicados.</a:t>
+            </a:r>
+          </a:p>
+        </p:txBody>
+      </p:sp>
+      <p:sp>
+        <p:nvSpPr>
+          <p:cNvPr id="63" name="Rectangle 62"/>
+          <p:cNvSpPr/>
+          <p:nvPr/>
+        </p:nvSpPr>
+        <p:spPr>
+          <a:xfrm>
+            <a:off x="8083296" y="1874519"/>
+            <a:ext cx="3566160" cy="1417320"/>
           </a:xfrm>
           <a:prstGeom prst="rect">
             <a:avLst/>
           </a:prstGeom>
           <a:solidFill>
-            <a:srgbClr val="D9E2EC"/>
+            <a:srgbClr val="FFFFFF"/>
           </a:solidFill>
-          <a:ln>
-            <a:noFill/>
+          <a:ln w="9525">
+            <a:solidFill>
+              <a:srgbClr val="D9E2EC"/>
+            </a:solidFill>
           </a:ln>
         </p:spPr>
         <p:style>
@@ -24266,28 +21989,27 @@
           <a:lstStyle/>
           <a:p>
             <a:pPr algn="ctr"/>
-            <a:endParaRPr/>
-          </a:p>
-        </p:txBody>
-      </p:sp>
-      <p:sp>
-        <p:nvSpPr>
-          <p:cNvPr id="67" name="TextBox 66"/>
+          </a:p>
+        </p:txBody>
+      </p:sp>
+      <p:sp>
+        <p:nvSpPr>
+          <p:cNvPr id="64" name="TextBox 63"/>
           <p:cNvSpPr txBox="1"/>
           <p:nvPr/>
         </p:nvSpPr>
         <p:spPr>
           <a:xfrm>
-            <a:off x="548640" y="3648456"/>
-            <a:ext cx="347472" cy="201168"/>
-          </a:xfrm>
-          <a:prstGeom prst="rect">
-            <a:avLst/>
-          </a:prstGeom>
-          <a:noFill/>
-        </p:spPr>
-        <p:txBody>
-          <a:bodyPr wrap="square" lIns="0" tIns="0" rIns="0" bIns="0" anchor="t">
+            <a:off x="8321040" y="2066543"/>
+            <a:ext cx="384048" cy="219456"/>
+          </a:xfrm>
+          <a:prstGeom prst="rect">
+            <a:avLst/>
+          </a:prstGeom>
+          <a:noFill/>
+        </p:spPr>
+        <p:txBody>
+          <a:bodyPr wrap="square" anchor="t" lIns="0" rIns="0" tIns="0" bIns="0">
             <a:spAutoFit/>
           </a:bodyPr>
           <a:lstStyle/>
@@ -24298,9 +22020,9 @@
               </a:lnSpc>
             </a:pPr>
             <a:r>
-              <a:rPr sz="850" b="1">
-                <a:solidFill>
-                  <a:srgbClr val="718096"/>
+              <a:rPr sz="1000" b="1">
+                <a:solidFill>
+                  <a:srgbClr val="37AB94"/>
                 </a:solidFill>
                 <a:latin typeface="Aptos"/>
               </a:rPr>
@@ -24311,22 +22033,22 @@
       </p:sp>
       <p:sp>
         <p:nvSpPr>
-          <p:cNvPr id="68" name="TextBox 67"/>
+          <p:cNvPr id="65" name="TextBox 64"/>
           <p:cNvSpPr txBox="1"/>
           <p:nvPr/>
         </p:nvSpPr>
         <p:spPr>
           <a:xfrm>
-            <a:off x="987552" y="3621024"/>
-            <a:ext cx="1783080" cy="256032"/>
-          </a:xfrm>
-          <a:prstGeom prst="rect">
-            <a:avLst/>
-          </a:prstGeom>
-          <a:noFill/>
-        </p:spPr>
-        <p:txBody>
-          <a:bodyPr wrap="square" lIns="0" tIns="0" rIns="0" bIns="0" anchor="t">
+            <a:off x="8814816" y="2048256"/>
+            <a:ext cx="2651760" cy="256032"/>
+          </a:xfrm>
+          <a:prstGeom prst="rect">
+            <a:avLst/>
+          </a:prstGeom>
+          <a:noFill/>
+        </p:spPr>
+        <p:txBody>
+          <a:bodyPr wrap="square" anchor="t" lIns="0" rIns="0" tIns="0" bIns="0">
             <a:spAutoFit/>
           </a:bodyPr>
           <a:lstStyle/>
@@ -24337,105 +22059,66 @@
               </a:lnSpc>
             </a:pPr>
             <a:r>
-              <a:rPr sz="1050" b="1">
+              <a:rPr sz="1150" b="1">
                 <a:solidFill>
                   <a:srgbClr val="1A2948"/>
                 </a:solidFill>
                 <a:latin typeface="Aptos"/>
               </a:rPr>
-              <a:t>Pergunta técnica</a:t>
-            </a:r>
-          </a:p>
-        </p:txBody>
-      </p:sp>
-      <p:sp>
-        <p:nvSpPr>
-          <p:cNvPr id="69" name="TextBox 68"/>
+              <a:t>Cobertura e escala</a:t>
+            </a:r>
+          </a:p>
+        </p:txBody>
+      </p:sp>
+      <p:sp>
+        <p:nvSpPr>
+          <p:cNvPr id="66" name="TextBox 65"/>
           <p:cNvSpPr txBox="1"/>
           <p:nvPr/>
         </p:nvSpPr>
         <p:spPr>
           <a:xfrm>
-            <a:off x="2587752" y="3621024"/>
-            <a:ext cx="274320" cy="256032"/>
-          </a:xfrm>
-          <a:prstGeom prst="rect">
-            <a:avLst/>
-          </a:prstGeom>
-          <a:noFill/>
-        </p:spPr>
-        <p:txBody>
-          <a:bodyPr wrap="square" lIns="0" tIns="0" rIns="0" bIns="0" anchor="t">
+            <a:off x="8321040" y="2487168"/>
+            <a:ext cx="3090672" cy="960120"/>
+          </a:xfrm>
+          <a:prstGeom prst="rect">
+            <a:avLst/>
+          </a:prstGeom>
+          <a:noFill/>
+        </p:spPr>
+        <p:txBody>
+          <a:bodyPr wrap="square" anchor="t" lIns="0" rIns="0" tIns="0" bIns="0">
             <a:spAutoFit/>
           </a:bodyPr>
           <a:lstStyle/>
           <a:p>
-            <a:pPr algn="ctr">
-              <a:lnSpc>
-                <a:spcPct val="100000"/>
-              </a:lnSpc>
-            </a:pPr>
-            <a:r>
-              <a:rPr sz="1100" b="1">
-                <a:solidFill>
-                  <a:srgbClr val="37AB94"/>
-                </a:solidFill>
-                <a:latin typeface="Aptos"/>
-              </a:rPr>
-              <a:t>→</a:t>
-            </a:r>
-          </a:p>
-        </p:txBody>
-      </p:sp>
-      <p:sp>
-        <p:nvSpPr>
-          <p:cNvPr id="70" name="TextBox 69"/>
-          <p:cNvSpPr txBox="1"/>
-          <p:nvPr/>
-        </p:nvSpPr>
-        <p:spPr>
-          <a:xfrm>
-            <a:off x="2971800" y="3621024"/>
-            <a:ext cx="2606040" cy="438912"/>
-          </a:xfrm>
-          <a:prstGeom prst="rect">
-            <a:avLst/>
-          </a:prstGeom>
-          <a:noFill/>
-        </p:spPr>
-        <p:txBody>
-          <a:bodyPr wrap="square" lIns="0" tIns="0" rIns="0" bIns="0" anchor="t">
-            <a:spAutoFit/>
-          </a:bodyPr>
-          <a:lstStyle/>
-          <a:p>
             <a:pPr algn="l">
               <a:lnSpc>
-                <a:spcPct val="100000"/>
+                <a:spcPct val="120000"/>
               </a:lnSpc>
             </a:pPr>
             <a:r>
-              <a:rPr sz="1019" b="1">
+              <a:rPr sz="900" b="0">
                 <a:solidFill>
                   <a:srgbClr val="2D3748"/>
                 </a:solidFill>
                 <a:latin typeface="Aptos"/>
               </a:rPr>
-              <a:t>FlowIA com contexto e SQL auditável</a:t>
-            </a:r>
-          </a:p>
-        </p:txBody>
-      </p:sp>
-      <p:sp>
-        <p:nvSpPr>
-          <p:cNvPr id="71" name="Rectangle 70"/>
-          <p:cNvSpPr/>
-          <p:nvPr/>
-        </p:nvSpPr>
-        <p:spPr>
-          <a:xfrm>
-            <a:off x="5907024" y="1810512"/>
-            <a:ext cx="5733288" cy="3355848"/>
+              <a:t>Novas competências a cada publicação do DATASUS, sem intervenção manual, e a abertura do recorte para outras unidades da federação.</a:t>
+            </a:r>
+          </a:p>
+        </p:txBody>
+      </p:sp>
+      <p:sp>
+        <p:nvSpPr>
+          <p:cNvPr id="67" name="Rectangle 66"/>
+          <p:cNvSpPr/>
+          <p:nvPr/>
+        </p:nvSpPr>
+        <p:spPr>
+          <a:xfrm>
+            <a:off x="548640" y="3657600"/>
+            <a:ext cx="11091672" cy="1627632"/>
           </a:xfrm>
           <a:prstGeom prst="rect">
             <a:avLst/>
@@ -24466,174 +22149,27 @@
           <a:lstStyle/>
           <a:p>
             <a:pPr algn="ctr"/>
-            <a:endParaRPr/>
-          </a:p>
-        </p:txBody>
-      </p:sp>
-      <p:pic>
-        <p:nvPicPr>
-          <p:cNvPr id="72" name="Picture 71" descr="image.png"/>
-          <p:cNvPicPr>
-            <a:picLocks noChangeAspect="1"/>
-          </p:cNvPicPr>
-          <p:nvPr/>
-        </p:nvPicPr>
-        <p:blipFill>
-          <a:blip r:embed="rId3"/>
-          <a:stretch>
-            <a:fillRect/>
-          </a:stretch>
-        </p:blipFill>
-        <p:spPr>
-          <a:xfrm>
-            <a:off x="6304593" y="1920240"/>
-            <a:ext cx="4938149" cy="3136392"/>
-          </a:xfrm>
-          <a:prstGeom prst="rect">
-            <a:avLst/>
-          </a:prstGeom>
-        </p:spPr>
-      </p:pic>
-      <p:sp>
-        <p:nvSpPr>
-          <p:cNvPr id="73" name="TextBox 72"/>
+          </a:p>
+        </p:txBody>
+      </p:sp>
+      <p:sp>
+        <p:nvSpPr>
+          <p:cNvPr id="68" name="TextBox 67"/>
           <p:cNvSpPr txBox="1"/>
           <p:nvPr/>
         </p:nvSpPr>
         <p:spPr>
           <a:xfrm>
-            <a:off x="548640" y="5047488"/>
-            <a:ext cx="11091672" cy="347472"/>
-          </a:xfrm>
-          <a:prstGeom prst="rect">
-            <a:avLst/>
-          </a:prstGeom>
-          <a:noFill/>
-        </p:spPr>
-        <p:txBody>
-          <a:bodyPr wrap="square" lIns="0" tIns="0" rIns="0" bIns="0" anchor="t">
-            <a:spAutoFit/>
-          </a:bodyPr>
-          <a:lstStyle/>
-          <a:p>
-            <a:pPr algn="ctr">
-              <a:lnSpc>
-                <a:spcPct val="100000"/>
-              </a:lnSpc>
-            </a:pPr>
-            <a:r>
-              <a:rPr sz="1080" b="1">
-                <a:solidFill>
-                  <a:srgbClr val="1A2948"/>
-                </a:solidFill>
-                <a:latin typeface="Aptos"/>
-              </a:rPr>
-              <a:t>O resultado está menos no volume processado e mais na investigação: uma pergunta dispersa vira um percurso que pode ser refeito e conferido.</a:t>
-            </a:r>
-          </a:p>
-        </p:txBody>
-      </p:sp>
-      <p:sp>
-        <p:nvSpPr>
-          <p:cNvPr id="74" name="TextBox 73"/>
-          <p:cNvSpPr txBox="1"/>
-          <p:nvPr/>
-        </p:nvSpPr>
-        <p:spPr>
-          <a:xfrm>
-            <a:off x="548640" y="5468112"/>
-            <a:ext cx="11091672" cy="219456"/>
-          </a:xfrm>
-          <a:prstGeom prst="rect">
-            <a:avLst/>
-          </a:prstGeom>
-          <a:noFill/>
-        </p:spPr>
-        <p:txBody>
-          <a:bodyPr wrap="square" lIns="0" tIns="0" rIns="0" bIns="0" anchor="t">
-            <a:spAutoFit/>
-          </a:bodyPr>
-          <a:lstStyle/>
-          <a:p>
-            <a:pPr algn="ctr">
-              <a:lnSpc>
-                <a:spcPct val="100000"/>
-              </a:lnSpc>
-            </a:pPr>
-            <a:r>
-              <a:rPr sz="860" b="0">
-                <a:solidFill>
-                  <a:srgbClr val="718096"/>
-                </a:solidFill>
-                <a:latin typeface="Aptos"/>
-              </a:rPr>
-              <a:t>30 competências · 62 regiões · 655 hospitais · 7,28 milhões de AIHs · 0 divergências na validação executada</a:t>
-            </a:r>
-          </a:p>
-        </p:txBody>
-      </p:sp>
-      <p:sp>
-        <p:nvSpPr>
-          <p:cNvPr id="75" name="Rectangle 74"/>
-          <p:cNvSpPr/>
-          <p:nvPr/>
-        </p:nvSpPr>
-        <p:spPr>
-          <a:xfrm>
-            <a:off x="548640" y="5769864"/>
-            <a:ext cx="11091672" cy="7315"/>
-          </a:xfrm>
-          <a:prstGeom prst="rect">
-            <a:avLst/>
-          </a:prstGeom>
-          <a:solidFill>
-            <a:srgbClr val="D9E2EC"/>
-          </a:solidFill>
-          <a:ln>
-            <a:noFill/>
-          </a:ln>
-        </p:spPr>
-        <p:style>
-          <a:lnRef idx="1">
-            <a:schemeClr val="accent1"/>
-          </a:lnRef>
-          <a:fillRef idx="3">
-            <a:schemeClr val="accent1"/>
-          </a:fillRef>
-          <a:effectRef idx="2">
-            <a:schemeClr val="accent1"/>
-          </a:effectRef>
-          <a:fontRef idx="minor">
-            <a:schemeClr val="lt1"/>
-          </a:fontRef>
-        </p:style>
-        <p:txBody>
-          <a:bodyPr rtlCol="0" anchor="ctr"/>
-          <a:lstStyle/>
-          <a:p>
-            <a:pPr algn="ctr"/>
-            <a:endParaRPr/>
-          </a:p>
-        </p:txBody>
-      </p:sp>
-      <p:sp>
-        <p:nvSpPr>
-          <p:cNvPr id="76" name="TextBox 75"/>
-          <p:cNvSpPr txBox="1"/>
-          <p:nvPr/>
-        </p:nvSpPr>
-        <p:spPr>
-          <a:xfrm>
-            <a:off x="548640" y="5861303"/>
-            <a:ext cx="1170432" cy="164592"/>
-          </a:xfrm>
-          <a:prstGeom prst="rect">
-            <a:avLst/>
-          </a:prstGeom>
-          <a:noFill/>
-        </p:spPr>
-        <p:txBody>
-          <a:bodyPr wrap="square" lIns="0" tIns="0" rIns="0" bIns="0" anchor="t">
+            <a:off x="786384" y="3877056"/>
+            <a:ext cx="3840480" cy="219456"/>
+          </a:xfrm>
+          <a:prstGeom prst="rect">
+            <a:avLst/>
+          </a:prstGeom>
+          <a:noFill/>
+        </p:spPr>
+        <p:txBody>
+          <a:bodyPr wrap="square" anchor="t" lIns="0" rIns="0" tIns="0" bIns="0">
             <a:spAutoFit/>
           </a:bodyPr>
           <a:lstStyle/>
@@ -24644,35 +22180,35 @@
               </a:lnSpc>
             </a:pPr>
             <a:r>
-              <a:rPr sz="800" b="1">
+              <a:rPr sz="950" b="1">
                 <a:solidFill>
                   <a:srgbClr val="37AB94"/>
                 </a:solidFill>
                 <a:latin typeface="Aptos"/>
               </a:rPr>
-              <a:t>TERMOS DO SLIDE</a:t>
-            </a:r>
-          </a:p>
-        </p:txBody>
-      </p:sp>
-      <p:sp>
-        <p:nvSpPr>
-          <p:cNvPr id="77" name="TextBox 76"/>
+              <a:t>POR QUE AINDA NÃO PREVEMOS</a:t>
+            </a:r>
+          </a:p>
+        </p:txBody>
+      </p:sp>
+      <p:sp>
+        <p:nvSpPr>
+          <p:cNvPr id="69" name="TextBox 68"/>
           <p:cNvSpPr txBox="1"/>
           <p:nvPr/>
         </p:nvSpPr>
         <p:spPr>
           <a:xfrm>
-            <a:off x="1755648" y="5833872"/>
-            <a:ext cx="9884664" cy="365760"/>
-          </a:xfrm>
-          <a:prstGeom prst="rect">
-            <a:avLst/>
-          </a:prstGeom>
-          <a:noFill/>
-        </p:spPr>
-        <p:txBody>
-          <a:bodyPr wrap="square" lIns="0" tIns="0" rIns="0" bIns="0" anchor="t">
+            <a:off x="786384" y="4297680"/>
+            <a:ext cx="329184" cy="201168"/>
+          </a:xfrm>
+          <a:prstGeom prst="rect">
+            <a:avLst/>
+          </a:prstGeom>
+          <a:noFill/>
+        </p:spPr>
+        <p:txBody>
+          <a:bodyPr wrap="square" anchor="t" lIns="0" rIns="0" tIns="0" bIns="0">
             <a:spAutoFit/>
           </a:bodyPr>
           <a:lstStyle/>
@@ -24683,13 +22219,247 @@
               </a:lnSpc>
             </a:pPr>
             <a:r>
-              <a:rPr sz="850" b="0">
+              <a:rPr sz="850" b="1">
+                <a:solidFill>
+                  <a:srgbClr val="37AB94"/>
+                </a:solidFill>
+                <a:latin typeface="Aptos"/>
+              </a:rPr>
+              <a:t>01</a:t>
+            </a:r>
+          </a:p>
+        </p:txBody>
+      </p:sp>
+      <p:sp>
+        <p:nvSpPr>
+          <p:cNvPr id="70" name="TextBox 69"/>
+          <p:cNvSpPr txBox="1"/>
+          <p:nvPr/>
+        </p:nvSpPr>
+        <p:spPr>
+          <a:xfrm>
+            <a:off x="1152144" y="4279392"/>
+            <a:ext cx="3017520" cy="1005840"/>
+          </a:xfrm>
+          <a:prstGeom prst="rect">
+            <a:avLst/>
+          </a:prstGeom>
+          <a:noFill/>
+        </p:spPr>
+        <p:txBody>
+          <a:bodyPr wrap="square" anchor="t" lIns="0" rIns="0" tIns="0" bIns="0">
+            <a:spAutoFit/>
+          </a:bodyPr>
+          <a:lstStyle/>
+          <a:p>
+            <a:pPr algn="l">
+              <a:lnSpc>
+                <a:spcPct val="120000"/>
+              </a:lnSpc>
+            </a:pPr>
+            <a:r>
+              <a:rPr sz="919" b="0">
+                <a:solidFill>
+                  <a:srgbClr val="2D3748"/>
+                </a:solidFill>
+                <a:latin typeface="Aptos"/>
+              </a:rPr>
+              <a:t>Prever sobre dado administrativo com reapresentação retroativa produz número bonito e falso: a competência continua mudando depois de publicada.</a:t>
+            </a:r>
+          </a:p>
+        </p:txBody>
+      </p:sp>
+      <p:sp>
+        <p:nvSpPr>
+          <p:cNvPr id="71" name="TextBox 70"/>
+          <p:cNvSpPr txBox="1"/>
+          <p:nvPr/>
+        </p:nvSpPr>
+        <p:spPr>
+          <a:xfrm>
+            <a:off x="4425696" y="4297680"/>
+            <a:ext cx="329184" cy="201168"/>
+          </a:xfrm>
+          <a:prstGeom prst="rect">
+            <a:avLst/>
+          </a:prstGeom>
+          <a:noFill/>
+        </p:spPr>
+        <p:txBody>
+          <a:bodyPr wrap="square" anchor="t" lIns="0" rIns="0" tIns="0" bIns="0">
+            <a:spAutoFit/>
+          </a:bodyPr>
+          <a:lstStyle/>
+          <a:p>
+            <a:pPr algn="l">
+              <a:lnSpc>
+                <a:spcPct val="100000"/>
+              </a:lnSpc>
+            </a:pPr>
+            <a:r>
+              <a:rPr sz="850" b="1">
+                <a:solidFill>
+                  <a:srgbClr val="37AB94"/>
+                </a:solidFill>
+                <a:latin typeface="Aptos"/>
+              </a:rPr>
+              <a:t>02</a:t>
+            </a:r>
+          </a:p>
+        </p:txBody>
+      </p:sp>
+      <p:sp>
+        <p:nvSpPr>
+          <p:cNvPr id="72" name="TextBox 71"/>
+          <p:cNvSpPr txBox="1"/>
+          <p:nvPr/>
+        </p:nvSpPr>
+        <p:spPr>
+          <a:xfrm>
+            <a:off x="4791456" y="4279392"/>
+            <a:ext cx="3017520" cy="1005840"/>
+          </a:xfrm>
+          <a:prstGeom prst="rect">
+            <a:avLst/>
+          </a:prstGeom>
+          <a:noFill/>
+        </p:spPr>
+        <p:txBody>
+          <a:bodyPr wrap="square" anchor="t" lIns="0" rIns="0" tIns="0" bIns="0">
+            <a:spAutoFit/>
+          </a:bodyPr>
+          <a:lstStyle/>
+          <a:p>
+            <a:pPr algn="l">
+              <a:lnSpc>
+                <a:spcPct val="120000"/>
+              </a:lnSpc>
+            </a:pPr>
+            <a:r>
+              <a:rPr sz="919" b="0">
+                <a:solidFill>
+                  <a:srgbClr val="2D3748"/>
+                </a:solidFill>
+                <a:latin typeface="Aptos"/>
+              </a:rPr>
+              <a:t>A comparação sazonal contra dois anos-base e o benchmark entre pares elegíveis respondem à mesma necessidade, sem fingir uma precisão que o dado não tem.</a:t>
+            </a:r>
+          </a:p>
+        </p:txBody>
+      </p:sp>
+      <p:sp>
+        <p:nvSpPr>
+          <p:cNvPr id="73" name="TextBox 72"/>
+          <p:cNvSpPr txBox="1"/>
+          <p:nvPr/>
+        </p:nvSpPr>
+        <p:spPr>
+          <a:xfrm>
+            <a:off x="8065008" y="4297680"/>
+            <a:ext cx="329184" cy="201168"/>
+          </a:xfrm>
+          <a:prstGeom prst="rect">
+            <a:avLst/>
+          </a:prstGeom>
+          <a:noFill/>
+        </p:spPr>
+        <p:txBody>
+          <a:bodyPr wrap="square" anchor="t" lIns="0" rIns="0" tIns="0" bIns="0">
+            <a:spAutoFit/>
+          </a:bodyPr>
+          <a:lstStyle/>
+          <a:p>
+            <a:pPr algn="l">
+              <a:lnSpc>
+                <a:spcPct val="100000"/>
+              </a:lnSpc>
+            </a:pPr>
+            <a:r>
+              <a:rPr sz="850" b="1">
+                <a:solidFill>
+                  <a:srgbClr val="37AB94"/>
+                </a:solidFill>
+                <a:latin typeface="Aptos"/>
+              </a:rPr>
+              <a:t>03</a:t>
+            </a:r>
+          </a:p>
+        </p:txBody>
+      </p:sp>
+      <p:sp>
+        <p:nvSpPr>
+          <p:cNvPr id="74" name="TextBox 73"/>
+          <p:cNvSpPr txBox="1"/>
+          <p:nvPr/>
+        </p:nvSpPr>
+        <p:spPr>
+          <a:xfrm>
+            <a:off x="8430768" y="4279392"/>
+            <a:ext cx="3017520" cy="1005840"/>
+          </a:xfrm>
+          <a:prstGeom prst="rect">
+            <a:avLst/>
+          </a:prstGeom>
+          <a:noFill/>
+        </p:spPr>
+        <p:txBody>
+          <a:bodyPr wrap="square" anchor="t" lIns="0" rIns="0" tIns="0" bIns="0">
+            <a:spAutoFit/>
+          </a:bodyPr>
+          <a:lstStyle/>
+          <a:p>
+            <a:pPr algn="l">
+              <a:lnSpc>
+                <a:spcPct val="120000"/>
+              </a:lnSpc>
+            </a:pPr>
+            <a:r>
+              <a:rPr sz="919" b="0">
+                <a:solidFill>
+                  <a:srgbClr val="2D3748"/>
+                </a:solidFill>
+                <a:latin typeface="Aptos"/>
+              </a:rPr>
+              <a:t>O caminho até a previsão passa por série mais longa e validação com usuários. Está aqui como próximo passo declarado, e não como lacuna.</a:t>
+            </a:r>
+          </a:p>
+        </p:txBody>
+      </p:sp>
+      <p:sp>
+        <p:nvSpPr>
+          <p:cNvPr id="75" name="TextBox 74"/>
+          <p:cNvSpPr txBox="1"/>
+          <p:nvPr/>
+        </p:nvSpPr>
+        <p:spPr>
+          <a:xfrm>
+            <a:off x="548640" y="5623560"/>
+            <a:ext cx="11091672" cy="274320"/>
+          </a:xfrm>
+          <a:prstGeom prst="rect">
+            <a:avLst/>
+          </a:prstGeom>
+          <a:noFill/>
+        </p:spPr>
+        <p:txBody>
+          <a:bodyPr wrap="square" anchor="t" lIns="0" rIns="0" tIns="0" bIns="0">
+            <a:spAutoFit/>
+          </a:bodyPr>
+          <a:lstStyle/>
+          <a:p>
+            <a:pPr algn="l">
+              <a:lnSpc>
+                <a:spcPct val="100000"/>
+              </a:lnSpc>
+            </a:pPr>
+            <a:r>
+              <a:rPr sz="880" b="0">
                 <a:solidFill>
                   <a:srgbClr val="718096"/>
                 </a:solidFill>
                 <a:latin typeface="Aptos"/>
               </a:rPr>
-              <a:t>AIH: Autorização de Internação Hospitalar, registro administrativo do SUS; uma AIH aprovada nem sempre equivale a uma nova internação. · Competência: mês de referência da publicação.</a:t>
+              <a:t>Nada disso é componente de software: é ampliação de evidência. A arquitetura entregue já sustenta os três caminhos sem reescrita.</a:t>
             </a:r>
           </a:p>
         </p:txBody>
@@ -24702,1121 +22472,7 @@
 </p:sld>
 </file>
 
-<file path=ppt/slides/slide22.xml><?xml version="1.0" encoding="utf-8"?>
-<p:sld xmlns:a="http://schemas.openxmlformats.org/drawingml/2006/main" xmlns:p="http://schemas.openxmlformats.org/presentationml/2006/main" xmlns:r="http://schemas.openxmlformats.org/officeDocument/2006/relationships">
-  <p:cSld>
-    <p:spTree>
-      <p:nvGrpSpPr>
-        <p:cNvPr id="1" name=""/>
-        <p:cNvGrpSpPr/>
-        <p:nvPr/>
-      </p:nvGrpSpPr>
-      <p:grpSpPr/>
-      <p:sp>
-        <p:nvSpPr>
-          <p:cNvPr id="2" name="Shape 0"/>
-          <p:cNvSpPr/>
-          <p:nvPr/>
-        </p:nvSpPr>
-        <p:spPr>
-          <a:xfrm>
-            <a:off x="0" y="0"/>
-            <a:ext cx="12191695" cy="1024128"/>
-          </a:xfrm>
-          <a:prstGeom prst="rect">
-            <a:avLst/>
-          </a:prstGeom>
-          <a:solidFill>
-            <a:srgbClr val="1A2948"/>
-          </a:solidFill>
-          <a:ln w="12700">
-            <a:solidFill>
-              <a:srgbClr val="1A2948"/>
-            </a:solidFill>
-            <a:prstDash val="solid"/>
-          </a:ln>
-        </p:spPr>
-        <p:txBody>
-          <a:bodyPr/>
-          <a:lstStyle/>
-          <a:p>
-            <a:endParaRPr/>
-          </a:p>
-        </p:txBody>
-      </p:sp>
-      <p:sp>
-        <p:nvSpPr>
-          <p:cNvPr id="3" name="Text 1"/>
-          <p:cNvSpPr/>
-          <p:nvPr/>
-        </p:nvSpPr>
-        <p:spPr>
-          <a:xfrm>
-            <a:off x="548640" y="128016"/>
-            <a:ext cx="8716975" cy="237744"/>
-          </a:xfrm>
-          <a:prstGeom prst="rect">
-            <a:avLst/>
-          </a:prstGeom>
-          <a:noFill/>
-          <a:ln/>
-        </p:spPr>
-        <p:txBody>
-          <a:bodyPr wrap="square" lIns="0" tIns="0" rIns="0" bIns="0" rtlCol="0" anchor="ctr"/>
-          <a:lstStyle/>
-          <a:p>
-            <a:pPr marL="0" indent="0">
-              <a:buNone/>
-            </a:pPr>
-            <a:endParaRPr lang="en-US" sz="950" dirty="0"/>
-          </a:p>
-        </p:txBody>
-      </p:sp>
-      <p:sp>
-        <p:nvSpPr>
-          <p:cNvPr id="4" name="Text 2"/>
-          <p:cNvSpPr/>
-          <p:nvPr/>
-        </p:nvSpPr>
-        <p:spPr>
-          <a:xfrm>
-            <a:off x="548640" y="320040"/>
-            <a:ext cx="8716975" cy="530352"/>
-          </a:xfrm>
-          <a:prstGeom prst="rect">
-            <a:avLst/>
-          </a:prstGeom>
-          <a:noFill/>
-          <a:ln/>
-        </p:spPr>
-        <p:txBody>
-          <a:bodyPr wrap="square" lIns="0" tIns="0" rIns="0" bIns="0" rtlCol="0" anchor="t"/>
-          <a:lstStyle/>
-          <a:p>
-            <a:pPr marL="0" indent="0">
-              <a:buNone/>
-            </a:pPr>
-            <a:r>
-              <a:rPr lang="en-US" sz="2200" b="1">
-                <a:solidFill>
-                  <a:srgbClr val="FFFFFF"/>
-                </a:solidFill>
-                <a:latin typeface="Aptos" pitchFamily="34" charset="0"/>
-                <a:ea typeface="Calibri" pitchFamily="34" charset="-122"/>
-                <a:cs typeface="Calibri" pitchFamily="34" charset="-120"/>
-              </a:rPr>
-              <a:t>Próximos passos</a:t>
-            </a:r>
-            <a:endParaRPr lang="en-US" sz="2200" dirty="0"/>
-          </a:p>
-        </p:txBody>
-      </p:sp>
-      <p:sp>
-        <p:nvSpPr>
-          <p:cNvPr id="5" name="Text 3"/>
-          <p:cNvSpPr/>
-          <p:nvPr/>
-        </p:nvSpPr>
-        <p:spPr>
-          <a:xfrm>
-            <a:off x="9357055" y="402336"/>
-            <a:ext cx="2286000" cy="292608"/>
-          </a:xfrm>
-          <a:prstGeom prst="rect">
-            <a:avLst/>
-          </a:prstGeom>
-          <a:noFill/>
-          <a:ln/>
-        </p:spPr>
-        <p:txBody>
-          <a:bodyPr wrap="square" lIns="0" tIns="0" rIns="0" bIns="0" rtlCol="0" anchor="ctr"/>
-          <a:lstStyle/>
-          <a:p>
-            <a:pPr marL="0" indent="0" algn="r">
-              <a:buNone/>
-            </a:pPr>
-            <a:r>
-              <a:rPr lang="en-US" sz="1000" dirty="0">
-                <a:solidFill>
-                  <a:srgbClr val="9DB0C8"/>
-                </a:solidFill>
-                <a:latin typeface="Aptos" pitchFamily="34" charset="0"/>
-                <a:ea typeface="Calibri" pitchFamily="34" charset="-122"/>
-                <a:cs typeface="Calibri" pitchFamily="34" charset="-120"/>
-              </a:rPr>
-              <a:t>Sprint 2</a:t>
-            </a:r>
-            <a:endParaRPr lang="en-US" sz="1000" dirty="0"/>
-          </a:p>
-        </p:txBody>
-      </p:sp>
-      <p:sp>
-        <p:nvSpPr>
-          <p:cNvPr id="52" name="Text 44"/>
-          <p:cNvSpPr/>
-          <p:nvPr/>
-        </p:nvSpPr>
-        <p:spPr>
-          <a:xfrm>
-            <a:off x="548640" y="6419088"/>
-            <a:ext cx="10454335" cy="256032"/>
-          </a:xfrm>
-          <a:prstGeom prst="rect">
-            <a:avLst/>
-          </a:prstGeom>
-          <a:noFill/>
-          <a:ln/>
-        </p:spPr>
-        <p:txBody>
-          <a:bodyPr wrap="square" lIns="0" tIns="0" rIns="0" bIns="0" rtlCol="0" anchor="ctr"/>
-          <a:lstStyle/>
-          <a:p>
-            <a:pPr marL="0" indent="0">
-              <a:buNone/>
-            </a:pPr>
-            <a:r>
-              <a:rPr lang="en-US" sz="750" dirty="0">
-                <a:solidFill>
-                  <a:srgbClr val="9DB0C8"/>
-                </a:solidFill>
-                <a:latin typeface="Aptos" pitchFamily="34" charset="0"/>
-                <a:ea typeface="Calibri" pitchFamily="34" charset="-122"/>
-                <a:cs typeface="Calibri" pitchFamily="34" charset="-120"/>
-              </a:rPr>
-              <a:t>MedFlow  ·  Painel Inteligente de Acesso Hospitalar e Perfil de Atendimento  ·  Ômega Urban Tech  ·  Enterprise Challenge FIAP × Oracle 2026</a:t>
-            </a:r>
-            <a:endParaRPr lang="en-US" sz="750" dirty="0"/>
-          </a:p>
-        </p:txBody>
-      </p:sp>
-      <p:sp>
-        <p:nvSpPr>
-          <p:cNvPr id="53" name="Text 45"/>
-          <p:cNvSpPr/>
-          <p:nvPr/>
-        </p:nvSpPr>
-        <p:spPr>
-          <a:xfrm>
-            <a:off x="11094415" y="6419088"/>
-            <a:ext cx="548640" cy="256032"/>
-          </a:xfrm>
-          <a:prstGeom prst="rect">
-            <a:avLst/>
-          </a:prstGeom>
-          <a:noFill/>
-          <a:ln/>
-        </p:spPr>
-        <p:txBody>
-          <a:bodyPr wrap="square" lIns="0" tIns="0" rIns="0" bIns="0" rtlCol="0" anchor="ctr"/>
-          <a:lstStyle/>
-          <a:p>
-            <a:pPr marL="0" indent="0" algn="r">
-              <a:buNone/>
-            </a:pPr>
-            <a:r>
-              <a:rPr lang="en-US" sz="850" b="1" dirty="0">
-                <a:solidFill>
-                  <a:srgbClr val="2B6CB0"/>
-                </a:solidFill>
-                <a:latin typeface="Aptos" pitchFamily="34" charset="0"/>
-                <a:ea typeface="Calibri" pitchFamily="34" charset="-122"/>
-                <a:cs typeface="Calibri" pitchFamily="34" charset="-120"/>
-              </a:rPr>
-              <a:t>22</a:t>
-            </a:r>
-            <a:endParaRPr lang="en-US" sz="850" dirty="0"/>
-          </a:p>
-        </p:txBody>
-      </p:sp>
-      <p:sp>
-        <p:nvSpPr>
-          <p:cNvPr id="54" name="TextBox 53"/>
-          <p:cNvSpPr txBox="1"/>
-          <p:nvPr/>
-        </p:nvSpPr>
-        <p:spPr>
-          <a:xfrm>
-            <a:off x="548640" y="1316736"/>
-            <a:ext cx="11091672" cy="365760"/>
-          </a:xfrm>
-          <a:prstGeom prst="rect">
-            <a:avLst/>
-          </a:prstGeom>
-          <a:noFill/>
-        </p:spPr>
-        <p:txBody>
-          <a:bodyPr wrap="square" anchor="t" lIns="0" rIns="0" tIns="0" bIns="0">
-            <a:spAutoFit/>
-          </a:bodyPr>
-          <a:lstStyle/>
-          <a:p>
-            <a:pPr algn="l">
-              <a:lnSpc>
-                <a:spcPct val="100000"/>
-              </a:lnSpc>
-            </a:pPr>
-            <a:r>
-              <a:rPr sz="1100" b="0">
-                <a:solidFill>
-                  <a:srgbClr val="2D3748"/>
-                </a:solidFill>
-                <a:latin typeface="Aptos"/>
-              </a:rPr>
-              <a:t>O MVP está validado tecnicamente. O que vem a seguir é o que falta para falar em utilidade, adoção e impacto — e é também o caminho honesto até a previsão.</a:t>
-            </a:r>
-          </a:p>
-        </p:txBody>
-      </p:sp>
-      <p:sp>
-        <p:nvSpPr>
-          <p:cNvPr id="55" name="Rectangle 54"/>
-          <p:cNvSpPr/>
-          <p:nvPr/>
-        </p:nvSpPr>
-        <p:spPr>
-          <a:xfrm>
-            <a:off x="548640" y="1874519"/>
-            <a:ext cx="3566160" cy="1417320"/>
-          </a:xfrm>
-          <a:prstGeom prst="rect">
-            <a:avLst/>
-          </a:prstGeom>
-          <a:solidFill>
-            <a:srgbClr val="FFFFFF"/>
-          </a:solidFill>
-          <a:ln w="9525">
-            <a:solidFill>
-              <a:srgbClr val="D9E2EC"/>
-            </a:solidFill>
-          </a:ln>
-        </p:spPr>
-        <p:style>
-          <a:lnRef idx="1">
-            <a:schemeClr val="accent1"/>
-          </a:lnRef>
-          <a:fillRef idx="3">
-            <a:schemeClr val="accent1"/>
-          </a:fillRef>
-          <a:effectRef idx="2">
-            <a:schemeClr val="accent1"/>
-          </a:effectRef>
-          <a:fontRef idx="minor">
-            <a:schemeClr val="lt1"/>
-          </a:fontRef>
-        </p:style>
-        <p:txBody>
-          <a:bodyPr rtlCol="0" anchor="ctr"/>
-          <a:lstStyle/>
-          <a:p>
-            <a:pPr algn="ctr"/>
-          </a:p>
-        </p:txBody>
-      </p:sp>
-      <p:sp>
-        <p:nvSpPr>
-          <p:cNvPr id="56" name="TextBox 55"/>
-          <p:cNvSpPr txBox="1"/>
-          <p:nvPr/>
-        </p:nvSpPr>
-        <p:spPr>
-          <a:xfrm>
-            <a:off x="786384" y="2066543"/>
-            <a:ext cx="384048" cy="219456"/>
-          </a:xfrm>
-          <a:prstGeom prst="rect">
-            <a:avLst/>
-          </a:prstGeom>
-          <a:noFill/>
-        </p:spPr>
-        <p:txBody>
-          <a:bodyPr wrap="square" anchor="t" lIns="0" rIns="0" tIns="0" bIns="0">
-            <a:spAutoFit/>
-          </a:bodyPr>
-          <a:lstStyle/>
-          <a:p>
-            <a:pPr algn="l">
-              <a:lnSpc>
-                <a:spcPct val="100000"/>
-              </a:lnSpc>
-            </a:pPr>
-            <a:r>
-              <a:rPr sz="1000" b="1">
-                <a:solidFill>
-                  <a:srgbClr val="37AB94"/>
-                </a:solidFill>
-                <a:latin typeface="Aptos"/>
-              </a:rPr>
-              <a:t>01</a:t>
-            </a:r>
-          </a:p>
-        </p:txBody>
-      </p:sp>
-      <p:sp>
-        <p:nvSpPr>
-          <p:cNvPr id="57" name="TextBox 56"/>
-          <p:cNvSpPr txBox="1"/>
-          <p:nvPr/>
-        </p:nvSpPr>
-        <p:spPr>
-          <a:xfrm>
-            <a:off x="1280160" y="2048256"/>
-            <a:ext cx="2651760" cy="256032"/>
-          </a:xfrm>
-          <a:prstGeom prst="rect">
-            <a:avLst/>
-          </a:prstGeom>
-          <a:noFill/>
-        </p:spPr>
-        <p:txBody>
-          <a:bodyPr wrap="square" anchor="t" lIns="0" rIns="0" tIns="0" bIns="0">
-            <a:spAutoFit/>
-          </a:bodyPr>
-          <a:lstStyle/>
-          <a:p>
-            <a:pPr algn="l">
-              <a:lnSpc>
-                <a:spcPct val="100000"/>
-              </a:lnSpc>
-            </a:pPr>
-            <a:r>
-              <a:rPr sz="1150" b="1">
-                <a:solidFill>
-                  <a:srgbClr val="1A2948"/>
-                </a:solidFill>
-                <a:latin typeface="Aptos"/>
-              </a:rPr>
-              <a:t>Validação com usuários</a:t>
-            </a:r>
-          </a:p>
-        </p:txBody>
-      </p:sp>
-      <p:sp>
-        <p:nvSpPr>
-          <p:cNvPr id="58" name="TextBox 57"/>
-          <p:cNvSpPr txBox="1"/>
-          <p:nvPr/>
-        </p:nvSpPr>
-        <p:spPr>
-          <a:xfrm>
-            <a:off x="786384" y="2487168"/>
-            <a:ext cx="3090672" cy="960120"/>
-          </a:xfrm>
-          <a:prstGeom prst="rect">
-            <a:avLst/>
-          </a:prstGeom>
-          <a:noFill/>
-        </p:spPr>
-        <p:txBody>
-          <a:bodyPr wrap="square" anchor="t" lIns="0" rIns="0" tIns="0" bIns="0">
-            <a:spAutoFit/>
-          </a:bodyPr>
-          <a:lstStyle/>
-          <a:p>
-            <a:pPr algn="l">
-              <a:lnSpc>
-                <a:spcPct val="120000"/>
-              </a:lnSpc>
-            </a:pPr>
-            <a:r>
-              <a:rPr sz="900" b="0">
-                <a:solidFill>
-                  <a:srgbClr val="2D3748"/>
-                </a:solidFill>
-                <a:latin typeface="Aptos"/>
-              </a:rPr>
-              <a:t>Levar o produto a gestores regionais e medir compreensão, utilidade e tempo até a hipótese. É a evidência que hoje falta para falar em adoção.</a:t>
-            </a:r>
-          </a:p>
-        </p:txBody>
-      </p:sp>
-      <p:sp>
-        <p:nvSpPr>
-          <p:cNvPr id="59" name="Rectangle 58"/>
-          <p:cNvSpPr/>
-          <p:nvPr/>
-        </p:nvSpPr>
-        <p:spPr>
-          <a:xfrm>
-            <a:off x="4315968" y="1874519"/>
-            <a:ext cx="3566160" cy="1417320"/>
-          </a:xfrm>
-          <a:prstGeom prst="rect">
-            <a:avLst/>
-          </a:prstGeom>
-          <a:solidFill>
-            <a:srgbClr val="FFFFFF"/>
-          </a:solidFill>
-          <a:ln w="9525">
-            <a:solidFill>
-              <a:srgbClr val="D9E2EC"/>
-            </a:solidFill>
-          </a:ln>
-        </p:spPr>
-        <p:style>
-          <a:lnRef idx="1">
-            <a:schemeClr val="accent1"/>
-          </a:lnRef>
-          <a:fillRef idx="3">
-            <a:schemeClr val="accent1"/>
-          </a:fillRef>
-          <a:effectRef idx="2">
-            <a:schemeClr val="accent1"/>
-          </a:effectRef>
-          <a:fontRef idx="minor">
-            <a:schemeClr val="lt1"/>
-          </a:fontRef>
-        </p:style>
-        <p:txBody>
-          <a:bodyPr rtlCol="0" anchor="ctr"/>
-          <a:lstStyle/>
-          <a:p>
-            <a:pPr algn="ctr"/>
-          </a:p>
-        </p:txBody>
-      </p:sp>
-      <p:sp>
-        <p:nvSpPr>
-          <p:cNvPr id="60" name="TextBox 59"/>
-          <p:cNvSpPr txBox="1"/>
-          <p:nvPr/>
-        </p:nvSpPr>
-        <p:spPr>
-          <a:xfrm>
-            <a:off x="4553712" y="2066543"/>
-            <a:ext cx="384048" cy="219456"/>
-          </a:xfrm>
-          <a:prstGeom prst="rect">
-            <a:avLst/>
-          </a:prstGeom>
-          <a:noFill/>
-        </p:spPr>
-        <p:txBody>
-          <a:bodyPr wrap="square" anchor="t" lIns="0" rIns="0" tIns="0" bIns="0">
-            <a:spAutoFit/>
-          </a:bodyPr>
-          <a:lstStyle/>
-          <a:p>
-            <a:pPr algn="l">
-              <a:lnSpc>
-                <a:spcPct val="100000"/>
-              </a:lnSpc>
-            </a:pPr>
-            <a:r>
-              <a:rPr sz="1000" b="1">
-                <a:solidFill>
-                  <a:srgbClr val="37AB94"/>
-                </a:solidFill>
-                <a:latin typeface="Aptos"/>
-              </a:rPr>
-              <a:t>02</a:t>
-            </a:r>
-          </a:p>
-        </p:txBody>
-      </p:sp>
-      <p:sp>
-        <p:nvSpPr>
-          <p:cNvPr id="61" name="TextBox 60"/>
-          <p:cNvSpPr txBox="1"/>
-          <p:nvPr/>
-        </p:nvSpPr>
-        <p:spPr>
-          <a:xfrm>
-            <a:off x="5047488" y="2048256"/>
-            <a:ext cx="2651760" cy="256032"/>
-          </a:xfrm>
-          <a:prstGeom prst="rect">
-            <a:avLst/>
-          </a:prstGeom>
-          <a:noFill/>
-        </p:spPr>
-        <p:txBody>
-          <a:bodyPr wrap="square" anchor="t" lIns="0" rIns="0" tIns="0" bIns="0">
-            <a:spAutoFit/>
-          </a:bodyPr>
-          <a:lstStyle/>
-          <a:p>
-            <a:pPr algn="l">
-              <a:lnSpc>
-                <a:spcPct val="100000"/>
-              </a:lnSpc>
-            </a:pPr>
-            <a:r>
-              <a:rPr sz="1150" b="1">
-                <a:solidFill>
-                  <a:srgbClr val="1A2948"/>
-                </a:solidFill>
-                <a:latin typeface="Aptos"/>
-              </a:rPr>
-              <a:t>Série mais longa</a:t>
-            </a:r>
-          </a:p>
-        </p:txBody>
-      </p:sp>
-      <p:sp>
-        <p:nvSpPr>
-          <p:cNvPr id="62" name="TextBox 61"/>
-          <p:cNvSpPr txBox="1"/>
-          <p:nvPr/>
-        </p:nvSpPr>
-        <p:spPr>
-          <a:xfrm>
-            <a:off x="4553712" y="2487168"/>
-            <a:ext cx="3090672" cy="960120"/>
-          </a:xfrm>
-          <a:prstGeom prst="rect">
-            <a:avLst/>
-          </a:prstGeom>
-          <a:noFill/>
-        </p:spPr>
-        <p:txBody>
-          <a:bodyPr wrap="square" anchor="t" lIns="0" rIns="0" tIns="0" bIns="0">
-            <a:spAutoFit/>
-          </a:bodyPr>
-          <a:lstStyle/>
-          <a:p>
-            <a:pPr algn="l">
-              <a:lnSpc>
-                <a:spcPct val="120000"/>
-              </a:lnSpc>
-            </a:pPr>
-            <a:r>
-              <a:rPr sz="900" b="0">
-                <a:solidFill>
-                  <a:srgbClr val="2D3748"/>
-                </a:solidFill>
-                <a:latin typeface="Aptos"/>
-              </a:rPr>
-              <a:t>Estender o recorte além das 30 competências e acompanhar a reapresentação retroativa das AIHs, que altera números já publicados.</a:t>
-            </a:r>
-          </a:p>
-        </p:txBody>
-      </p:sp>
-      <p:sp>
-        <p:nvSpPr>
-          <p:cNvPr id="63" name="Rectangle 62"/>
-          <p:cNvSpPr/>
-          <p:nvPr/>
-        </p:nvSpPr>
-        <p:spPr>
-          <a:xfrm>
-            <a:off x="8083296" y="1874519"/>
-            <a:ext cx="3566160" cy="1417320"/>
-          </a:xfrm>
-          <a:prstGeom prst="rect">
-            <a:avLst/>
-          </a:prstGeom>
-          <a:solidFill>
-            <a:srgbClr val="FFFFFF"/>
-          </a:solidFill>
-          <a:ln w="9525">
-            <a:solidFill>
-              <a:srgbClr val="D9E2EC"/>
-            </a:solidFill>
-          </a:ln>
-        </p:spPr>
-        <p:style>
-          <a:lnRef idx="1">
-            <a:schemeClr val="accent1"/>
-          </a:lnRef>
-          <a:fillRef idx="3">
-            <a:schemeClr val="accent1"/>
-          </a:fillRef>
-          <a:effectRef idx="2">
-            <a:schemeClr val="accent1"/>
-          </a:effectRef>
-          <a:fontRef idx="minor">
-            <a:schemeClr val="lt1"/>
-          </a:fontRef>
-        </p:style>
-        <p:txBody>
-          <a:bodyPr rtlCol="0" anchor="ctr"/>
-          <a:lstStyle/>
-          <a:p>
-            <a:pPr algn="ctr"/>
-          </a:p>
-        </p:txBody>
-      </p:sp>
-      <p:sp>
-        <p:nvSpPr>
-          <p:cNvPr id="64" name="TextBox 63"/>
-          <p:cNvSpPr txBox="1"/>
-          <p:nvPr/>
-        </p:nvSpPr>
-        <p:spPr>
-          <a:xfrm>
-            <a:off x="8321040" y="2066543"/>
-            <a:ext cx="384048" cy="219456"/>
-          </a:xfrm>
-          <a:prstGeom prst="rect">
-            <a:avLst/>
-          </a:prstGeom>
-          <a:noFill/>
-        </p:spPr>
-        <p:txBody>
-          <a:bodyPr wrap="square" anchor="t" lIns="0" rIns="0" tIns="0" bIns="0">
-            <a:spAutoFit/>
-          </a:bodyPr>
-          <a:lstStyle/>
-          <a:p>
-            <a:pPr algn="l">
-              <a:lnSpc>
-                <a:spcPct val="100000"/>
-              </a:lnSpc>
-            </a:pPr>
-            <a:r>
-              <a:rPr sz="1000" b="1">
-                <a:solidFill>
-                  <a:srgbClr val="37AB94"/>
-                </a:solidFill>
-                <a:latin typeface="Aptos"/>
-              </a:rPr>
-              <a:t>03</a:t>
-            </a:r>
-          </a:p>
-        </p:txBody>
-      </p:sp>
-      <p:sp>
-        <p:nvSpPr>
-          <p:cNvPr id="65" name="TextBox 64"/>
-          <p:cNvSpPr txBox="1"/>
-          <p:nvPr/>
-        </p:nvSpPr>
-        <p:spPr>
-          <a:xfrm>
-            <a:off x="8814816" y="2048256"/>
-            <a:ext cx="2651760" cy="256032"/>
-          </a:xfrm>
-          <a:prstGeom prst="rect">
-            <a:avLst/>
-          </a:prstGeom>
-          <a:noFill/>
-        </p:spPr>
-        <p:txBody>
-          <a:bodyPr wrap="square" anchor="t" lIns="0" rIns="0" tIns="0" bIns="0">
-            <a:spAutoFit/>
-          </a:bodyPr>
-          <a:lstStyle/>
-          <a:p>
-            <a:pPr algn="l">
-              <a:lnSpc>
-                <a:spcPct val="100000"/>
-              </a:lnSpc>
-            </a:pPr>
-            <a:r>
-              <a:rPr sz="1150" b="1">
-                <a:solidFill>
-                  <a:srgbClr val="1A2948"/>
-                </a:solidFill>
-                <a:latin typeface="Aptos"/>
-              </a:rPr>
-              <a:t>Cobertura e escala</a:t>
-            </a:r>
-          </a:p>
-        </p:txBody>
-      </p:sp>
-      <p:sp>
-        <p:nvSpPr>
-          <p:cNvPr id="66" name="TextBox 65"/>
-          <p:cNvSpPr txBox="1"/>
-          <p:nvPr/>
-        </p:nvSpPr>
-        <p:spPr>
-          <a:xfrm>
-            <a:off x="8321040" y="2487168"/>
-            <a:ext cx="3090672" cy="960120"/>
-          </a:xfrm>
-          <a:prstGeom prst="rect">
-            <a:avLst/>
-          </a:prstGeom>
-          <a:noFill/>
-        </p:spPr>
-        <p:txBody>
-          <a:bodyPr wrap="square" anchor="t" lIns="0" rIns="0" tIns="0" bIns="0">
-            <a:spAutoFit/>
-          </a:bodyPr>
-          <a:lstStyle/>
-          <a:p>
-            <a:pPr algn="l">
-              <a:lnSpc>
-                <a:spcPct val="120000"/>
-              </a:lnSpc>
-            </a:pPr>
-            <a:r>
-              <a:rPr sz="900" b="0">
-                <a:solidFill>
-                  <a:srgbClr val="2D3748"/>
-                </a:solidFill>
-                <a:latin typeface="Aptos"/>
-              </a:rPr>
-              <a:t>Novas competências a cada publicação do DATASUS, sem intervenção manual, e a abertura do recorte para outras unidades da federação.</a:t>
-            </a:r>
-          </a:p>
-        </p:txBody>
-      </p:sp>
-      <p:sp>
-        <p:nvSpPr>
-          <p:cNvPr id="67" name="Rectangle 66"/>
-          <p:cNvSpPr/>
-          <p:nvPr/>
-        </p:nvSpPr>
-        <p:spPr>
-          <a:xfrm>
-            <a:off x="548640" y="3657600"/>
-            <a:ext cx="11091672" cy="1627632"/>
-          </a:xfrm>
-          <a:prstGeom prst="rect">
-            <a:avLst/>
-          </a:prstGeom>
-          <a:solidFill>
-            <a:srgbClr val="F5F8FC"/>
-          </a:solidFill>
-          <a:ln>
-            <a:noFill/>
-          </a:ln>
-        </p:spPr>
-        <p:style>
-          <a:lnRef idx="1">
-            <a:schemeClr val="accent1"/>
-          </a:lnRef>
-          <a:fillRef idx="3">
-            <a:schemeClr val="accent1"/>
-          </a:fillRef>
-          <a:effectRef idx="2">
-            <a:schemeClr val="accent1"/>
-          </a:effectRef>
-          <a:fontRef idx="minor">
-            <a:schemeClr val="lt1"/>
-          </a:fontRef>
-        </p:style>
-        <p:txBody>
-          <a:bodyPr rtlCol="0" anchor="ctr"/>
-          <a:lstStyle/>
-          <a:p>
-            <a:pPr algn="ctr"/>
-          </a:p>
-        </p:txBody>
-      </p:sp>
-      <p:sp>
-        <p:nvSpPr>
-          <p:cNvPr id="68" name="TextBox 67"/>
-          <p:cNvSpPr txBox="1"/>
-          <p:nvPr/>
-        </p:nvSpPr>
-        <p:spPr>
-          <a:xfrm>
-            <a:off x="786384" y="3877056"/>
-            <a:ext cx="3840480" cy="219456"/>
-          </a:xfrm>
-          <a:prstGeom prst="rect">
-            <a:avLst/>
-          </a:prstGeom>
-          <a:noFill/>
-        </p:spPr>
-        <p:txBody>
-          <a:bodyPr wrap="square" anchor="t" lIns="0" rIns="0" tIns="0" bIns="0">
-            <a:spAutoFit/>
-          </a:bodyPr>
-          <a:lstStyle/>
-          <a:p>
-            <a:pPr algn="l">
-              <a:lnSpc>
-                <a:spcPct val="100000"/>
-              </a:lnSpc>
-            </a:pPr>
-            <a:r>
-              <a:rPr sz="950" b="1">
-                <a:solidFill>
-                  <a:srgbClr val="37AB94"/>
-                </a:solidFill>
-                <a:latin typeface="Aptos"/>
-              </a:rPr>
-              <a:t>POR QUE AINDA NÃO PREVEMOS</a:t>
-            </a:r>
-          </a:p>
-        </p:txBody>
-      </p:sp>
-      <p:sp>
-        <p:nvSpPr>
-          <p:cNvPr id="69" name="TextBox 68"/>
-          <p:cNvSpPr txBox="1"/>
-          <p:nvPr/>
-        </p:nvSpPr>
-        <p:spPr>
-          <a:xfrm>
-            <a:off x="786384" y="4297680"/>
-            <a:ext cx="329184" cy="201168"/>
-          </a:xfrm>
-          <a:prstGeom prst="rect">
-            <a:avLst/>
-          </a:prstGeom>
-          <a:noFill/>
-        </p:spPr>
-        <p:txBody>
-          <a:bodyPr wrap="square" anchor="t" lIns="0" rIns="0" tIns="0" bIns="0">
-            <a:spAutoFit/>
-          </a:bodyPr>
-          <a:lstStyle/>
-          <a:p>
-            <a:pPr algn="l">
-              <a:lnSpc>
-                <a:spcPct val="100000"/>
-              </a:lnSpc>
-            </a:pPr>
-            <a:r>
-              <a:rPr sz="850" b="1">
-                <a:solidFill>
-                  <a:srgbClr val="37AB94"/>
-                </a:solidFill>
-                <a:latin typeface="Aptos"/>
-              </a:rPr>
-              <a:t>01</a:t>
-            </a:r>
-          </a:p>
-        </p:txBody>
-      </p:sp>
-      <p:sp>
-        <p:nvSpPr>
-          <p:cNvPr id="70" name="TextBox 69"/>
-          <p:cNvSpPr txBox="1"/>
-          <p:nvPr/>
-        </p:nvSpPr>
-        <p:spPr>
-          <a:xfrm>
-            <a:off x="1152144" y="4279392"/>
-            <a:ext cx="3017520" cy="1005840"/>
-          </a:xfrm>
-          <a:prstGeom prst="rect">
-            <a:avLst/>
-          </a:prstGeom>
-          <a:noFill/>
-        </p:spPr>
-        <p:txBody>
-          <a:bodyPr wrap="square" anchor="t" lIns="0" rIns="0" tIns="0" bIns="0">
-            <a:spAutoFit/>
-          </a:bodyPr>
-          <a:lstStyle/>
-          <a:p>
-            <a:pPr algn="l">
-              <a:lnSpc>
-                <a:spcPct val="120000"/>
-              </a:lnSpc>
-            </a:pPr>
-            <a:r>
-              <a:rPr sz="919" b="0">
-                <a:solidFill>
-                  <a:srgbClr val="2D3748"/>
-                </a:solidFill>
-                <a:latin typeface="Aptos"/>
-              </a:rPr>
-              <a:t>Prever sobre dado administrativo com reapresentação retroativa produz número bonito e falso: a competência continua mudando depois de publicada.</a:t>
-            </a:r>
-          </a:p>
-        </p:txBody>
-      </p:sp>
-      <p:sp>
-        <p:nvSpPr>
-          <p:cNvPr id="71" name="TextBox 70"/>
-          <p:cNvSpPr txBox="1"/>
-          <p:nvPr/>
-        </p:nvSpPr>
-        <p:spPr>
-          <a:xfrm>
-            <a:off x="4425696" y="4297680"/>
-            <a:ext cx="329184" cy="201168"/>
-          </a:xfrm>
-          <a:prstGeom prst="rect">
-            <a:avLst/>
-          </a:prstGeom>
-          <a:noFill/>
-        </p:spPr>
-        <p:txBody>
-          <a:bodyPr wrap="square" anchor="t" lIns="0" rIns="0" tIns="0" bIns="0">
-            <a:spAutoFit/>
-          </a:bodyPr>
-          <a:lstStyle/>
-          <a:p>
-            <a:pPr algn="l">
-              <a:lnSpc>
-                <a:spcPct val="100000"/>
-              </a:lnSpc>
-            </a:pPr>
-            <a:r>
-              <a:rPr sz="850" b="1">
-                <a:solidFill>
-                  <a:srgbClr val="37AB94"/>
-                </a:solidFill>
-                <a:latin typeface="Aptos"/>
-              </a:rPr>
-              <a:t>02</a:t>
-            </a:r>
-          </a:p>
-        </p:txBody>
-      </p:sp>
-      <p:sp>
-        <p:nvSpPr>
-          <p:cNvPr id="72" name="TextBox 71"/>
-          <p:cNvSpPr txBox="1"/>
-          <p:nvPr/>
-        </p:nvSpPr>
-        <p:spPr>
-          <a:xfrm>
-            <a:off x="4791456" y="4279392"/>
-            <a:ext cx="3017520" cy="1005840"/>
-          </a:xfrm>
-          <a:prstGeom prst="rect">
-            <a:avLst/>
-          </a:prstGeom>
-          <a:noFill/>
-        </p:spPr>
-        <p:txBody>
-          <a:bodyPr wrap="square" anchor="t" lIns="0" rIns="0" tIns="0" bIns="0">
-            <a:spAutoFit/>
-          </a:bodyPr>
-          <a:lstStyle/>
-          <a:p>
-            <a:pPr algn="l">
-              <a:lnSpc>
-                <a:spcPct val="120000"/>
-              </a:lnSpc>
-            </a:pPr>
-            <a:r>
-              <a:rPr sz="919" b="0">
-                <a:solidFill>
-                  <a:srgbClr val="2D3748"/>
-                </a:solidFill>
-                <a:latin typeface="Aptos"/>
-              </a:rPr>
-              <a:t>A comparação sazonal contra dois anos-base e o benchmark entre pares elegíveis respondem à mesma necessidade, sem fingir uma precisão que o dado não tem.</a:t>
-            </a:r>
-          </a:p>
-        </p:txBody>
-      </p:sp>
-      <p:sp>
-        <p:nvSpPr>
-          <p:cNvPr id="73" name="TextBox 72"/>
-          <p:cNvSpPr txBox="1"/>
-          <p:nvPr/>
-        </p:nvSpPr>
-        <p:spPr>
-          <a:xfrm>
-            <a:off x="8065008" y="4297680"/>
-            <a:ext cx="329184" cy="201168"/>
-          </a:xfrm>
-          <a:prstGeom prst="rect">
-            <a:avLst/>
-          </a:prstGeom>
-          <a:noFill/>
-        </p:spPr>
-        <p:txBody>
-          <a:bodyPr wrap="square" anchor="t" lIns="0" rIns="0" tIns="0" bIns="0">
-            <a:spAutoFit/>
-          </a:bodyPr>
-          <a:lstStyle/>
-          <a:p>
-            <a:pPr algn="l">
-              <a:lnSpc>
-                <a:spcPct val="100000"/>
-              </a:lnSpc>
-            </a:pPr>
-            <a:r>
-              <a:rPr sz="850" b="1">
-                <a:solidFill>
-                  <a:srgbClr val="37AB94"/>
-                </a:solidFill>
-                <a:latin typeface="Aptos"/>
-              </a:rPr>
-              <a:t>03</a:t>
-            </a:r>
-          </a:p>
-        </p:txBody>
-      </p:sp>
-      <p:sp>
-        <p:nvSpPr>
-          <p:cNvPr id="74" name="TextBox 73"/>
-          <p:cNvSpPr txBox="1"/>
-          <p:nvPr/>
-        </p:nvSpPr>
-        <p:spPr>
-          <a:xfrm>
-            <a:off x="8430768" y="4279392"/>
-            <a:ext cx="3017520" cy="1005840"/>
-          </a:xfrm>
-          <a:prstGeom prst="rect">
-            <a:avLst/>
-          </a:prstGeom>
-          <a:noFill/>
-        </p:spPr>
-        <p:txBody>
-          <a:bodyPr wrap="square" anchor="t" lIns="0" rIns="0" tIns="0" bIns="0">
-            <a:spAutoFit/>
-          </a:bodyPr>
-          <a:lstStyle/>
-          <a:p>
-            <a:pPr algn="l">
-              <a:lnSpc>
-                <a:spcPct val="120000"/>
-              </a:lnSpc>
-            </a:pPr>
-            <a:r>
-              <a:rPr sz="919" b="0">
-                <a:solidFill>
-                  <a:srgbClr val="2D3748"/>
-                </a:solidFill>
-                <a:latin typeface="Aptos"/>
-              </a:rPr>
-              <a:t>O caminho até a previsão passa por série mais longa e validação com usuários. Está aqui como próximo passo declarado, e não como lacuna.</a:t>
-            </a:r>
-          </a:p>
-        </p:txBody>
-      </p:sp>
-      <p:sp>
-        <p:nvSpPr>
-          <p:cNvPr id="75" name="TextBox 74"/>
-          <p:cNvSpPr txBox="1"/>
-          <p:nvPr/>
-        </p:nvSpPr>
-        <p:spPr>
-          <a:xfrm>
-            <a:off x="548640" y="5623560"/>
-            <a:ext cx="11091672" cy="274320"/>
-          </a:xfrm>
-          <a:prstGeom prst="rect">
-            <a:avLst/>
-          </a:prstGeom>
-          <a:noFill/>
-        </p:spPr>
-        <p:txBody>
-          <a:bodyPr wrap="square" anchor="t" lIns="0" rIns="0" tIns="0" bIns="0">
-            <a:spAutoFit/>
-          </a:bodyPr>
-          <a:lstStyle/>
-          <a:p>
-            <a:pPr algn="l">
-              <a:lnSpc>
-                <a:spcPct val="100000"/>
-              </a:lnSpc>
-            </a:pPr>
-            <a:r>
-              <a:rPr sz="880" b="0">
-                <a:solidFill>
-                  <a:srgbClr val="718096"/>
-                </a:solidFill>
-                <a:latin typeface="Aptos"/>
-              </a:rPr>
-              <a:t>Nada disso é componente de software: é ampliação de evidência. A arquitetura entregue já sustenta os três caminhos sem reescrita.</a:t>
-            </a:r>
-          </a:p>
-        </p:txBody>
-      </p:sp>
-    </p:spTree>
-  </p:cSld>
-  <p:clrMapOvr>
-    <a:masterClrMapping/>
-  </p:clrMapOvr>
-</p:sld>
-</file>
-
-<file path=ppt/slides/slide23.xml><?xml version="1.0" encoding="utf-8"?>
+<file path=ppt/slides/slide21.xml><?xml version="1.0" encoding="utf-8"?>
 <p:sld xmlns:a="http://schemas.openxmlformats.org/drawingml/2006/main" xmlns:r="http://schemas.openxmlformats.org/officeDocument/2006/relationships" xmlns:p="http://schemas.openxmlformats.org/presentationml/2006/main">
   <p:cSld name="Slide 30">
     <p:bg>

--- a/docs/entrega_sprint_2/apresentacao/EC_Sprint_2_1TSCO_EvidenciasConstrucao_MedFlow_OmegaUrbanTech.pptx
+++ b/docs/entrega_sprint_2/apresentacao/EC_Sprint_2_1TSCO_EvidenciasConstrucao_MedFlow_OmegaUrbanTech.pptx
@@ -23410,7 +23410,65 @@
                 <a:ea typeface="Calibri" pitchFamily="34" charset="-122"/>
                 <a:cs typeface="Calibri" pitchFamily="34" charset="-120"/>
               </a:rPr>
-              <a:t>Vídeo pitch: youtu.be/Hum7fgOejyI    ·    github.com/Lucas-D-S-1/medflow    ·    lucas-d-s-1.github.io/medflow</a:t>
+              <a:t xml:space="preserve">Vídeo pitch: </a:t>
+            </a:r>
+            <a:r>
+              <a:rPr lang="en-US" sz="950" dirty="0">
+                <a:solidFill>
+                  <a:srgbClr val="37AB94"/>
+                </a:solidFill>
+                <a:latin typeface="Aptos" pitchFamily="34" charset="0"/>
+                <a:ea typeface="Calibri" pitchFamily="34" charset="-122"/>
+                <a:cs typeface="Calibri" pitchFamily="34" charset="-120"/>
+                <a:hlinkClick r:id="rId4"/>
+              </a:rPr>
+              <a:t>youtu.be/Hum7fgOejyI</a:t>
+            </a:r>
+            <a:r>
+              <a:rPr lang="en-US" sz="950" dirty="0">
+                <a:solidFill>
+                  <a:srgbClr val="37AB94"/>
+                </a:solidFill>
+                <a:latin typeface="Aptos" pitchFamily="34" charset="0"/>
+                <a:ea typeface="Calibri" pitchFamily="34" charset="-122"/>
+                <a:cs typeface="Calibri" pitchFamily="34" charset="-120"/>
+              </a:rPr>
+              <a:t xml:space="preserve">    ·    </a:t>
+            </a:r>
+            <a:r>
+              <a:rPr lang="en-US" sz="950" dirty="0">
+                <a:solidFill>
+                  <a:srgbClr val="37AB94"/>
+                </a:solidFill>
+                <a:latin typeface="Aptos" pitchFamily="34" charset="0"/>
+                <a:ea typeface="Calibri" pitchFamily="34" charset="-122"/>
+                <a:cs typeface="Calibri" pitchFamily="34" charset="-120"/>
+                <a:hlinkClick r:id="rId5"/>
+              </a:rPr>
+              <a:t>github.com/Lucas-D-S-1/medflow</a:t>
+            </a:r>
+            <a:r>
+              <a:rPr lang="en-US" sz="950" dirty="0">
+                <a:solidFill>
+                  <a:srgbClr val="37AB94"/>
+                </a:solidFill>
+                <a:latin typeface="Aptos" pitchFamily="34" charset="0"/>
+                <a:ea typeface="Calibri" pitchFamily="34" charset="-122"/>
+                <a:cs typeface="Calibri" pitchFamily="34" charset="-120"/>
+              </a:rPr>
+              <a:t xml:space="preserve">    ·    </a:t>
+            </a:r>
+            <a:r>
+              <a:rPr lang="en-US" sz="950" dirty="0">
+                <a:solidFill>
+                  <a:srgbClr val="37AB94"/>
+                </a:solidFill>
+                <a:latin typeface="Aptos" pitchFamily="34" charset="0"/>
+                <a:ea typeface="Calibri" pitchFamily="34" charset="-122"/>
+                <a:cs typeface="Calibri" pitchFamily="34" charset="-120"/>
+                <a:hlinkClick r:id="rId6"/>
+              </a:rPr>
+              <a:t>lucas-d-s-1.github.io/medflow</a:t>
             </a:r>
             <a:endParaRPr lang="en-US" sz="950" dirty="0"/>
           </a:p>
